--- a/presentations/Поражения термическими факторами.pptx
+++ b/presentations/Поражения термическими факторами.pptx
@@ -16,6 +16,10 @@
     <p:sldId id="264" r:id="rId15"/>
     <p:sldId id="265" r:id="rId16"/>
     <p:sldId id="266" r:id="rId17"/>
+    <p:sldId id="267" r:id="rId18"/>
+    <p:sldId id="268" r:id="rId19"/>
+    <p:sldId id="269" r:id="rId20"/>
+    <p:sldId id="270" r:id="rId21"/>
   </p:sldIdLst>
   <p:sldSz cx="12191695" cy="6858000" type="screen4x3"/>
   <p:notesSz cx="6858000" cy="9144000"/>
@@ -3438,7 +3442,7 @@
                 <a:ea typeface="Open Sans"/>
                 <a:cs typeface="Open Sans"/>
               </a:rPr>
-              <a:t>ПАМЯТКА</a:t>
+              <a:t>ОТМОРОЖЕНИЕ: РАСПОЗНАТЬ И ЗАЩИТИТЬ</a:t>
             </a:r>
           </a:p>
         </p:txBody>
@@ -3603,30 +3607,217 @@
           </a:p>
         </p:txBody>
       </p:sp>
-      <p:pic>
-        <p:nvPicPr>
-          <p:cNvPr id="8" name="Picture 7" descr="pamyatka-tema4-termicheskie-16x9.png"/>
-          <p:cNvPicPr>
-            <a:picLocks noChangeAspect="1"/>
-          </p:cNvPicPr>
-          <p:nvPr/>
-        </p:nvPicPr>
-        <p:blipFill>
-          <a:blip r:embed="rId2"/>
-          <a:stretch>
-            <a:fillRect/>
-          </a:stretch>
-        </p:blipFill>
-        <p:spPr>
-          <a:xfrm>
-            <a:off x="2300000" y="1400000"/>
-            <a:ext cx="7800000" cy="5200000"/>
-          </a:xfrm>
-          <a:prstGeom prst="rect">
-            <a:avLst/>
-          </a:prstGeom>
-        </p:spPr>
-      </p:pic>
+      <p:sp>
+        <p:nvSpPr>
+          <p:cNvPr id="8" name="TextBox 7"/>
+          <p:cNvSpPr txBox="1"/>
+          <p:nvPr/>
+        </p:nvSpPr>
+        <p:spPr>
+          <a:xfrm>
+            <a:off x="700000" y="1450000"/>
+            <a:ext cx="11000000" cy="4000000"/>
+          </a:xfrm>
+          <a:prstGeom prst="rect">
+            <a:avLst/>
+          </a:prstGeom>
+          <a:noFill/>
+        </p:spPr>
+        <p:txBody>
+          <a:bodyPr wrap="square">
+            <a:spAutoFit/>
+          </a:bodyPr>
+          <a:lstStyle/>
+          <a:p>
+            <a:pPr algn="l">
+              <a:spcAft>
+                <a:spcPts val="800"/>
+              </a:spcAft>
+            </a:pPr>
+            <a:r>
+              <a:rPr sz="1400" b="0">
+                <a:solidFill>
+                  <a:srgbClr val="333333"/>
+                </a:solidFill>
+                <a:latin typeface="Open Sans"/>
+                <a:ea typeface="Open Sans"/>
+                <a:cs typeface="Open Sans"/>
+              </a:rPr>
+              <a:t>•  Кожа бледнеет, немеет; появляются покалывание, боль или потеря чувствительности.</a:t>
+            </a:r>
+          </a:p>
+          <a:p>
+            <a:pPr algn="l">
+              <a:spcAft>
+                <a:spcPts val="800"/>
+              </a:spcAft>
+            </a:pPr>
+            <a:r>
+              <a:rPr sz="1400" b="0">
+                <a:solidFill>
+                  <a:srgbClr val="333333"/>
+                </a:solidFill>
+                <a:latin typeface="Open Sans"/>
+                <a:ea typeface="Open Sans"/>
+                <a:cs typeface="Open Sans"/>
+              </a:rPr>
+              <a:t>•  Перенесите пострадавшего в защищенное от холода место.</a:t>
+            </a:r>
+          </a:p>
+          <a:p>
+            <a:pPr algn="l">
+              <a:spcAft>
+                <a:spcPts val="800"/>
+              </a:spcAft>
+            </a:pPr>
+            <a:r>
+              <a:rPr sz="1400" b="0">
+                <a:solidFill>
+                  <a:srgbClr val="333333"/>
+                </a:solidFill>
+                <a:latin typeface="Open Sans"/>
+                <a:ea typeface="Open Sans"/>
+                <a:cs typeface="Open Sans"/>
+              </a:rPr>
+              <a:t>•  Снимите мокрую и тесную одежду, украшения, если они удаляются свободно.</a:t>
+            </a:r>
+          </a:p>
+          <a:p>
+            <a:pPr algn="l">
+              <a:spcAft>
+                <a:spcPts val="800"/>
+              </a:spcAft>
+            </a:pPr>
+            <a:r>
+              <a:rPr sz="1400" b="0">
+                <a:solidFill>
+                  <a:srgbClr val="333333"/>
+                </a:solidFill>
+                <a:latin typeface="Open Sans"/>
+                <a:ea typeface="Open Sans"/>
+                <a:cs typeface="Open Sans"/>
+              </a:rPr>
+              <a:t>•  Наложите сухую объемную теплоизолирующую повязку.</a:t>
+            </a:r>
+          </a:p>
+          <a:p>
+            <a:pPr algn="l">
+              <a:spcAft>
+                <a:spcPts val="800"/>
+              </a:spcAft>
+            </a:pPr>
+            <a:r>
+              <a:rPr sz="1400" b="0">
+                <a:solidFill>
+                  <a:srgbClr val="333333"/>
+                </a:solidFill>
+                <a:latin typeface="Open Sans"/>
+                <a:ea typeface="Open Sans"/>
+                <a:cs typeface="Open Sans"/>
+              </a:rPr>
+              <a:t>•  Обездвижьте поврежденную часть и исключите нагрузку на отмороженную стопу.</a:t>
+            </a:r>
+          </a:p>
+          <a:p>
+            <a:pPr algn="l">
+              <a:spcAft>
+                <a:spcPts val="800"/>
+              </a:spcAft>
+            </a:pPr>
+            <a:r>
+              <a:rPr sz="1400" b="0">
+                <a:solidFill>
+                  <a:srgbClr val="333333"/>
+                </a:solidFill>
+                <a:latin typeface="Open Sans"/>
+                <a:ea typeface="Open Sans"/>
+                <a:cs typeface="Open Sans"/>
+              </a:rPr>
+              <a:t>•  Не растирайте снегом или руками, не массируйте и не согревайте у огня.</a:t>
+            </a:r>
+          </a:p>
+        </p:txBody>
+      </p:sp>
+      <p:sp>
+        <p:nvSpPr>
+          <p:cNvPr id="9" name="Rounded Rectangle 8"/>
+          <p:cNvSpPr/>
+          <p:nvPr/>
+        </p:nvSpPr>
+        <p:spPr>
+          <a:xfrm>
+            <a:off x="700000" y="5600000"/>
+            <a:ext cx="11000000" cy="1000000"/>
+          </a:xfrm>
+          <a:prstGeom prst="roundRect">
+            <a:avLst/>
+          </a:prstGeom>
+          <a:solidFill>
+            <a:srgbClr val="F5F0E1"/>
+          </a:solidFill>
+          <a:ln>
+            <a:noFill/>
+          </a:ln>
+        </p:spPr>
+        <p:style>
+          <a:lnRef idx="1">
+            <a:schemeClr val="accent1"/>
+          </a:lnRef>
+          <a:fillRef idx="3">
+            <a:schemeClr val="accent1"/>
+          </a:fillRef>
+          <a:effectRef idx="2">
+            <a:schemeClr val="accent1"/>
+          </a:effectRef>
+          <a:fontRef idx="minor">
+            <a:schemeClr val="lt1"/>
+          </a:fontRef>
+        </p:style>
+        <p:txBody>
+          <a:bodyPr rtlCol="0" anchor="ctr"/>
+          <a:lstStyle/>
+          <a:p>
+            <a:pPr algn="ctr"/>
+          </a:p>
+        </p:txBody>
+      </p:sp>
+      <p:sp>
+        <p:nvSpPr>
+          <p:cNvPr id="10" name="TextBox 9"/>
+          <p:cNvSpPr txBox="1"/>
+          <p:nvPr/>
+        </p:nvSpPr>
+        <p:spPr>
+          <a:xfrm>
+            <a:off x="950000" y="5800000"/>
+            <a:ext cx="10500000" cy="600000"/>
+          </a:xfrm>
+          <a:prstGeom prst="rect">
+            <a:avLst/>
+          </a:prstGeom>
+          <a:noFill/>
+        </p:spPr>
+        <p:txBody>
+          <a:bodyPr wrap="square" anchor="ctr">
+            <a:spAutoFit/>
+          </a:bodyPr>
+          <a:lstStyle/>
+          <a:p>
+            <a:pPr algn="l"/>
+            <a:r>
+              <a:rPr sz="1200" b="0">
+                <a:solidFill>
+                  <a:srgbClr val="333333"/>
+                </a:solidFill>
+                <a:latin typeface="Open Sans"/>
+                <a:ea typeface="Open Sans"/>
+                <a:cs typeface="Open Sans"/>
+              </a:rPr>
+              <a:t>Не начинайте активное отогревание, если возможно повторное замерзание поврежденного участка.</a:t>
+            </a:r>
+          </a:p>
+        </p:txBody>
+      </p:sp>
     </p:spTree>
   </p:cSld>
   <p:clrMapOvr>
@@ -3654,6 +3845,2304 @@
         <p:spPr>
           <a:xfrm>
             <a:off x="0" y="0"/>
+            <a:ext cx="12191695" cy="6858000"/>
+          </a:xfrm>
+          <a:prstGeom prst="rect">
+            <a:avLst/>
+          </a:prstGeom>
+          <a:solidFill>
+            <a:srgbClr val="FFFFFF"/>
+          </a:solidFill>
+          <a:ln>
+            <a:noFill/>
+          </a:ln>
+        </p:spPr>
+        <p:style>
+          <a:lnRef idx="1">
+            <a:schemeClr val="accent1"/>
+          </a:lnRef>
+          <a:fillRef idx="3">
+            <a:schemeClr val="accent1"/>
+          </a:fillRef>
+          <a:effectRef idx="2">
+            <a:schemeClr val="accent1"/>
+          </a:effectRef>
+          <a:fontRef idx="minor">
+            <a:schemeClr val="lt1"/>
+          </a:fontRef>
+        </p:style>
+        <p:txBody>
+          <a:bodyPr rtlCol="0" anchor="ctr"/>
+          <a:lstStyle/>
+          <a:p>
+            <a:pPr algn="ctr"/>
+          </a:p>
+        </p:txBody>
+      </p:sp>
+      <p:sp>
+        <p:nvSpPr>
+          <p:cNvPr id="3" name="TextBox 2"/>
+          <p:cNvSpPr txBox="1"/>
+          <p:nvPr/>
+        </p:nvSpPr>
+        <p:spPr>
+          <a:xfrm>
+            <a:off x="700000" y="250000"/>
+            <a:ext cx="11200000" cy="550000"/>
+          </a:xfrm>
+          <a:prstGeom prst="rect">
+            <a:avLst/>
+          </a:prstGeom>
+          <a:noFill/>
+        </p:spPr>
+        <p:txBody>
+          <a:bodyPr wrap="square" anchor="t">
+            <a:spAutoFit/>
+          </a:bodyPr>
+          <a:lstStyle/>
+          <a:p>
+            <a:pPr algn="l"/>
+            <a:r>
+              <a:rPr sz="2200" b="1">
+                <a:solidFill>
+                  <a:srgbClr val="333333"/>
+                </a:solidFill>
+                <a:latin typeface="Open Sans"/>
+                <a:ea typeface="Open Sans"/>
+                <a:cs typeface="Open Sans"/>
+              </a:rPr>
+              <a:t>ПЕРЕОХЛАЖДЕНИЕ: ПОСТЕПЕННОЕ СОГРЕВАНИЕ</a:t>
+            </a:r>
+          </a:p>
+        </p:txBody>
+      </p:sp>
+      <p:sp>
+        <p:nvSpPr>
+          <p:cNvPr id="4" name="Rectangle 3"/>
+          <p:cNvSpPr/>
+          <p:nvPr/>
+        </p:nvSpPr>
+        <p:spPr>
+          <a:xfrm>
+            <a:off x="700000" y="850000"/>
+            <a:ext cx="9000000" cy="28000"/>
+          </a:xfrm>
+          <a:prstGeom prst="rect">
+            <a:avLst/>
+          </a:prstGeom>
+          <a:solidFill>
+            <a:srgbClr val="555555"/>
+          </a:solidFill>
+          <a:ln>
+            <a:noFill/>
+          </a:ln>
+        </p:spPr>
+        <p:style>
+          <a:lnRef idx="1">
+            <a:schemeClr val="accent1"/>
+          </a:lnRef>
+          <a:fillRef idx="3">
+            <a:schemeClr val="accent1"/>
+          </a:fillRef>
+          <a:effectRef idx="2">
+            <a:schemeClr val="accent1"/>
+          </a:effectRef>
+          <a:fontRef idx="minor">
+            <a:schemeClr val="lt1"/>
+          </a:fontRef>
+        </p:style>
+        <p:txBody>
+          <a:bodyPr rtlCol="0" anchor="ctr"/>
+          <a:lstStyle/>
+          <a:p>
+            <a:pPr algn="ctr"/>
+          </a:p>
+        </p:txBody>
+      </p:sp>
+      <p:sp>
+        <p:nvSpPr>
+          <p:cNvPr id="5" name="TextBox 4"/>
+          <p:cNvSpPr txBox="1"/>
+          <p:nvPr/>
+        </p:nvSpPr>
+        <p:spPr>
+          <a:xfrm>
+            <a:off x="700000" y="920000"/>
+            <a:ext cx="11000000" cy="350000"/>
+          </a:xfrm>
+          <a:prstGeom prst="rect">
+            <a:avLst/>
+          </a:prstGeom>
+          <a:noFill/>
+        </p:spPr>
+        <p:txBody>
+          <a:bodyPr wrap="square" anchor="t">
+            <a:spAutoFit/>
+          </a:bodyPr>
+          <a:lstStyle/>
+          <a:p>
+            <a:pPr algn="l"/>
+            <a:r>
+              <a:rPr sz="1200" b="0">
+                <a:solidFill>
+                  <a:srgbClr val="666666"/>
+                </a:solidFill>
+                <a:latin typeface="Open Sans"/>
+                <a:ea typeface="Open Sans"/>
+                <a:cs typeface="Open Sans"/>
+              </a:rPr>
+              <a:t>Оказание первой помощи при травмах, ранениях и поражениях, прочих состояниях</a:t>
+            </a:r>
+          </a:p>
+        </p:txBody>
+      </p:sp>
+      <p:sp>
+        <p:nvSpPr>
+          <p:cNvPr id="6" name="Rectangle 5"/>
+          <p:cNvSpPr/>
+          <p:nvPr/>
+        </p:nvSpPr>
+        <p:spPr>
+          <a:xfrm>
+            <a:off x="0" y="2800000"/>
+            <a:ext cx="420000" cy="420000"/>
+          </a:xfrm>
+          <a:prstGeom prst="rect">
+            <a:avLst/>
+          </a:prstGeom>
+          <a:solidFill>
+            <a:srgbClr val="555555"/>
+          </a:solidFill>
+          <a:ln>
+            <a:noFill/>
+          </a:ln>
+        </p:spPr>
+        <p:style>
+          <a:lnRef idx="1">
+            <a:schemeClr val="accent1"/>
+          </a:lnRef>
+          <a:fillRef idx="3">
+            <a:schemeClr val="accent1"/>
+          </a:fillRef>
+          <a:effectRef idx="2">
+            <a:schemeClr val="accent1"/>
+          </a:effectRef>
+          <a:fontRef idx="minor">
+            <a:schemeClr val="lt1"/>
+          </a:fontRef>
+        </p:style>
+        <p:txBody>
+          <a:bodyPr rtlCol="0" anchor="ctr"/>
+          <a:lstStyle/>
+          <a:p>
+            <a:pPr algn="ctr"/>
+          </a:p>
+        </p:txBody>
+      </p:sp>
+      <p:sp>
+        <p:nvSpPr>
+          <p:cNvPr id="7" name="TextBox 6"/>
+          <p:cNvSpPr txBox="1"/>
+          <p:nvPr/>
+        </p:nvSpPr>
+        <p:spPr>
+          <a:xfrm>
+            <a:off x="0" y="2800000"/>
+            <a:ext cx="420000" cy="420000"/>
+          </a:xfrm>
+          <a:prstGeom prst="rect">
+            <a:avLst/>
+          </a:prstGeom>
+          <a:noFill/>
+        </p:spPr>
+        <p:txBody>
+          <a:bodyPr wrap="square" anchor="ctr">
+            <a:spAutoFit/>
+          </a:bodyPr>
+          <a:lstStyle/>
+          <a:p>
+            <a:pPr algn="ctr"/>
+            <a:r>
+              <a:rPr sz="1400" b="1">
+                <a:solidFill>
+                  <a:srgbClr val="FFFFFF"/>
+                </a:solidFill>
+                <a:latin typeface="Open Sans"/>
+                <a:ea typeface="Open Sans"/>
+                <a:cs typeface="Open Sans"/>
+              </a:rPr>
+              <a:t>11</a:t>
+            </a:r>
+          </a:p>
+        </p:txBody>
+      </p:sp>
+      <p:sp>
+        <p:nvSpPr>
+          <p:cNvPr id="8" name="Rectangle 7"/>
+          <p:cNvSpPr/>
+          <p:nvPr/>
+        </p:nvSpPr>
+        <p:spPr>
+          <a:xfrm>
+            <a:off x="500000" y="1450000"/>
+            <a:ext cx="5200000" cy="4000000"/>
+          </a:xfrm>
+          <a:prstGeom prst="rect">
+            <a:avLst/>
+          </a:prstGeom>
+          <a:solidFill>
+            <a:srgbClr val="FFFFFF"/>
+          </a:solidFill>
+          <a:ln w="12700">
+            <a:solidFill>
+              <a:srgbClr val="999999"/>
+            </a:solidFill>
+          </a:ln>
+        </p:spPr>
+        <p:style>
+          <a:lnRef idx="1">
+            <a:schemeClr val="accent1"/>
+          </a:lnRef>
+          <a:fillRef idx="3">
+            <a:schemeClr val="accent1"/>
+          </a:fillRef>
+          <a:effectRef idx="2">
+            <a:schemeClr val="accent1"/>
+          </a:effectRef>
+          <a:fontRef idx="minor">
+            <a:schemeClr val="lt1"/>
+          </a:fontRef>
+        </p:style>
+        <p:txBody>
+          <a:bodyPr rtlCol="0" anchor="ctr"/>
+          <a:lstStyle/>
+          <a:p>
+            <a:pPr algn="ctr"/>
+          </a:p>
+        </p:txBody>
+      </p:sp>
+      <p:sp>
+        <p:nvSpPr>
+          <p:cNvPr id="9" name="TextBox 8"/>
+          <p:cNvSpPr txBox="1"/>
+          <p:nvPr/>
+        </p:nvSpPr>
+        <p:spPr>
+          <a:xfrm>
+            <a:off x="500000" y="1450000"/>
+            <a:ext cx="5200000" cy="4000000"/>
+          </a:xfrm>
+          <a:prstGeom prst="rect">
+            <a:avLst/>
+          </a:prstGeom>
+          <a:noFill/>
+        </p:spPr>
+        <p:txBody>
+          <a:bodyPr wrap="square" anchor="ctr">
+            <a:spAutoFit/>
+          </a:bodyPr>
+          <a:lstStyle/>
+          <a:p>
+            <a:pPr algn="ctr"/>
+            <a:r>
+              <a:rPr sz="1100" b="0">
+                <a:solidFill>
+                  <a:srgbClr val="666666"/>
+                </a:solidFill>
+                <a:latin typeface="Open Sans"/>
+                <a:ea typeface="Open Sans"/>
+                <a:cs typeface="Open Sans"/>
+              </a:rPr>
+              <a:t>[fig77.jpeg]</a:t>
+            </a:r>
+          </a:p>
+        </p:txBody>
+      </p:sp>
+      <p:sp>
+        <p:nvSpPr>
+          <p:cNvPr id="10" name="TextBox 9"/>
+          <p:cNvSpPr txBox="1"/>
+          <p:nvPr/>
+        </p:nvSpPr>
+        <p:spPr>
+          <a:xfrm>
+            <a:off x="6000000" y="1450000"/>
+            <a:ext cx="6200000" cy="3800000"/>
+          </a:xfrm>
+          <a:prstGeom prst="rect">
+            <a:avLst/>
+          </a:prstGeom>
+          <a:noFill/>
+        </p:spPr>
+        <p:txBody>
+          <a:bodyPr wrap="square">
+            <a:spAutoFit/>
+          </a:bodyPr>
+          <a:lstStyle/>
+          <a:p>
+            <a:pPr algn="l">
+              <a:spcAft>
+                <a:spcPts val="800"/>
+              </a:spcAft>
+            </a:pPr>
+            <a:r>
+              <a:rPr sz="1300" b="0">
+                <a:solidFill>
+                  <a:srgbClr val="333333"/>
+                </a:solidFill>
+                <a:latin typeface="Open Sans"/>
+                <a:ea typeface="Open Sans"/>
+                <a:cs typeface="Open Sans"/>
+              </a:rPr>
+              <a:t>•  Ранние признаки: дрожь, бледность, неловкость движений и замедленная речь.</a:t>
+            </a:r>
+          </a:p>
+          <a:p>
+            <a:pPr algn="l">
+              <a:spcAft>
+                <a:spcPts val="800"/>
+              </a:spcAft>
+            </a:pPr>
+            <a:r>
+              <a:rPr sz="1300" b="0">
+                <a:solidFill>
+                  <a:srgbClr val="333333"/>
+                </a:solidFill>
+                <a:latin typeface="Open Sans"/>
+                <a:ea typeface="Open Sans"/>
+                <a:cs typeface="Open Sans"/>
+              </a:rPr>
+              <a:t>•  При ухудшении дрожь может прекратиться, нарастают сонливость и спутанность.</a:t>
+            </a:r>
+          </a:p>
+          <a:p>
+            <a:pPr algn="l">
+              <a:spcAft>
+                <a:spcPts val="800"/>
+              </a:spcAft>
+            </a:pPr>
+            <a:r>
+              <a:rPr sz="1300" b="0">
+                <a:solidFill>
+                  <a:srgbClr val="333333"/>
+                </a:solidFill>
+                <a:latin typeface="Open Sans"/>
+                <a:ea typeface="Open Sans"/>
+                <a:cs typeface="Open Sans"/>
+              </a:rPr>
+              <a:t>•  Переместите человека в тепло, изолируйте от земли и замените мокрую одежду.</a:t>
+            </a:r>
+          </a:p>
+          <a:p>
+            <a:pPr algn="l">
+              <a:spcAft>
+                <a:spcPts val="800"/>
+              </a:spcAft>
+            </a:pPr>
+            <a:r>
+              <a:rPr sz="1300" b="0">
+                <a:solidFill>
+                  <a:srgbClr val="333333"/>
+                </a:solidFill>
+                <a:latin typeface="Open Sans"/>
+                <a:ea typeface="Open Sans"/>
+                <a:cs typeface="Open Sans"/>
+              </a:rPr>
+              <a:t>•  Укутайте одеялами, особенно туловище, шею и голову; согревайте постепенно.</a:t>
+            </a:r>
+          </a:p>
+          <a:p>
+            <a:pPr algn="l">
+              <a:spcAft>
+                <a:spcPts val="800"/>
+              </a:spcAft>
+            </a:pPr>
+            <a:r>
+              <a:rPr sz="1300" b="0">
+                <a:solidFill>
+                  <a:srgbClr val="333333"/>
+                </a:solidFill>
+                <a:latin typeface="Open Sans"/>
+                <a:ea typeface="Open Sans"/>
+                <a:cs typeface="Open Sans"/>
+              </a:rPr>
+              <a:t>•  Теплое сладкое питье разрешено только при полном сознании и сохраненном глотании.</a:t>
+            </a:r>
+          </a:p>
+        </p:txBody>
+      </p:sp>
+      <p:sp>
+        <p:nvSpPr>
+          <p:cNvPr id="11" name="Rounded Rectangle 10"/>
+          <p:cNvSpPr/>
+          <p:nvPr/>
+        </p:nvSpPr>
+        <p:spPr>
+          <a:xfrm>
+            <a:off x="6000000" y="5400000"/>
+            <a:ext cx="6200000" cy="1100000"/>
+          </a:xfrm>
+          <a:prstGeom prst="roundRect">
+            <a:avLst/>
+          </a:prstGeom>
+          <a:solidFill>
+            <a:srgbClr val="F5F0E1"/>
+          </a:solidFill>
+          <a:ln>
+            <a:noFill/>
+          </a:ln>
+        </p:spPr>
+        <p:style>
+          <a:lnRef idx="1">
+            <a:schemeClr val="accent1"/>
+          </a:lnRef>
+          <a:fillRef idx="3">
+            <a:schemeClr val="accent1"/>
+          </a:fillRef>
+          <a:effectRef idx="2">
+            <a:schemeClr val="accent1"/>
+          </a:effectRef>
+          <a:fontRef idx="minor">
+            <a:schemeClr val="lt1"/>
+          </a:fontRef>
+        </p:style>
+        <p:txBody>
+          <a:bodyPr rtlCol="0" anchor="ctr"/>
+          <a:lstStyle/>
+          <a:p>
+            <a:pPr algn="ctr"/>
+          </a:p>
+        </p:txBody>
+      </p:sp>
+      <p:sp>
+        <p:nvSpPr>
+          <p:cNvPr id="12" name="TextBox 11"/>
+          <p:cNvSpPr txBox="1"/>
+          <p:nvPr/>
+        </p:nvSpPr>
+        <p:spPr>
+          <a:xfrm>
+            <a:off x="6250000" y="5600000"/>
+            <a:ext cx="5700000" cy="700000"/>
+          </a:xfrm>
+          <a:prstGeom prst="rect">
+            <a:avLst/>
+          </a:prstGeom>
+          <a:noFill/>
+        </p:spPr>
+        <p:txBody>
+          <a:bodyPr wrap="square" anchor="ctr">
+            <a:spAutoFit/>
+          </a:bodyPr>
+          <a:lstStyle/>
+          <a:p>
+            <a:pPr algn="l"/>
+            <a:r>
+              <a:rPr sz="1200" b="0">
+                <a:solidFill>
+                  <a:srgbClr val="333333"/>
+                </a:solidFill>
+                <a:latin typeface="Open Sans"/>
+                <a:ea typeface="Open Sans"/>
+                <a:cs typeface="Open Sans"/>
+              </a:rPr>
+              <a:t>Не используйте алкоголь, не растирайте кожу и не помещайте человека сразу в очень горячую ванну.</a:t>
+            </a:r>
+          </a:p>
+        </p:txBody>
+      </p:sp>
+    </p:spTree>
+  </p:cSld>
+  <p:clrMapOvr>
+    <a:masterClrMapping/>
+  </p:clrMapOvr>
+</p:sld>
+</file>
+
+<file path=ppt/slides/slide12.xml><?xml version="1.0" encoding="utf-8"?>
+<p:sld xmlns:a="http://schemas.openxmlformats.org/drawingml/2006/main" xmlns:p="http://schemas.openxmlformats.org/presentationml/2006/main" xmlns:r="http://schemas.openxmlformats.org/officeDocument/2006/relationships">
+  <p:cSld>
+    <p:spTree>
+      <p:nvGrpSpPr>
+        <p:cNvPr id="1" name=""/>
+        <p:cNvGrpSpPr/>
+        <p:nvPr/>
+      </p:nvGrpSpPr>
+      <p:grpSpPr/>
+      <p:sp>
+        <p:nvSpPr>
+          <p:cNvPr id="2" name="Rectangle 1"/>
+          <p:cNvSpPr/>
+          <p:nvPr/>
+        </p:nvSpPr>
+        <p:spPr>
+          <a:xfrm>
+            <a:off x="0" y="0"/>
+            <a:ext cx="12191695" cy="6858000"/>
+          </a:xfrm>
+          <a:prstGeom prst="rect">
+            <a:avLst/>
+          </a:prstGeom>
+          <a:solidFill>
+            <a:srgbClr val="FFFFFF"/>
+          </a:solidFill>
+          <a:ln>
+            <a:noFill/>
+          </a:ln>
+        </p:spPr>
+        <p:style>
+          <a:lnRef idx="1">
+            <a:schemeClr val="accent1"/>
+          </a:lnRef>
+          <a:fillRef idx="3">
+            <a:schemeClr val="accent1"/>
+          </a:fillRef>
+          <a:effectRef idx="2">
+            <a:schemeClr val="accent1"/>
+          </a:effectRef>
+          <a:fontRef idx="minor">
+            <a:schemeClr val="lt1"/>
+          </a:fontRef>
+        </p:style>
+        <p:txBody>
+          <a:bodyPr rtlCol="0" anchor="ctr"/>
+          <a:lstStyle/>
+          <a:p>
+            <a:pPr algn="ctr"/>
+          </a:p>
+        </p:txBody>
+      </p:sp>
+      <p:sp>
+        <p:nvSpPr>
+          <p:cNvPr id="3" name="TextBox 2"/>
+          <p:cNvSpPr txBox="1"/>
+          <p:nvPr/>
+        </p:nvSpPr>
+        <p:spPr>
+          <a:xfrm>
+            <a:off x="700000" y="250000"/>
+            <a:ext cx="11200000" cy="550000"/>
+          </a:xfrm>
+          <a:prstGeom prst="rect">
+            <a:avLst/>
+          </a:prstGeom>
+          <a:noFill/>
+        </p:spPr>
+        <p:txBody>
+          <a:bodyPr wrap="square" anchor="t">
+            <a:spAutoFit/>
+          </a:bodyPr>
+          <a:lstStyle/>
+          <a:p>
+            <a:pPr algn="l"/>
+            <a:r>
+              <a:rPr sz="2200" b="1">
+                <a:solidFill>
+                  <a:srgbClr val="333333"/>
+                </a:solidFill>
+                <a:latin typeface="Open Sans"/>
+                <a:ea typeface="Open Sans"/>
+                <a:cs typeface="Open Sans"/>
+              </a:rPr>
+              <a:t>ЕСЛИ ПЕРЕОХЛАЖДЕННЫЙ БЕЗ СОЗНАНИЯ</a:t>
+            </a:r>
+          </a:p>
+        </p:txBody>
+      </p:sp>
+      <p:sp>
+        <p:nvSpPr>
+          <p:cNvPr id="4" name="Rectangle 3"/>
+          <p:cNvSpPr/>
+          <p:nvPr/>
+        </p:nvSpPr>
+        <p:spPr>
+          <a:xfrm>
+            <a:off x="700000" y="850000"/>
+            <a:ext cx="9000000" cy="28000"/>
+          </a:xfrm>
+          <a:prstGeom prst="rect">
+            <a:avLst/>
+          </a:prstGeom>
+          <a:solidFill>
+            <a:srgbClr val="555555"/>
+          </a:solidFill>
+          <a:ln>
+            <a:noFill/>
+          </a:ln>
+        </p:spPr>
+        <p:style>
+          <a:lnRef idx="1">
+            <a:schemeClr val="accent1"/>
+          </a:lnRef>
+          <a:fillRef idx="3">
+            <a:schemeClr val="accent1"/>
+          </a:fillRef>
+          <a:effectRef idx="2">
+            <a:schemeClr val="accent1"/>
+          </a:effectRef>
+          <a:fontRef idx="minor">
+            <a:schemeClr val="lt1"/>
+          </a:fontRef>
+        </p:style>
+        <p:txBody>
+          <a:bodyPr rtlCol="0" anchor="ctr"/>
+          <a:lstStyle/>
+          <a:p>
+            <a:pPr algn="ctr"/>
+          </a:p>
+        </p:txBody>
+      </p:sp>
+      <p:sp>
+        <p:nvSpPr>
+          <p:cNvPr id="5" name="TextBox 4"/>
+          <p:cNvSpPr txBox="1"/>
+          <p:nvPr/>
+        </p:nvSpPr>
+        <p:spPr>
+          <a:xfrm>
+            <a:off x="700000" y="920000"/>
+            <a:ext cx="11000000" cy="350000"/>
+          </a:xfrm>
+          <a:prstGeom prst="rect">
+            <a:avLst/>
+          </a:prstGeom>
+          <a:noFill/>
+        </p:spPr>
+        <p:txBody>
+          <a:bodyPr wrap="square" anchor="t">
+            <a:spAutoFit/>
+          </a:bodyPr>
+          <a:lstStyle/>
+          <a:p>
+            <a:pPr algn="l"/>
+            <a:r>
+              <a:rPr sz="1200" b="0">
+                <a:solidFill>
+                  <a:srgbClr val="666666"/>
+                </a:solidFill>
+                <a:latin typeface="Open Sans"/>
+                <a:ea typeface="Open Sans"/>
+                <a:cs typeface="Open Sans"/>
+              </a:rPr>
+              <a:t>Оказание первой помощи при травмах, ранениях и поражениях, прочих состояниях</a:t>
+            </a:r>
+          </a:p>
+        </p:txBody>
+      </p:sp>
+      <p:sp>
+        <p:nvSpPr>
+          <p:cNvPr id="6" name="Rectangle 5"/>
+          <p:cNvSpPr/>
+          <p:nvPr/>
+        </p:nvSpPr>
+        <p:spPr>
+          <a:xfrm>
+            <a:off x="0" y="2800000"/>
+            <a:ext cx="420000" cy="420000"/>
+          </a:xfrm>
+          <a:prstGeom prst="rect">
+            <a:avLst/>
+          </a:prstGeom>
+          <a:solidFill>
+            <a:srgbClr val="555555"/>
+          </a:solidFill>
+          <a:ln>
+            <a:noFill/>
+          </a:ln>
+        </p:spPr>
+        <p:style>
+          <a:lnRef idx="1">
+            <a:schemeClr val="accent1"/>
+          </a:lnRef>
+          <a:fillRef idx="3">
+            <a:schemeClr val="accent1"/>
+          </a:fillRef>
+          <a:effectRef idx="2">
+            <a:schemeClr val="accent1"/>
+          </a:effectRef>
+          <a:fontRef idx="minor">
+            <a:schemeClr val="lt1"/>
+          </a:fontRef>
+        </p:style>
+        <p:txBody>
+          <a:bodyPr rtlCol="0" anchor="ctr"/>
+          <a:lstStyle/>
+          <a:p>
+            <a:pPr algn="ctr"/>
+          </a:p>
+        </p:txBody>
+      </p:sp>
+      <p:sp>
+        <p:nvSpPr>
+          <p:cNvPr id="7" name="TextBox 6"/>
+          <p:cNvSpPr txBox="1"/>
+          <p:nvPr/>
+        </p:nvSpPr>
+        <p:spPr>
+          <a:xfrm>
+            <a:off x="0" y="2800000"/>
+            <a:ext cx="420000" cy="420000"/>
+          </a:xfrm>
+          <a:prstGeom prst="rect">
+            <a:avLst/>
+          </a:prstGeom>
+          <a:noFill/>
+        </p:spPr>
+        <p:txBody>
+          <a:bodyPr wrap="square" anchor="ctr">
+            <a:spAutoFit/>
+          </a:bodyPr>
+          <a:lstStyle/>
+          <a:p>
+            <a:pPr algn="ctr"/>
+            <a:r>
+              <a:rPr sz="1400" b="1">
+                <a:solidFill>
+                  <a:srgbClr val="FFFFFF"/>
+                </a:solidFill>
+                <a:latin typeface="Open Sans"/>
+                <a:ea typeface="Open Sans"/>
+                <a:cs typeface="Open Sans"/>
+              </a:rPr>
+              <a:t>12</a:t>
+            </a:r>
+          </a:p>
+        </p:txBody>
+      </p:sp>
+      <p:pic>
+        <p:nvPicPr>
+          <p:cNvPr id="8" name="Picture 7" descr="fig76.jpeg"/>
+          <p:cNvPicPr>
+            <a:picLocks noChangeAspect="1"/>
+          </p:cNvPicPr>
+          <p:nvPr/>
+        </p:nvPicPr>
+        <p:blipFill>
+          <a:blip r:embed="rId2"/>
+          <a:stretch>
+            <a:fillRect/>
+          </a:stretch>
+        </p:blipFill>
+        <p:spPr>
+          <a:xfrm>
+            <a:off x="500000" y="1993594"/>
+            <a:ext cx="5200000" cy="2912812"/>
+          </a:xfrm>
+          <a:prstGeom prst="rect">
+            <a:avLst/>
+          </a:prstGeom>
+        </p:spPr>
+      </p:pic>
+      <p:sp>
+        <p:nvSpPr>
+          <p:cNvPr id="9" name="TextBox 8"/>
+          <p:cNvSpPr txBox="1"/>
+          <p:nvPr/>
+        </p:nvSpPr>
+        <p:spPr>
+          <a:xfrm>
+            <a:off x="6000000" y="1450000"/>
+            <a:ext cx="6200000" cy="3800000"/>
+          </a:xfrm>
+          <a:prstGeom prst="rect">
+            <a:avLst/>
+          </a:prstGeom>
+          <a:noFill/>
+        </p:spPr>
+        <p:txBody>
+          <a:bodyPr wrap="square">
+            <a:spAutoFit/>
+          </a:bodyPr>
+          <a:lstStyle/>
+          <a:p>
+            <a:pPr algn="l">
+              <a:spcAft>
+                <a:spcPts val="800"/>
+              </a:spcAft>
+            </a:pPr>
+            <a:r>
+              <a:rPr sz="1300" b="0">
+                <a:solidFill>
+                  <a:srgbClr val="333333"/>
+                </a:solidFill>
+                <a:latin typeface="Open Sans"/>
+                <a:ea typeface="Open Sans"/>
+                <a:cs typeface="Open Sans"/>
+              </a:rPr>
+              <a:t>•  Немедленно вызовите скорую медицинскую помощь.</a:t>
+            </a:r>
+          </a:p>
+          <a:p>
+            <a:pPr algn="l">
+              <a:spcAft>
+                <a:spcPts val="800"/>
+              </a:spcAft>
+            </a:pPr>
+            <a:r>
+              <a:rPr sz="1300" b="0">
+                <a:solidFill>
+                  <a:srgbClr val="333333"/>
+                </a:solidFill>
+                <a:latin typeface="Open Sans"/>
+                <a:ea typeface="Open Sans"/>
+                <a:cs typeface="Open Sans"/>
+              </a:rPr>
+              <a:t>•  Осторожно откройте дыхательные пути и оцените нормальное дыхание.</a:t>
+            </a:r>
+          </a:p>
+          <a:p>
+            <a:pPr algn="l">
+              <a:spcAft>
+                <a:spcPts val="800"/>
+              </a:spcAft>
+            </a:pPr>
+            <a:r>
+              <a:rPr sz="1300" b="0">
+                <a:solidFill>
+                  <a:srgbClr val="333333"/>
+                </a:solidFill>
+                <a:latin typeface="Open Sans"/>
+                <a:ea typeface="Open Sans"/>
+                <a:cs typeface="Open Sans"/>
+              </a:rPr>
+              <a:t>•  При отсутствии нормального дыхания начинайте сердечно-легочную реанимацию.</a:t>
+            </a:r>
+          </a:p>
+          <a:p>
+            <a:pPr algn="l">
+              <a:spcAft>
+                <a:spcPts val="800"/>
+              </a:spcAft>
+            </a:pPr>
+            <a:r>
+              <a:rPr sz="1300" b="0">
+                <a:solidFill>
+                  <a:srgbClr val="333333"/>
+                </a:solidFill>
+                <a:latin typeface="Open Sans"/>
+                <a:ea typeface="Open Sans"/>
+                <a:cs typeface="Open Sans"/>
+              </a:rPr>
+              <a:t>•  При сохраненном дыхании придайте устойчивое боковое положение.</a:t>
+            </a:r>
+          </a:p>
+          <a:p>
+            <a:pPr algn="l">
+              <a:spcAft>
+                <a:spcPts val="800"/>
+              </a:spcAft>
+            </a:pPr>
+            <a:r>
+              <a:rPr sz="1300" b="0">
+                <a:solidFill>
+                  <a:srgbClr val="333333"/>
+                </a:solidFill>
+                <a:latin typeface="Open Sans"/>
+                <a:ea typeface="Open Sans"/>
+                <a:cs typeface="Open Sans"/>
+              </a:rPr>
+              <a:t>•  Обращайтесь бережно, продолжайте утепление и постоянно контролируйте дыхание.</a:t>
+            </a:r>
+          </a:p>
+        </p:txBody>
+      </p:sp>
+      <p:sp>
+        <p:nvSpPr>
+          <p:cNvPr id="10" name="Rounded Rectangle 9"/>
+          <p:cNvSpPr/>
+          <p:nvPr/>
+        </p:nvSpPr>
+        <p:spPr>
+          <a:xfrm>
+            <a:off x="6000000" y="5400000"/>
+            <a:ext cx="6200000" cy="1100000"/>
+          </a:xfrm>
+          <a:prstGeom prst="roundRect">
+            <a:avLst/>
+          </a:prstGeom>
+          <a:solidFill>
+            <a:srgbClr val="F5F0E1"/>
+          </a:solidFill>
+          <a:ln>
+            <a:noFill/>
+          </a:ln>
+        </p:spPr>
+        <p:style>
+          <a:lnRef idx="1">
+            <a:schemeClr val="accent1"/>
+          </a:lnRef>
+          <a:fillRef idx="3">
+            <a:schemeClr val="accent1"/>
+          </a:fillRef>
+          <a:effectRef idx="2">
+            <a:schemeClr val="accent1"/>
+          </a:effectRef>
+          <a:fontRef idx="minor">
+            <a:schemeClr val="lt1"/>
+          </a:fontRef>
+        </p:style>
+        <p:txBody>
+          <a:bodyPr rtlCol="0" anchor="ctr"/>
+          <a:lstStyle/>
+          <a:p>
+            <a:pPr algn="ctr"/>
+          </a:p>
+        </p:txBody>
+      </p:sp>
+      <p:sp>
+        <p:nvSpPr>
+          <p:cNvPr id="11" name="TextBox 10"/>
+          <p:cNvSpPr txBox="1"/>
+          <p:nvPr/>
+        </p:nvSpPr>
+        <p:spPr>
+          <a:xfrm>
+            <a:off x="6250000" y="5600000"/>
+            <a:ext cx="5700000" cy="700000"/>
+          </a:xfrm>
+          <a:prstGeom prst="rect">
+            <a:avLst/>
+          </a:prstGeom>
+          <a:noFill/>
+        </p:spPr>
+        <p:txBody>
+          <a:bodyPr wrap="square" anchor="ctr">
+            <a:spAutoFit/>
+          </a:bodyPr>
+          <a:lstStyle/>
+          <a:p>
+            <a:pPr algn="l"/>
+            <a:r>
+              <a:rPr sz="1200" b="0">
+                <a:solidFill>
+                  <a:srgbClr val="333333"/>
+                </a:solidFill>
+                <a:latin typeface="Open Sans"/>
+                <a:ea typeface="Open Sans"/>
+                <a:cs typeface="Open Sans"/>
+              </a:rPr>
+              <a:t>Любое питье человеку с нарушенным сознанием запрещено из-за опасности попадания жидкости в дыхательные пути.</a:t>
+            </a:r>
+          </a:p>
+        </p:txBody>
+      </p:sp>
+    </p:spTree>
+  </p:cSld>
+  <p:clrMapOvr>
+    <a:masterClrMapping/>
+  </p:clrMapOvr>
+</p:sld>
+</file>
+
+<file path=ppt/slides/slide13.xml><?xml version="1.0" encoding="utf-8"?>
+<p:sld xmlns:a="http://schemas.openxmlformats.org/drawingml/2006/main" xmlns:p="http://schemas.openxmlformats.org/presentationml/2006/main" xmlns:r="http://schemas.openxmlformats.org/officeDocument/2006/relationships">
+  <p:cSld>
+    <p:spTree>
+      <p:nvGrpSpPr>
+        <p:cNvPr id="1" name=""/>
+        <p:cNvGrpSpPr/>
+        <p:nvPr/>
+      </p:nvGrpSpPr>
+      <p:grpSpPr/>
+      <p:sp>
+        <p:nvSpPr>
+          <p:cNvPr id="2" name="Rectangle 1"/>
+          <p:cNvSpPr/>
+          <p:nvPr/>
+        </p:nvSpPr>
+        <p:spPr>
+          <a:xfrm>
+            <a:off x="0" y="0"/>
+            <a:ext cx="12191695" cy="6858000"/>
+          </a:xfrm>
+          <a:prstGeom prst="rect">
+            <a:avLst/>
+          </a:prstGeom>
+          <a:solidFill>
+            <a:srgbClr val="FFFFFF"/>
+          </a:solidFill>
+          <a:ln>
+            <a:noFill/>
+          </a:ln>
+        </p:spPr>
+        <p:style>
+          <a:lnRef idx="1">
+            <a:schemeClr val="accent1"/>
+          </a:lnRef>
+          <a:fillRef idx="3">
+            <a:schemeClr val="accent1"/>
+          </a:fillRef>
+          <a:effectRef idx="2">
+            <a:schemeClr val="accent1"/>
+          </a:effectRef>
+          <a:fontRef idx="minor">
+            <a:schemeClr val="lt1"/>
+          </a:fontRef>
+        </p:style>
+        <p:txBody>
+          <a:bodyPr rtlCol="0" anchor="ctr"/>
+          <a:lstStyle/>
+          <a:p>
+            <a:pPr algn="ctr"/>
+          </a:p>
+        </p:txBody>
+      </p:sp>
+      <p:sp>
+        <p:nvSpPr>
+          <p:cNvPr id="3" name="TextBox 2"/>
+          <p:cNvSpPr txBox="1"/>
+          <p:nvPr/>
+        </p:nvSpPr>
+        <p:spPr>
+          <a:xfrm>
+            <a:off x="700000" y="250000"/>
+            <a:ext cx="11200000" cy="550000"/>
+          </a:xfrm>
+          <a:prstGeom prst="rect">
+            <a:avLst/>
+          </a:prstGeom>
+          <a:noFill/>
+        </p:spPr>
+        <p:txBody>
+          <a:bodyPr wrap="square" anchor="t">
+            <a:spAutoFit/>
+          </a:bodyPr>
+          <a:lstStyle/>
+          <a:p>
+            <a:pPr algn="l"/>
+            <a:r>
+              <a:rPr sz="2200" b="1">
+                <a:solidFill>
+                  <a:srgbClr val="333333"/>
+                </a:solidFill>
+                <a:latin typeface="Open Sans"/>
+                <a:ea typeface="Open Sans"/>
+                <a:cs typeface="Open Sans"/>
+              </a:rPr>
+              <a:t>ГЛАВНОЕ ЗАПОМНИТЬ</a:t>
+            </a:r>
+          </a:p>
+        </p:txBody>
+      </p:sp>
+      <p:sp>
+        <p:nvSpPr>
+          <p:cNvPr id="4" name="Rectangle 3"/>
+          <p:cNvSpPr/>
+          <p:nvPr/>
+        </p:nvSpPr>
+        <p:spPr>
+          <a:xfrm>
+            <a:off x="700000" y="850000"/>
+            <a:ext cx="9000000" cy="28000"/>
+          </a:xfrm>
+          <a:prstGeom prst="rect">
+            <a:avLst/>
+          </a:prstGeom>
+          <a:solidFill>
+            <a:srgbClr val="555555"/>
+          </a:solidFill>
+          <a:ln>
+            <a:noFill/>
+          </a:ln>
+        </p:spPr>
+        <p:style>
+          <a:lnRef idx="1">
+            <a:schemeClr val="accent1"/>
+          </a:lnRef>
+          <a:fillRef idx="3">
+            <a:schemeClr val="accent1"/>
+          </a:fillRef>
+          <a:effectRef idx="2">
+            <a:schemeClr val="accent1"/>
+          </a:effectRef>
+          <a:fontRef idx="minor">
+            <a:schemeClr val="lt1"/>
+          </a:fontRef>
+        </p:style>
+        <p:txBody>
+          <a:bodyPr rtlCol="0" anchor="ctr"/>
+          <a:lstStyle/>
+          <a:p>
+            <a:pPr algn="ctr"/>
+          </a:p>
+        </p:txBody>
+      </p:sp>
+      <p:sp>
+        <p:nvSpPr>
+          <p:cNvPr id="5" name="TextBox 4"/>
+          <p:cNvSpPr txBox="1"/>
+          <p:nvPr/>
+        </p:nvSpPr>
+        <p:spPr>
+          <a:xfrm>
+            <a:off x="700000" y="920000"/>
+            <a:ext cx="11000000" cy="350000"/>
+          </a:xfrm>
+          <a:prstGeom prst="rect">
+            <a:avLst/>
+          </a:prstGeom>
+          <a:noFill/>
+        </p:spPr>
+        <p:txBody>
+          <a:bodyPr wrap="square" anchor="t">
+            <a:spAutoFit/>
+          </a:bodyPr>
+          <a:lstStyle/>
+          <a:p>
+            <a:pPr algn="l"/>
+            <a:r>
+              <a:rPr sz="1200" b="0">
+                <a:solidFill>
+                  <a:srgbClr val="666666"/>
+                </a:solidFill>
+                <a:latin typeface="Open Sans"/>
+                <a:ea typeface="Open Sans"/>
+                <a:cs typeface="Open Sans"/>
+              </a:rPr>
+              <a:t>Оказание первой помощи при травмах, ранениях и поражениях, прочих состояниях</a:t>
+            </a:r>
+          </a:p>
+        </p:txBody>
+      </p:sp>
+      <p:sp>
+        <p:nvSpPr>
+          <p:cNvPr id="6" name="Rectangle 5"/>
+          <p:cNvSpPr/>
+          <p:nvPr/>
+        </p:nvSpPr>
+        <p:spPr>
+          <a:xfrm>
+            <a:off x="0" y="2800000"/>
+            <a:ext cx="420000" cy="420000"/>
+          </a:xfrm>
+          <a:prstGeom prst="rect">
+            <a:avLst/>
+          </a:prstGeom>
+          <a:solidFill>
+            <a:srgbClr val="555555"/>
+          </a:solidFill>
+          <a:ln>
+            <a:noFill/>
+          </a:ln>
+        </p:spPr>
+        <p:style>
+          <a:lnRef idx="1">
+            <a:schemeClr val="accent1"/>
+          </a:lnRef>
+          <a:fillRef idx="3">
+            <a:schemeClr val="accent1"/>
+          </a:fillRef>
+          <a:effectRef idx="2">
+            <a:schemeClr val="accent1"/>
+          </a:effectRef>
+          <a:fontRef idx="minor">
+            <a:schemeClr val="lt1"/>
+          </a:fontRef>
+        </p:style>
+        <p:txBody>
+          <a:bodyPr rtlCol="0" anchor="ctr"/>
+          <a:lstStyle/>
+          <a:p>
+            <a:pPr algn="ctr"/>
+          </a:p>
+        </p:txBody>
+      </p:sp>
+      <p:sp>
+        <p:nvSpPr>
+          <p:cNvPr id="7" name="TextBox 6"/>
+          <p:cNvSpPr txBox="1"/>
+          <p:nvPr/>
+        </p:nvSpPr>
+        <p:spPr>
+          <a:xfrm>
+            <a:off x="0" y="2800000"/>
+            <a:ext cx="420000" cy="420000"/>
+          </a:xfrm>
+          <a:prstGeom prst="rect">
+            <a:avLst/>
+          </a:prstGeom>
+          <a:noFill/>
+        </p:spPr>
+        <p:txBody>
+          <a:bodyPr wrap="square" anchor="ctr">
+            <a:spAutoFit/>
+          </a:bodyPr>
+          <a:lstStyle/>
+          <a:p>
+            <a:pPr algn="ctr"/>
+            <a:r>
+              <a:rPr sz="1400" b="1">
+                <a:solidFill>
+                  <a:srgbClr val="FFFFFF"/>
+                </a:solidFill>
+                <a:latin typeface="Open Sans"/>
+                <a:ea typeface="Open Sans"/>
+                <a:cs typeface="Open Sans"/>
+              </a:rPr>
+              <a:t>13</a:t>
+            </a:r>
+          </a:p>
+        </p:txBody>
+      </p:sp>
+      <p:sp>
+        <p:nvSpPr>
+          <p:cNvPr id="8" name="Rectangle 7"/>
+          <p:cNvSpPr/>
+          <p:nvPr/>
+        </p:nvSpPr>
+        <p:spPr>
+          <a:xfrm>
+            <a:off x="700000" y="1450000"/>
+            <a:ext cx="11000000" cy="833333"/>
+          </a:xfrm>
+          <a:prstGeom prst="rect">
+            <a:avLst/>
+          </a:prstGeom>
+          <a:solidFill>
+            <a:srgbClr val="FFFFFF"/>
+          </a:solidFill>
+          <a:ln w="12700">
+            <a:solidFill>
+              <a:srgbClr val="999999"/>
+            </a:solidFill>
+          </a:ln>
+        </p:spPr>
+        <p:style>
+          <a:lnRef idx="1">
+            <a:schemeClr val="accent1"/>
+          </a:lnRef>
+          <a:fillRef idx="3">
+            <a:schemeClr val="accent1"/>
+          </a:fillRef>
+          <a:effectRef idx="2">
+            <a:schemeClr val="accent1"/>
+          </a:effectRef>
+          <a:fontRef idx="minor">
+            <a:schemeClr val="lt1"/>
+          </a:fontRef>
+        </p:style>
+        <p:txBody>
+          <a:bodyPr rtlCol="0" anchor="ctr"/>
+          <a:lstStyle/>
+          <a:p>
+            <a:pPr algn="ctr"/>
+          </a:p>
+        </p:txBody>
+      </p:sp>
+      <p:sp>
+        <p:nvSpPr>
+          <p:cNvPr id="9" name="Rectangle 8"/>
+          <p:cNvSpPr/>
+          <p:nvPr/>
+        </p:nvSpPr>
+        <p:spPr>
+          <a:xfrm>
+            <a:off x="700000" y="1450000"/>
+            <a:ext cx="90000" cy="833333"/>
+          </a:xfrm>
+          <a:prstGeom prst="rect">
+            <a:avLst/>
+          </a:prstGeom>
+          <a:solidFill>
+            <a:srgbClr val="CC0000"/>
+          </a:solidFill>
+          <a:ln>
+            <a:noFill/>
+          </a:ln>
+        </p:spPr>
+        <p:style>
+          <a:lnRef idx="1">
+            <a:schemeClr val="accent1"/>
+          </a:lnRef>
+          <a:fillRef idx="3">
+            <a:schemeClr val="accent1"/>
+          </a:fillRef>
+          <a:effectRef idx="2">
+            <a:schemeClr val="accent1"/>
+          </a:effectRef>
+          <a:fontRef idx="minor">
+            <a:schemeClr val="lt1"/>
+          </a:fontRef>
+        </p:style>
+        <p:txBody>
+          <a:bodyPr rtlCol="0" anchor="ctr"/>
+          <a:lstStyle/>
+          <a:p>
+            <a:pPr algn="ctr"/>
+          </a:p>
+        </p:txBody>
+      </p:sp>
+      <p:sp>
+        <p:nvSpPr>
+          <p:cNvPr id="10" name="TextBox 9"/>
+          <p:cNvSpPr txBox="1"/>
+          <p:nvPr/>
+        </p:nvSpPr>
+        <p:spPr>
+          <a:xfrm>
+            <a:off x="1000000" y="1530000"/>
+            <a:ext cx="10400000" cy="673333"/>
+          </a:xfrm>
+          <a:prstGeom prst="rect">
+            <a:avLst/>
+          </a:prstGeom>
+          <a:noFill/>
+        </p:spPr>
+        <p:txBody>
+          <a:bodyPr wrap="square" anchor="ctr">
+            <a:spAutoFit/>
+          </a:bodyPr>
+          <a:lstStyle/>
+          <a:p>
+            <a:pPr algn="l"/>
+            <a:r>
+              <a:rPr sz="1200" b="0">
+                <a:solidFill>
+                  <a:srgbClr val="333333"/>
+                </a:solidFill>
+                <a:latin typeface="Open Sans"/>
+                <a:ea typeface="Open Sans"/>
+                <a:cs typeface="Open Sans"/>
+              </a:rPr>
+              <a:t>Сначала прекратите действие высокой или низкой температуры</a:t>
+            </a:r>
+          </a:p>
+        </p:txBody>
+      </p:sp>
+      <p:sp>
+        <p:nvSpPr>
+          <p:cNvPr id="11" name="Rectangle 10"/>
+          <p:cNvSpPr/>
+          <p:nvPr/>
+        </p:nvSpPr>
+        <p:spPr>
+          <a:xfrm>
+            <a:off x="700000" y="2363333"/>
+            <a:ext cx="11000000" cy="833333"/>
+          </a:xfrm>
+          <a:prstGeom prst="rect">
+            <a:avLst/>
+          </a:prstGeom>
+          <a:solidFill>
+            <a:srgbClr val="FFFFFF"/>
+          </a:solidFill>
+          <a:ln w="12700">
+            <a:solidFill>
+              <a:srgbClr val="999999"/>
+            </a:solidFill>
+          </a:ln>
+        </p:spPr>
+        <p:style>
+          <a:lnRef idx="1">
+            <a:schemeClr val="accent1"/>
+          </a:lnRef>
+          <a:fillRef idx="3">
+            <a:schemeClr val="accent1"/>
+          </a:fillRef>
+          <a:effectRef idx="2">
+            <a:schemeClr val="accent1"/>
+          </a:effectRef>
+          <a:fontRef idx="minor">
+            <a:schemeClr val="lt1"/>
+          </a:fontRef>
+        </p:style>
+        <p:txBody>
+          <a:bodyPr rtlCol="0" anchor="ctr"/>
+          <a:lstStyle/>
+          <a:p>
+            <a:pPr algn="ctr"/>
+          </a:p>
+        </p:txBody>
+      </p:sp>
+      <p:sp>
+        <p:nvSpPr>
+          <p:cNvPr id="12" name="Rectangle 11"/>
+          <p:cNvSpPr/>
+          <p:nvPr/>
+        </p:nvSpPr>
+        <p:spPr>
+          <a:xfrm>
+            <a:off x="700000" y="2363333"/>
+            <a:ext cx="90000" cy="833333"/>
+          </a:xfrm>
+          <a:prstGeom prst="rect">
+            <a:avLst/>
+          </a:prstGeom>
+          <a:solidFill>
+            <a:srgbClr val="CC0000"/>
+          </a:solidFill>
+          <a:ln>
+            <a:noFill/>
+          </a:ln>
+        </p:spPr>
+        <p:style>
+          <a:lnRef idx="1">
+            <a:schemeClr val="accent1"/>
+          </a:lnRef>
+          <a:fillRef idx="3">
+            <a:schemeClr val="accent1"/>
+          </a:fillRef>
+          <a:effectRef idx="2">
+            <a:schemeClr val="accent1"/>
+          </a:effectRef>
+          <a:fontRef idx="minor">
+            <a:schemeClr val="lt1"/>
+          </a:fontRef>
+        </p:style>
+        <p:txBody>
+          <a:bodyPr rtlCol="0" anchor="ctr"/>
+          <a:lstStyle/>
+          <a:p>
+            <a:pPr algn="ctr"/>
+          </a:p>
+        </p:txBody>
+      </p:sp>
+      <p:sp>
+        <p:nvSpPr>
+          <p:cNvPr id="13" name="TextBox 12"/>
+          <p:cNvSpPr txBox="1"/>
+          <p:nvPr/>
+        </p:nvSpPr>
+        <p:spPr>
+          <a:xfrm>
+            <a:off x="1000000" y="2443333"/>
+            <a:ext cx="10400000" cy="673333"/>
+          </a:xfrm>
+          <a:prstGeom prst="rect">
+            <a:avLst/>
+          </a:prstGeom>
+          <a:noFill/>
+        </p:spPr>
+        <p:txBody>
+          <a:bodyPr wrap="square" anchor="ctr">
+            <a:spAutoFit/>
+          </a:bodyPr>
+          <a:lstStyle/>
+          <a:p>
+            <a:pPr algn="l"/>
+            <a:r>
+              <a:rPr sz="1200" b="0">
+                <a:solidFill>
+                  <a:srgbClr val="333333"/>
+                </a:solidFill>
+                <a:latin typeface="Open Sans"/>
+                <a:ea typeface="Open Sans"/>
+                <a:cs typeface="Open Sans"/>
+              </a:rPr>
+              <a:t>Ожог охлаждайте проточной водой не менее 20 минут</a:t>
+            </a:r>
+          </a:p>
+        </p:txBody>
+      </p:sp>
+      <p:sp>
+        <p:nvSpPr>
+          <p:cNvPr id="14" name="Rectangle 13"/>
+          <p:cNvSpPr/>
+          <p:nvPr/>
+        </p:nvSpPr>
+        <p:spPr>
+          <a:xfrm>
+            <a:off x="700000" y="3276666"/>
+            <a:ext cx="11000000" cy="833333"/>
+          </a:xfrm>
+          <a:prstGeom prst="rect">
+            <a:avLst/>
+          </a:prstGeom>
+          <a:solidFill>
+            <a:srgbClr val="FFFFFF"/>
+          </a:solidFill>
+          <a:ln w="12700">
+            <a:solidFill>
+              <a:srgbClr val="999999"/>
+            </a:solidFill>
+          </a:ln>
+        </p:spPr>
+        <p:style>
+          <a:lnRef idx="1">
+            <a:schemeClr val="accent1"/>
+          </a:lnRef>
+          <a:fillRef idx="3">
+            <a:schemeClr val="accent1"/>
+          </a:fillRef>
+          <a:effectRef idx="2">
+            <a:schemeClr val="accent1"/>
+          </a:effectRef>
+          <a:fontRef idx="minor">
+            <a:schemeClr val="lt1"/>
+          </a:fontRef>
+        </p:style>
+        <p:txBody>
+          <a:bodyPr rtlCol="0" anchor="ctr"/>
+          <a:lstStyle/>
+          <a:p>
+            <a:pPr algn="ctr"/>
+          </a:p>
+        </p:txBody>
+      </p:sp>
+      <p:sp>
+        <p:nvSpPr>
+          <p:cNvPr id="15" name="Rectangle 14"/>
+          <p:cNvSpPr/>
+          <p:nvPr/>
+        </p:nvSpPr>
+        <p:spPr>
+          <a:xfrm>
+            <a:off x="700000" y="3276666"/>
+            <a:ext cx="90000" cy="833333"/>
+          </a:xfrm>
+          <a:prstGeom prst="rect">
+            <a:avLst/>
+          </a:prstGeom>
+          <a:solidFill>
+            <a:srgbClr val="CC0000"/>
+          </a:solidFill>
+          <a:ln>
+            <a:noFill/>
+          </a:ln>
+        </p:spPr>
+        <p:style>
+          <a:lnRef idx="1">
+            <a:schemeClr val="accent1"/>
+          </a:lnRef>
+          <a:fillRef idx="3">
+            <a:schemeClr val="accent1"/>
+          </a:fillRef>
+          <a:effectRef idx="2">
+            <a:schemeClr val="accent1"/>
+          </a:effectRef>
+          <a:fontRef idx="minor">
+            <a:schemeClr val="lt1"/>
+          </a:fontRef>
+        </p:style>
+        <p:txBody>
+          <a:bodyPr rtlCol="0" anchor="ctr"/>
+          <a:lstStyle/>
+          <a:p>
+            <a:pPr algn="ctr"/>
+          </a:p>
+        </p:txBody>
+      </p:sp>
+      <p:sp>
+        <p:nvSpPr>
+          <p:cNvPr id="16" name="TextBox 15"/>
+          <p:cNvSpPr txBox="1"/>
+          <p:nvPr/>
+        </p:nvSpPr>
+        <p:spPr>
+          <a:xfrm>
+            <a:off x="1000000" y="3356666"/>
+            <a:ext cx="10400000" cy="673333"/>
+          </a:xfrm>
+          <a:prstGeom prst="rect">
+            <a:avLst/>
+          </a:prstGeom>
+          <a:noFill/>
+        </p:spPr>
+        <p:txBody>
+          <a:bodyPr wrap="square" anchor="ctr">
+            <a:spAutoFit/>
+          </a:bodyPr>
+          <a:lstStyle/>
+          <a:p>
+            <a:pPr algn="l"/>
+            <a:r>
+              <a:rPr sz="1200" b="0">
+                <a:solidFill>
+                  <a:srgbClr val="333333"/>
+                </a:solidFill>
+                <a:latin typeface="Open Sans"/>
+                <a:ea typeface="Open Sans"/>
+                <a:cs typeface="Open Sans"/>
+              </a:rPr>
+              <a:t>Ладонь пострадавшего соответствует примерно 1% поверхности тела</a:t>
+            </a:r>
+          </a:p>
+        </p:txBody>
+      </p:sp>
+      <p:sp>
+        <p:nvSpPr>
+          <p:cNvPr id="17" name="Rectangle 16"/>
+          <p:cNvSpPr/>
+          <p:nvPr/>
+        </p:nvSpPr>
+        <p:spPr>
+          <a:xfrm>
+            <a:off x="700000" y="4189999"/>
+            <a:ext cx="11000000" cy="833333"/>
+          </a:xfrm>
+          <a:prstGeom prst="rect">
+            <a:avLst/>
+          </a:prstGeom>
+          <a:solidFill>
+            <a:srgbClr val="FFFFFF"/>
+          </a:solidFill>
+          <a:ln w="12700">
+            <a:solidFill>
+              <a:srgbClr val="999999"/>
+            </a:solidFill>
+          </a:ln>
+        </p:spPr>
+        <p:style>
+          <a:lnRef idx="1">
+            <a:schemeClr val="accent1"/>
+          </a:lnRef>
+          <a:fillRef idx="3">
+            <a:schemeClr val="accent1"/>
+          </a:fillRef>
+          <a:effectRef idx="2">
+            <a:schemeClr val="accent1"/>
+          </a:effectRef>
+          <a:fontRef idx="minor">
+            <a:schemeClr val="lt1"/>
+          </a:fontRef>
+        </p:style>
+        <p:txBody>
+          <a:bodyPr rtlCol="0" anchor="ctr"/>
+          <a:lstStyle/>
+          <a:p>
+            <a:pPr algn="ctr"/>
+          </a:p>
+        </p:txBody>
+      </p:sp>
+      <p:sp>
+        <p:nvSpPr>
+          <p:cNvPr id="18" name="Rectangle 17"/>
+          <p:cNvSpPr/>
+          <p:nvPr/>
+        </p:nvSpPr>
+        <p:spPr>
+          <a:xfrm>
+            <a:off x="700000" y="4189999"/>
+            <a:ext cx="90000" cy="833333"/>
+          </a:xfrm>
+          <a:prstGeom prst="rect">
+            <a:avLst/>
+          </a:prstGeom>
+          <a:solidFill>
+            <a:srgbClr val="CC0000"/>
+          </a:solidFill>
+          <a:ln>
+            <a:noFill/>
+          </a:ln>
+        </p:spPr>
+        <p:style>
+          <a:lnRef idx="1">
+            <a:schemeClr val="accent1"/>
+          </a:lnRef>
+          <a:fillRef idx="3">
+            <a:schemeClr val="accent1"/>
+          </a:fillRef>
+          <a:effectRef idx="2">
+            <a:schemeClr val="accent1"/>
+          </a:effectRef>
+          <a:fontRef idx="minor">
+            <a:schemeClr val="lt1"/>
+          </a:fontRef>
+        </p:style>
+        <p:txBody>
+          <a:bodyPr rtlCol="0" anchor="ctr"/>
+          <a:lstStyle/>
+          <a:p>
+            <a:pPr algn="ctr"/>
+          </a:p>
+        </p:txBody>
+      </p:sp>
+      <p:sp>
+        <p:nvSpPr>
+          <p:cNvPr id="19" name="TextBox 18"/>
+          <p:cNvSpPr txBox="1"/>
+          <p:nvPr/>
+        </p:nvSpPr>
+        <p:spPr>
+          <a:xfrm>
+            <a:off x="1000000" y="4269999"/>
+            <a:ext cx="10400000" cy="673333"/>
+          </a:xfrm>
+          <a:prstGeom prst="rect">
+            <a:avLst/>
+          </a:prstGeom>
+          <a:noFill/>
+        </p:spPr>
+        <p:txBody>
+          <a:bodyPr wrap="square" anchor="ctr">
+            <a:spAutoFit/>
+          </a:bodyPr>
+          <a:lstStyle/>
+          <a:p>
+            <a:pPr algn="l"/>
+            <a:r>
+              <a:rPr sz="1200" b="0">
+                <a:solidFill>
+                  <a:srgbClr val="333333"/>
+                </a:solidFill>
+                <a:latin typeface="Open Sans"/>
+                <a:ea typeface="Open Sans"/>
+                <a:cs typeface="Open Sans"/>
+              </a:rPr>
+              <a:t>Отмороженный участок изолируйте, но не растирайте</a:t>
+            </a:r>
+          </a:p>
+        </p:txBody>
+      </p:sp>
+      <p:sp>
+        <p:nvSpPr>
+          <p:cNvPr id="20" name="Rectangle 19"/>
+          <p:cNvSpPr/>
+          <p:nvPr/>
+        </p:nvSpPr>
+        <p:spPr>
+          <a:xfrm>
+            <a:off x="700000" y="5103332"/>
+            <a:ext cx="11000000" cy="833333"/>
+          </a:xfrm>
+          <a:prstGeom prst="rect">
+            <a:avLst/>
+          </a:prstGeom>
+          <a:solidFill>
+            <a:srgbClr val="FFFFFF"/>
+          </a:solidFill>
+          <a:ln w="12700">
+            <a:solidFill>
+              <a:srgbClr val="999999"/>
+            </a:solidFill>
+          </a:ln>
+        </p:spPr>
+        <p:style>
+          <a:lnRef idx="1">
+            <a:schemeClr val="accent1"/>
+          </a:lnRef>
+          <a:fillRef idx="3">
+            <a:schemeClr val="accent1"/>
+          </a:fillRef>
+          <a:effectRef idx="2">
+            <a:schemeClr val="accent1"/>
+          </a:effectRef>
+          <a:fontRef idx="minor">
+            <a:schemeClr val="lt1"/>
+          </a:fontRef>
+        </p:style>
+        <p:txBody>
+          <a:bodyPr rtlCol="0" anchor="ctr"/>
+          <a:lstStyle/>
+          <a:p>
+            <a:pPr algn="ctr"/>
+          </a:p>
+        </p:txBody>
+      </p:sp>
+      <p:sp>
+        <p:nvSpPr>
+          <p:cNvPr id="21" name="Rectangle 20"/>
+          <p:cNvSpPr/>
+          <p:nvPr/>
+        </p:nvSpPr>
+        <p:spPr>
+          <a:xfrm>
+            <a:off x="700000" y="5103332"/>
+            <a:ext cx="90000" cy="833333"/>
+          </a:xfrm>
+          <a:prstGeom prst="rect">
+            <a:avLst/>
+          </a:prstGeom>
+          <a:solidFill>
+            <a:srgbClr val="CC0000"/>
+          </a:solidFill>
+          <a:ln>
+            <a:noFill/>
+          </a:ln>
+        </p:spPr>
+        <p:style>
+          <a:lnRef idx="1">
+            <a:schemeClr val="accent1"/>
+          </a:lnRef>
+          <a:fillRef idx="3">
+            <a:schemeClr val="accent1"/>
+          </a:fillRef>
+          <a:effectRef idx="2">
+            <a:schemeClr val="accent1"/>
+          </a:effectRef>
+          <a:fontRef idx="minor">
+            <a:schemeClr val="lt1"/>
+          </a:fontRef>
+        </p:style>
+        <p:txBody>
+          <a:bodyPr rtlCol="0" anchor="ctr"/>
+          <a:lstStyle/>
+          <a:p>
+            <a:pPr algn="ctr"/>
+          </a:p>
+        </p:txBody>
+      </p:sp>
+      <p:sp>
+        <p:nvSpPr>
+          <p:cNvPr id="22" name="TextBox 21"/>
+          <p:cNvSpPr txBox="1"/>
+          <p:nvPr/>
+        </p:nvSpPr>
+        <p:spPr>
+          <a:xfrm>
+            <a:off x="1000000" y="5183332"/>
+            <a:ext cx="10400000" cy="673333"/>
+          </a:xfrm>
+          <a:prstGeom prst="rect">
+            <a:avLst/>
+          </a:prstGeom>
+          <a:noFill/>
+        </p:spPr>
+        <p:txBody>
+          <a:bodyPr wrap="square" anchor="ctr">
+            <a:spAutoFit/>
+          </a:bodyPr>
+          <a:lstStyle/>
+          <a:p>
+            <a:pPr algn="l"/>
+            <a:r>
+              <a:rPr sz="1200" b="0">
+                <a:solidFill>
+                  <a:srgbClr val="333333"/>
+                </a:solidFill>
+                <a:latin typeface="Open Sans"/>
+                <a:ea typeface="Open Sans"/>
+                <a:cs typeface="Open Sans"/>
+              </a:rPr>
+              <a:t>Переохлажденного согревайте постепенно</a:t>
+            </a:r>
+          </a:p>
+        </p:txBody>
+      </p:sp>
+      <p:sp>
+        <p:nvSpPr>
+          <p:cNvPr id="23" name="Rectangle 22"/>
+          <p:cNvSpPr/>
+          <p:nvPr/>
+        </p:nvSpPr>
+        <p:spPr>
+          <a:xfrm>
+            <a:off x="700000" y="6016665"/>
+            <a:ext cx="11000000" cy="833333"/>
+          </a:xfrm>
+          <a:prstGeom prst="rect">
+            <a:avLst/>
+          </a:prstGeom>
+          <a:solidFill>
+            <a:srgbClr val="FFFFFF"/>
+          </a:solidFill>
+          <a:ln w="12700">
+            <a:solidFill>
+              <a:srgbClr val="999999"/>
+            </a:solidFill>
+          </a:ln>
+        </p:spPr>
+        <p:style>
+          <a:lnRef idx="1">
+            <a:schemeClr val="accent1"/>
+          </a:lnRef>
+          <a:fillRef idx="3">
+            <a:schemeClr val="accent1"/>
+          </a:fillRef>
+          <a:effectRef idx="2">
+            <a:schemeClr val="accent1"/>
+          </a:effectRef>
+          <a:fontRef idx="minor">
+            <a:schemeClr val="lt1"/>
+          </a:fontRef>
+        </p:style>
+        <p:txBody>
+          <a:bodyPr rtlCol="0" anchor="ctr"/>
+          <a:lstStyle/>
+          <a:p>
+            <a:pPr algn="ctr"/>
+          </a:p>
+        </p:txBody>
+      </p:sp>
+      <p:sp>
+        <p:nvSpPr>
+          <p:cNvPr id="24" name="Rectangle 23"/>
+          <p:cNvSpPr/>
+          <p:nvPr/>
+        </p:nvSpPr>
+        <p:spPr>
+          <a:xfrm>
+            <a:off x="700000" y="6016665"/>
+            <a:ext cx="90000" cy="833333"/>
+          </a:xfrm>
+          <a:prstGeom prst="rect">
+            <a:avLst/>
+          </a:prstGeom>
+          <a:solidFill>
+            <a:srgbClr val="CC0000"/>
+          </a:solidFill>
+          <a:ln>
+            <a:noFill/>
+          </a:ln>
+        </p:spPr>
+        <p:style>
+          <a:lnRef idx="1">
+            <a:schemeClr val="accent1"/>
+          </a:lnRef>
+          <a:fillRef idx="3">
+            <a:schemeClr val="accent1"/>
+          </a:fillRef>
+          <a:effectRef idx="2">
+            <a:schemeClr val="accent1"/>
+          </a:effectRef>
+          <a:fontRef idx="minor">
+            <a:schemeClr val="lt1"/>
+          </a:fontRef>
+        </p:style>
+        <p:txBody>
+          <a:bodyPr rtlCol="0" anchor="ctr"/>
+          <a:lstStyle/>
+          <a:p>
+            <a:pPr algn="ctr"/>
+          </a:p>
+        </p:txBody>
+      </p:sp>
+      <p:sp>
+        <p:nvSpPr>
+          <p:cNvPr id="25" name="TextBox 24"/>
+          <p:cNvSpPr txBox="1"/>
+          <p:nvPr/>
+        </p:nvSpPr>
+        <p:spPr>
+          <a:xfrm>
+            <a:off x="1000000" y="6096665"/>
+            <a:ext cx="10400000" cy="673333"/>
+          </a:xfrm>
+          <a:prstGeom prst="rect">
+            <a:avLst/>
+          </a:prstGeom>
+          <a:noFill/>
+        </p:spPr>
+        <p:txBody>
+          <a:bodyPr wrap="square" anchor="ctr">
+            <a:spAutoFit/>
+          </a:bodyPr>
+          <a:lstStyle/>
+          <a:p>
+            <a:pPr algn="l"/>
+            <a:r>
+              <a:rPr sz="1200" b="0">
+                <a:solidFill>
+                  <a:srgbClr val="333333"/>
+                </a:solidFill>
+                <a:latin typeface="Open Sans"/>
+                <a:ea typeface="Open Sans"/>
+                <a:cs typeface="Open Sans"/>
+              </a:rPr>
+              <a:t>Без сознания, но при нормальном дыхании — на бок</a:t>
+            </a:r>
+          </a:p>
+        </p:txBody>
+      </p:sp>
+    </p:spTree>
+  </p:cSld>
+  <p:clrMapOvr>
+    <a:masterClrMapping/>
+  </p:clrMapOvr>
+</p:sld>
+</file>
+
+<file path=ppt/slides/slide14.xml><?xml version="1.0" encoding="utf-8"?>
+<p:sld xmlns:a="http://schemas.openxmlformats.org/drawingml/2006/main" xmlns:p="http://schemas.openxmlformats.org/presentationml/2006/main" xmlns:r="http://schemas.openxmlformats.org/officeDocument/2006/relationships">
+  <p:cSld>
+    <p:spTree>
+      <p:nvGrpSpPr>
+        <p:cNvPr id="1" name=""/>
+        <p:cNvGrpSpPr/>
+        <p:nvPr/>
+      </p:nvGrpSpPr>
+      <p:grpSpPr/>
+      <p:sp>
+        <p:nvSpPr>
+          <p:cNvPr id="2" name="Rectangle 1"/>
+          <p:cNvSpPr/>
+          <p:nvPr/>
+        </p:nvSpPr>
+        <p:spPr>
+          <a:xfrm>
+            <a:off x="0" y="0"/>
+            <a:ext cx="12191695" cy="6858000"/>
+          </a:xfrm>
+          <a:prstGeom prst="rect">
+            <a:avLst/>
+          </a:prstGeom>
+          <a:solidFill>
+            <a:srgbClr val="FFFFFF"/>
+          </a:solidFill>
+          <a:ln>
+            <a:noFill/>
+          </a:ln>
+        </p:spPr>
+        <p:style>
+          <a:lnRef idx="1">
+            <a:schemeClr val="accent1"/>
+          </a:lnRef>
+          <a:fillRef idx="3">
+            <a:schemeClr val="accent1"/>
+          </a:fillRef>
+          <a:effectRef idx="2">
+            <a:schemeClr val="accent1"/>
+          </a:effectRef>
+          <a:fontRef idx="minor">
+            <a:schemeClr val="lt1"/>
+          </a:fontRef>
+        </p:style>
+        <p:txBody>
+          <a:bodyPr rtlCol="0" anchor="ctr"/>
+          <a:lstStyle/>
+          <a:p>
+            <a:pPr algn="ctr"/>
+          </a:p>
+        </p:txBody>
+      </p:sp>
+      <p:sp>
+        <p:nvSpPr>
+          <p:cNvPr id="3" name="TextBox 2"/>
+          <p:cNvSpPr txBox="1"/>
+          <p:nvPr/>
+        </p:nvSpPr>
+        <p:spPr>
+          <a:xfrm>
+            <a:off x="700000" y="250000"/>
+            <a:ext cx="11200000" cy="550000"/>
+          </a:xfrm>
+          <a:prstGeom prst="rect">
+            <a:avLst/>
+          </a:prstGeom>
+          <a:noFill/>
+        </p:spPr>
+        <p:txBody>
+          <a:bodyPr wrap="square" anchor="t">
+            <a:spAutoFit/>
+          </a:bodyPr>
+          <a:lstStyle/>
+          <a:p>
+            <a:pPr algn="l"/>
+            <a:r>
+              <a:rPr sz="2200" b="1">
+                <a:solidFill>
+                  <a:srgbClr val="333333"/>
+                </a:solidFill>
+                <a:latin typeface="Open Sans"/>
+                <a:ea typeface="Open Sans"/>
+                <a:cs typeface="Open Sans"/>
+              </a:rPr>
+              <a:t>ПАМЯТКА</a:t>
+            </a:r>
+          </a:p>
+        </p:txBody>
+      </p:sp>
+      <p:sp>
+        <p:nvSpPr>
+          <p:cNvPr id="4" name="Rectangle 3"/>
+          <p:cNvSpPr/>
+          <p:nvPr/>
+        </p:nvSpPr>
+        <p:spPr>
+          <a:xfrm>
+            <a:off x="700000" y="850000"/>
+            <a:ext cx="9000000" cy="28000"/>
+          </a:xfrm>
+          <a:prstGeom prst="rect">
+            <a:avLst/>
+          </a:prstGeom>
+          <a:solidFill>
+            <a:srgbClr val="555555"/>
+          </a:solidFill>
+          <a:ln>
+            <a:noFill/>
+          </a:ln>
+        </p:spPr>
+        <p:style>
+          <a:lnRef idx="1">
+            <a:schemeClr val="accent1"/>
+          </a:lnRef>
+          <a:fillRef idx="3">
+            <a:schemeClr val="accent1"/>
+          </a:fillRef>
+          <a:effectRef idx="2">
+            <a:schemeClr val="accent1"/>
+          </a:effectRef>
+          <a:fontRef idx="minor">
+            <a:schemeClr val="lt1"/>
+          </a:fontRef>
+        </p:style>
+        <p:txBody>
+          <a:bodyPr rtlCol="0" anchor="ctr"/>
+          <a:lstStyle/>
+          <a:p>
+            <a:pPr algn="ctr"/>
+          </a:p>
+        </p:txBody>
+      </p:sp>
+      <p:sp>
+        <p:nvSpPr>
+          <p:cNvPr id="5" name="TextBox 4"/>
+          <p:cNvSpPr txBox="1"/>
+          <p:nvPr/>
+        </p:nvSpPr>
+        <p:spPr>
+          <a:xfrm>
+            <a:off x="700000" y="920000"/>
+            <a:ext cx="11000000" cy="350000"/>
+          </a:xfrm>
+          <a:prstGeom prst="rect">
+            <a:avLst/>
+          </a:prstGeom>
+          <a:noFill/>
+        </p:spPr>
+        <p:txBody>
+          <a:bodyPr wrap="square" anchor="t">
+            <a:spAutoFit/>
+          </a:bodyPr>
+          <a:lstStyle/>
+          <a:p>
+            <a:pPr algn="l"/>
+            <a:r>
+              <a:rPr sz="1200" b="0">
+                <a:solidFill>
+                  <a:srgbClr val="666666"/>
+                </a:solidFill>
+                <a:latin typeface="Open Sans"/>
+                <a:ea typeface="Open Sans"/>
+                <a:cs typeface="Open Sans"/>
+              </a:rPr>
+              <a:t>Оказание первой помощи при травмах, ранениях и поражениях, прочих состояниях</a:t>
+            </a:r>
+          </a:p>
+        </p:txBody>
+      </p:sp>
+      <p:sp>
+        <p:nvSpPr>
+          <p:cNvPr id="6" name="Rectangle 5"/>
+          <p:cNvSpPr/>
+          <p:nvPr/>
+        </p:nvSpPr>
+        <p:spPr>
+          <a:xfrm>
+            <a:off x="0" y="2800000"/>
+            <a:ext cx="420000" cy="420000"/>
+          </a:xfrm>
+          <a:prstGeom prst="rect">
+            <a:avLst/>
+          </a:prstGeom>
+          <a:solidFill>
+            <a:srgbClr val="555555"/>
+          </a:solidFill>
+          <a:ln>
+            <a:noFill/>
+          </a:ln>
+        </p:spPr>
+        <p:style>
+          <a:lnRef idx="1">
+            <a:schemeClr val="accent1"/>
+          </a:lnRef>
+          <a:fillRef idx="3">
+            <a:schemeClr val="accent1"/>
+          </a:fillRef>
+          <a:effectRef idx="2">
+            <a:schemeClr val="accent1"/>
+          </a:effectRef>
+          <a:fontRef idx="minor">
+            <a:schemeClr val="lt1"/>
+          </a:fontRef>
+        </p:style>
+        <p:txBody>
+          <a:bodyPr rtlCol="0" anchor="ctr"/>
+          <a:lstStyle/>
+          <a:p>
+            <a:pPr algn="ctr"/>
+          </a:p>
+        </p:txBody>
+      </p:sp>
+      <p:sp>
+        <p:nvSpPr>
+          <p:cNvPr id="7" name="TextBox 6"/>
+          <p:cNvSpPr txBox="1"/>
+          <p:nvPr/>
+        </p:nvSpPr>
+        <p:spPr>
+          <a:xfrm>
+            <a:off x="0" y="2800000"/>
+            <a:ext cx="420000" cy="420000"/>
+          </a:xfrm>
+          <a:prstGeom prst="rect">
+            <a:avLst/>
+          </a:prstGeom>
+          <a:noFill/>
+        </p:spPr>
+        <p:txBody>
+          <a:bodyPr wrap="square" anchor="ctr">
+            <a:spAutoFit/>
+          </a:bodyPr>
+          <a:lstStyle/>
+          <a:p>
+            <a:pPr algn="ctr"/>
+            <a:r>
+              <a:rPr sz="1400" b="1">
+                <a:solidFill>
+                  <a:srgbClr val="FFFFFF"/>
+                </a:solidFill>
+                <a:latin typeface="Open Sans"/>
+                <a:ea typeface="Open Sans"/>
+                <a:cs typeface="Open Sans"/>
+              </a:rPr>
+              <a:t>14</a:t>
+            </a:r>
+          </a:p>
+        </p:txBody>
+      </p:sp>
+      <p:pic>
+        <p:nvPicPr>
+          <p:cNvPr id="8" name="Picture 7" descr="pamyatka-tema4-termicheskie-16x9.png"/>
+          <p:cNvPicPr>
+            <a:picLocks noChangeAspect="1"/>
+          </p:cNvPicPr>
+          <p:nvPr/>
+        </p:nvPicPr>
+        <p:blipFill>
+          <a:blip r:embed="rId2"/>
+          <a:stretch>
+            <a:fillRect/>
+          </a:stretch>
+        </p:blipFill>
+        <p:spPr>
+          <a:xfrm>
+            <a:off x="2300000" y="1400000"/>
+            <a:ext cx="7800000" cy="5200000"/>
+          </a:xfrm>
+          <a:prstGeom prst="rect">
+            <a:avLst/>
+          </a:prstGeom>
+        </p:spPr>
+      </p:pic>
+    </p:spTree>
+  </p:cSld>
+  <p:clrMapOvr>
+    <a:masterClrMapping/>
+  </p:clrMapOvr>
+</p:sld>
+</file>
+
+<file path=ppt/slides/slide15.xml><?xml version="1.0" encoding="utf-8"?>
+<p:sld xmlns:a="http://schemas.openxmlformats.org/drawingml/2006/main" xmlns:p="http://schemas.openxmlformats.org/presentationml/2006/main" xmlns:r="http://schemas.openxmlformats.org/officeDocument/2006/relationships">
+  <p:cSld>
+    <p:spTree>
+      <p:nvGrpSpPr>
+        <p:cNvPr id="1" name=""/>
+        <p:cNvGrpSpPr/>
+        <p:nvPr/>
+      </p:nvGrpSpPr>
+      <p:grpSpPr/>
+      <p:sp>
+        <p:nvSpPr>
+          <p:cNvPr id="2" name="Rectangle 1"/>
+          <p:cNvSpPr/>
+          <p:nvPr/>
+        </p:nvSpPr>
+        <p:spPr>
+          <a:xfrm>
+            <a:off x="0" y="0"/>
             <a:ext cx="3400000" cy="6858000"/>
           </a:xfrm>
           <a:prstGeom prst="rect">
@@ -4226,7 +6715,7 @@
                 <a:ea typeface="Open Sans"/>
                 <a:cs typeface="Open Sans"/>
               </a:rPr>
-              <a:t>Виды поражений</a:t>
+              <a:t>Общие и местные поражения</a:t>
             </a:r>
           </a:p>
         </p:txBody>
@@ -4388,7 +6877,7 @@
                 <a:ea typeface="Open Sans"/>
                 <a:cs typeface="Open Sans"/>
               </a:rPr>
-              <a:t>Ожоги</a:t>
+              <a:t>Ожоги: глубина и площадь</a:t>
             </a:r>
           </a:p>
         </p:txBody>
@@ -4550,7 +7039,7 @@
                 <a:ea typeface="Open Sans"/>
                 <a:cs typeface="Open Sans"/>
               </a:rPr>
-              <a:t>Перегревание</a:t>
+              <a:t>Охлаждение и защита раны</a:t>
             </a:r>
           </a:p>
         </p:txBody>
@@ -4712,7 +7201,7 @@
                 <a:ea typeface="Open Sans"/>
                 <a:cs typeface="Open Sans"/>
               </a:rPr>
-              <a:t>Отморожение</a:t>
+              <a:t>Перегревание</a:t>
             </a:r>
           </a:p>
         </p:txBody>
@@ -4874,7 +7363,7 @@
                 <a:ea typeface="Open Sans"/>
                 <a:cs typeface="Open Sans"/>
               </a:rPr>
-              <a:t>Переохлаждение</a:t>
+              <a:t>Холодовые поражения</a:t>
             </a:r>
           </a:p>
         </p:txBody>
@@ -4972,7 +7461,7 @@
                 <a:ea typeface="Open Sans"/>
                 <a:cs typeface="Open Sans"/>
               </a:rPr>
-              <a:t>ТЕРМИЧЕСКИЕ ПОРАЖЕНИЯ</a:t>
+              <a:t>МЕСТНЫЕ И ОБЩИЕ ПОРАЖЕНИЯ</a:t>
             </a:r>
           </a:p>
         </p:txBody>
@@ -5145,8 +7634,8 @@
         </p:nvSpPr>
         <p:spPr>
           <a:xfrm>
-            <a:off x="700000" y="1450000"/>
-            <a:ext cx="5375000" cy="4800000"/>
+            <a:off x="700000" y="1400000"/>
+            <a:ext cx="5400000" cy="2420000"/>
           </a:xfrm>
           <a:prstGeom prst="rect">
             <a:avLst/>
@@ -5190,8 +7679,8 @@
         </p:nvSpPr>
         <p:spPr>
           <a:xfrm>
-            <a:off x="850000" y="1650000"/>
-            <a:ext cx="500000" cy="500000"/>
+            <a:off x="820000" y="1550000"/>
+            <a:ext cx="450000" cy="450000"/>
           </a:xfrm>
           <a:prstGeom prst="ellipse">
             <a:avLst/>
@@ -5233,8 +7722,8 @@
         </p:nvSpPr>
         <p:spPr>
           <a:xfrm>
-            <a:off x="850000" y="1650000"/>
-            <a:ext cx="500000" cy="500000"/>
+            <a:off x="820000" y="1550000"/>
+            <a:ext cx="450000" cy="450000"/>
           </a:xfrm>
           <a:prstGeom prst="rect">
             <a:avLst/>
@@ -5249,7 +7738,7 @@
           <a:p>
             <a:pPr algn="ctr"/>
             <a:r>
-              <a:rPr sz="1400" b="1">
+              <a:rPr sz="1300" b="1">
                 <a:solidFill>
                   <a:srgbClr val="FFFFFF"/>
                 </a:solidFill>
@@ -5270,8 +7759,8 @@
         </p:nvSpPr>
         <p:spPr>
           <a:xfrm>
-            <a:off x="1450000" y="1700000"/>
-            <a:ext cx="4475000" cy="450000"/>
+            <a:off x="1350000" y="1580000"/>
+            <a:ext cx="4600000" cy="400000"/>
           </a:xfrm>
           <a:prstGeom prst="rect">
             <a:avLst/>
@@ -5286,7 +7775,7 @@
           <a:p>
             <a:pPr algn="l"/>
             <a:r>
-              <a:rPr sz="1300" b="1">
+              <a:rPr sz="1200" b="1">
                 <a:solidFill>
                   <a:srgbClr val="333333"/>
                 </a:solidFill>
@@ -5294,7 +7783,7 @@
                 <a:ea typeface="Open Sans"/>
                 <a:cs typeface="Open Sans"/>
               </a:rPr>
-              <a:t>Местные</a:t>
+              <a:t>Ожог</a:t>
             </a:r>
           </a:p>
         </p:txBody>
@@ -5307,8 +7796,8 @@
         </p:nvSpPr>
         <p:spPr>
           <a:xfrm>
-            <a:off x="850000" y="2300000"/>
-            <a:ext cx="5075000" cy="3800000"/>
+            <a:off x="820000" y="2100000"/>
+            <a:ext cx="5160000" cy="1570000"/>
           </a:xfrm>
           <a:prstGeom prst="rect">
             <a:avLst/>
@@ -5331,7 +7820,7 @@
                 <a:ea typeface="Open Sans"/>
                 <a:cs typeface="Open Sans"/>
               </a:rPr>
-              <a:t>Ожог или отморожение отдельного участка тела.</a:t>
+              <a:t>Местное повреждение тканей высокой температурой, паром, горячей жидкостью или пламенем.</a:t>
             </a:r>
           </a:p>
         </p:txBody>
@@ -5344,8 +7833,8 @@
         </p:nvSpPr>
         <p:spPr>
           <a:xfrm>
-            <a:off x="6325000" y="1450000"/>
-            <a:ext cx="5375000" cy="4800000"/>
+            <a:off x="6300000" y="1400000"/>
+            <a:ext cx="5400000" cy="2420000"/>
           </a:xfrm>
           <a:prstGeom prst="rect">
             <a:avLst/>
@@ -5389,8 +7878,8 @@
         </p:nvSpPr>
         <p:spPr>
           <a:xfrm>
-            <a:off x="6475000" y="1650000"/>
-            <a:ext cx="500000" cy="500000"/>
+            <a:off x="6420000" y="1550000"/>
+            <a:ext cx="450000" cy="450000"/>
           </a:xfrm>
           <a:prstGeom prst="ellipse">
             <a:avLst/>
@@ -5432,8 +7921,8 @@
         </p:nvSpPr>
         <p:spPr>
           <a:xfrm>
-            <a:off x="6475000" y="1650000"/>
-            <a:ext cx="500000" cy="500000"/>
+            <a:off x="6420000" y="1550000"/>
+            <a:ext cx="450000" cy="450000"/>
           </a:xfrm>
           <a:prstGeom prst="rect">
             <a:avLst/>
@@ -5448,7 +7937,7 @@
           <a:p>
             <a:pPr algn="ctr"/>
             <a:r>
-              <a:rPr sz="1400" b="1">
+              <a:rPr sz="1300" b="1">
                 <a:solidFill>
                   <a:srgbClr val="FFFFFF"/>
                 </a:solidFill>
@@ -5469,8 +7958,8 @@
         </p:nvSpPr>
         <p:spPr>
           <a:xfrm>
-            <a:off x="7075000" y="1700000"/>
-            <a:ext cx="4475000" cy="450000"/>
+            <a:off x="6950000" y="1580000"/>
+            <a:ext cx="4600000" cy="400000"/>
           </a:xfrm>
           <a:prstGeom prst="rect">
             <a:avLst/>
@@ -5485,7 +7974,7 @@
           <a:p>
             <a:pPr algn="l"/>
             <a:r>
-              <a:rPr sz="1300" b="1">
+              <a:rPr sz="1200" b="1">
                 <a:solidFill>
                   <a:srgbClr val="333333"/>
                 </a:solidFill>
@@ -5493,7 +7982,7 @@
                 <a:ea typeface="Open Sans"/>
                 <a:cs typeface="Open Sans"/>
               </a:rPr>
-              <a:t>Общие</a:t>
+              <a:t>Отморожение</a:t>
             </a:r>
           </a:p>
         </p:txBody>
@@ -5506,8 +7995,8 @@
         </p:nvSpPr>
         <p:spPr>
           <a:xfrm>
-            <a:off x="6475000" y="2300000"/>
-            <a:ext cx="5075000" cy="3800000"/>
+            <a:off x="6420000" y="2100000"/>
+            <a:ext cx="5160000" cy="1570000"/>
           </a:xfrm>
           <a:prstGeom prst="rect">
             <a:avLst/>
@@ -5530,7 +8019,405 @@
                 <a:ea typeface="Open Sans"/>
                 <a:cs typeface="Open Sans"/>
               </a:rPr>
-              <a:t>Перегревание или общее переохлаждение организма.</a:t>
+              <a:t>Местное повреждение тканей при действии низкой температуры и нарушении кровообращения.</a:t>
+            </a:r>
+          </a:p>
+        </p:txBody>
+      </p:sp>
+      <p:sp>
+        <p:nvSpPr>
+          <p:cNvPr id="18" name="Rectangle 17"/>
+          <p:cNvSpPr/>
+          <p:nvPr/>
+        </p:nvSpPr>
+        <p:spPr>
+          <a:xfrm>
+            <a:off x="700000" y="3980000"/>
+            <a:ext cx="5400000" cy="2420000"/>
+          </a:xfrm>
+          <a:prstGeom prst="rect">
+            <a:avLst/>
+          </a:prstGeom>
+          <a:solidFill>
+            <a:srgbClr val="FFFFFF"/>
+          </a:solidFill>
+          <a:ln w="12700">
+            <a:solidFill>
+              <a:srgbClr val="999999"/>
+            </a:solidFill>
+          </a:ln>
+        </p:spPr>
+        <p:style>
+          <a:lnRef idx="1">
+            <a:schemeClr val="accent1"/>
+          </a:lnRef>
+          <a:fillRef idx="3">
+            <a:schemeClr val="accent1"/>
+          </a:fillRef>
+          <a:effectRef idx="2">
+            <a:schemeClr val="accent1"/>
+          </a:effectRef>
+          <a:fontRef idx="minor">
+            <a:schemeClr val="lt1"/>
+          </a:fontRef>
+        </p:style>
+        <p:txBody>
+          <a:bodyPr rtlCol="0" anchor="ctr"/>
+          <a:lstStyle/>
+          <a:p>
+            <a:pPr algn="ctr"/>
+          </a:p>
+        </p:txBody>
+      </p:sp>
+      <p:sp>
+        <p:nvSpPr>
+          <p:cNvPr id="19" name="Oval 18"/>
+          <p:cNvSpPr/>
+          <p:nvPr/>
+        </p:nvSpPr>
+        <p:spPr>
+          <a:xfrm>
+            <a:off x="820000" y="4130000"/>
+            <a:ext cx="450000" cy="450000"/>
+          </a:xfrm>
+          <a:prstGeom prst="ellipse">
+            <a:avLst/>
+          </a:prstGeom>
+          <a:solidFill>
+            <a:srgbClr val="555555"/>
+          </a:solidFill>
+          <a:ln>
+            <a:noFill/>
+          </a:ln>
+        </p:spPr>
+        <p:style>
+          <a:lnRef idx="1">
+            <a:schemeClr val="accent1"/>
+          </a:lnRef>
+          <a:fillRef idx="3">
+            <a:schemeClr val="accent1"/>
+          </a:fillRef>
+          <a:effectRef idx="2">
+            <a:schemeClr val="accent1"/>
+          </a:effectRef>
+          <a:fontRef idx="minor">
+            <a:schemeClr val="lt1"/>
+          </a:fontRef>
+        </p:style>
+        <p:txBody>
+          <a:bodyPr rtlCol="0" anchor="ctr"/>
+          <a:lstStyle/>
+          <a:p>
+            <a:pPr algn="ctr"/>
+          </a:p>
+        </p:txBody>
+      </p:sp>
+      <p:sp>
+        <p:nvSpPr>
+          <p:cNvPr id="20" name="TextBox 19"/>
+          <p:cNvSpPr txBox="1"/>
+          <p:nvPr/>
+        </p:nvSpPr>
+        <p:spPr>
+          <a:xfrm>
+            <a:off x="820000" y="4130000"/>
+            <a:ext cx="450000" cy="450000"/>
+          </a:xfrm>
+          <a:prstGeom prst="rect">
+            <a:avLst/>
+          </a:prstGeom>
+          <a:noFill/>
+        </p:spPr>
+        <p:txBody>
+          <a:bodyPr wrap="square" anchor="ctr">
+            <a:spAutoFit/>
+          </a:bodyPr>
+          <a:lstStyle/>
+          <a:p>
+            <a:pPr algn="ctr"/>
+            <a:r>
+              <a:rPr sz="1300" b="1">
+                <a:solidFill>
+                  <a:srgbClr val="FFFFFF"/>
+                </a:solidFill>
+                <a:latin typeface="Open Sans"/>
+                <a:ea typeface="Open Sans"/>
+                <a:cs typeface="Open Sans"/>
+              </a:rPr>
+              <a:t>3</a:t>
+            </a:r>
+          </a:p>
+        </p:txBody>
+      </p:sp>
+      <p:sp>
+        <p:nvSpPr>
+          <p:cNvPr id="21" name="TextBox 20"/>
+          <p:cNvSpPr txBox="1"/>
+          <p:nvPr/>
+        </p:nvSpPr>
+        <p:spPr>
+          <a:xfrm>
+            <a:off x="1350000" y="4160000"/>
+            <a:ext cx="4600000" cy="400000"/>
+          </a:xfrm>
+          <a:prstGeom prst="rect">
+            <a:avLst/>
+          </a:prstGeom>
+          <a:noFill/>
+        </p:spPr>
+        <p:txBody>
+          <a:bodyPr wrap="square" anchor="t">
+            <a:spAutoFit/>
+          </a:bodyPr>
+          <a:lstStyle/>
+          <a:p>
+            <a:pPr algn="l"/>
+            <a:r>
+              <a:rPr sz="1200" b="1">
+                <a:solidFill>
+                  <a:srgbClr val="333333"/>
+                </a:solidFill>
+                <a:latin typeface="Open Sans"/>
+                <a:ea typeface="Open Sans"/>
+                <a:cs typeface="Open Sans"/>
+              </a:rPr>
+              <a:t>Перегревание</a:t>
+            </a:r>
+          </a:p>
+        </p:txBody>
+      </p:sp>
+      <p:sp>
+        <p:nvSpPr>
+          <p:cNvPr id="22" name="TextBox 21"/>
+          <p:cNvSpPr txBox="1"/>
+          <p:nvPr/>
+        </p:nvSpPr>
+        <p:spPr>
+          <a:xfrm>
+            <a:off x="820000" y="4680000"/>
+            <a:ext cx="5160000" cy="1570000"/>
+          </a:xfrm>
+          <a:prstGeom prst="rect">
+            <a:avLst/>
+          </a:prstGeom>
+          <a:noFill/>
+        </p:spPr>
+        <p:txBody>
+          <a:bodyPr wrap="square" anchor="t">
+            <a:spAutoFit/>
+          </a:bodyPr>
+          <a:lstStyle/>
+          <a:p>
+            <a:pPr algn="l"/>
+            <a:r>
+              <a:rPr sz="1200" b="0">
+                <a:solidFill>
+                  <a:srgbClr val="666666"/>
+                </a:solidFill>
+                <a:latin typeface="Open Sans"/>
+                <a:ea typeface="Open Sans"/>
+                <a:cs typeface="Open Sans"/>
+              </a:rPr>
+              <a:t>Общее состояние из-за накопления тепла и недостаточной теплоотдачи.</a:t>
+            </a:r>
+          </a:p>
+        </p:txBody>
+      </p:sp>
+      <p:sp>
+        <p:nvSpPr>
+          <p:cNvPr id="23" name="Rectangle 22"/>
+          <p:cNvSpPr/>
+          <p:nvPr/>
+        </p:nvSpPr>
+        <p:spPr>
+          <a:xfrm>
+            <a:off x="6300000" y="3980000"/>
+            <a:ext cx="5400000" cy="2420000"/>
+          </a:xfrm>
+          <a:prstGeom prst="rect">
+            <a:avLst/>
+          </a:prstGeom>
+          <a:solidFill>
+            <a:srgbClr val="FFFFFF"/>
+          </a:solidFill>
+          <a:ln w="12700">
+            <a:solidFill>
+              <a:srgbClr val="999999"/>
+            </a:solidFill>
+          </a:ln>
+        </p:spPr>
+        <p:style>
+          <a:lnRef idx="1">
+            <a:schemeClr val="accent1"/>
+          </a:lnRef>
+          <a:fillRef idx="3">
+            <a:schemeClr val="accent1"/>
+          </a:fillRef>
+          <a:effectRef idx="2">
+            <a:schemeClr val="accent1"/>
+          </a:effectRef>
+          <a:fontRef idx="minor">
+            <a:schemeClr val="lt1"/>
+          </a:fontRef>
+        </p:style>
+        <p:txBody>
+          <a:bodyPr rtlCol="0" anchor="ctr"/>
+          <a:lstStyle/>
+          <a:p>
+            <a:pPr algn="ctr"/>
+          </a:p>
+        </p:txBody>
+      </p:sp>
+      <p:sp>
+        <p:nvSpPr>
+          <p:cNvPr id="24" name="Oval 23"/>
+          <p:cNvSpPr/>
+          <p:nvPr/>
+        </p:nvSpPr>
+        <p:spPr>
+          <a:xfrm>
+            <a:off x="6420000" y="4130000"/>
+            <a:ext cx="450000" cy="450000"/>
+          </a:xfrm>
+          <a:prstGeom prst="ellipse">
+            <a:avLst/>
+          </a:prstGeom>
+          <a:solidFill>
+            <a:srgbClr val="555555"/>
+          </a:solidFill>
+          <a:ln>
+            <a:noFill/>
+          </a:ln>
+        </p:spPr>
+        <p:style>
+          <a:lnRef idx="1">
+            <a:schemeClr val="accent1"/>
+          </a:lnRef>
+          <a:fillRef idx="3">
+            <a:schemeClr val="accent1"/>
+          </a:fillRef>
+          <a:effectRef idx="2">
+            <a:schemeClr val="accent1"/>
+          </a:effectRef>
+          <a:fontRef idx="minor">
+            <a:schemeClr val="lt1"/>
+          </a:fontRef>
+        </p:style>
+        <p:txBody>
+          <a:bodyPr rtlCol="0" anchor="ctr"/>
+          <a:lstStyle/>
+          <a:p>
+            <a:pPr algn="ctr"/>
+          </a:p>
+        </p:txBody>
+      </p:sp>
+      <p:sp>
+        <p:nvSpPr>
+          <p:cNvPr id="25" name="TextBox 24"/>
+          <p:cNvSpPr txBox="1"/>
+          <p:nvPr/>
+        </p:nvSpPr>
+        <p:spPr>
+          <a:xfrm>
+            <a:off x="6420000" y="4130000"/>
+            <a:ext cx="450000" cy="450000"/>
+          </a:xfrm>
+          <a:prstGeom prst="rect">
+            <a:avLst/>
+          </a:prstGeom>
+          <a:noFill/>
+        </p:spPr>
+        <p:txBody>
+          <a:bodyPr wrap="square" anchor="ctr">
+            <a:spAutoFit/>
+          </a:bodyPr>
+          <a:lstStyle/>
+          <a:p>
+            <a:pPr algn="ctr"/>
+            <a:r>
+              <a:rPr sz="1300" b="1">
+                <a:solidFill>
+                  <a:srgbClr val="FFFFFF"/>
+                </a:solidFill>
+                <a:latin typeface="Open Sans"/>
+                <a:ea typeface="Open Sans"/>
+                <a:cs typeface="Open Sans"/>
+              </a:rPr>
+              <a:t>4</a:t>
+            </a:r>
+          </a:p>
+        </p:txBody>
+      </p:sp>
+      <p:sp>
+        <p:nvSpPr>
+          <p:cNvPr id="26" name="TextBox 25"/>
+          <p:cNvSpPr txBox="1"/>
+          <p:nvPr/>
+        </p:nvSpPr>
+        <p:spPr>
+          <a:xfrm>
+            <a:off x="6950000" y="4160000"/>
+            <a:ext cx="4600000" cy="400000"/>
+          </a:xfrm>
+          <a:prstGeom prst="rect">
+            <a:avLst/>
+          </a:prstGeom>
+          <a:noFill/>
+        </p:spPr>
+        <p:txBody>
+          <a:bodyPr wrap="square" anchor="t">
+            <a:spAutoFit/>
+          </a:bodyPr>
+          <a:lstStyle/>
+          <a:p>
+            <a:pPr algn="l"/>
+            <a:r>
+              <a:rPr sz="1200" b="1">
+                <a:solidFill>
+                  <a:srgbClr val="333333"/>
+                </a:solidFill>
+                <a:latin typeface="Open Sans"/>
+                <a:ea typeface="Open Sans"/>
+                <a:cs typeface="Open Sans"/>
+              </a:rPr>
+              <a:t>Переохлаждение</a:t>
+            </a:r>
+          </a:p>
+        </p:txBody>
+      </p:sp>
+      <p:sp>
+        <p:nvSpPr>
+          <p:cNvPr id="27" name="TextBox 26"/>
+          <p:cNvSpPr txBox="1"/>
+          <p:nvPr/>
+        </p:nvSpPr>
+        <p:spPr>
+          <a:xfrm>
+            <a:off x="6420000" y="4680000"/>
+            <a:ext cx="5160000" cy="1570000"/>
+          </a:xfrm>
+          <a:prstGeom prst="rect">
+            <a:avLst/>
+          </a:prstGeom>
+          <a:noFill/>
+        </p:spPr>
+        <p:txBody>
+          <a:bodyPr wrap="square" anchor="t">
+            <a:spAutoFit/>
+          </a:bodyPr>
+          <a:lstStyle/>
+          <a:p>
+            <a:pPr algn="l"/>
+            <a:r>
+              <a:rPr sz="1200" b="0">
+                <a:solidFill>
+                  <a:srgbClr val="666666"/>
+                </a:solidFill>
+                <a:latin typeface="Open Sans"/>
+                <a:ea typeface="Open Sans"/>
+                <a:cs typeface="Open Sans"/>
+              </a:rPr>
+              <a:t>Общее снижение температуры организма при длительном или интенсивном охлаждении.</a:t>
             </a:r>
           </a:p>
         </p:txBody>
@@ -5628,7 +8515,7 @@
                 <a:ea typeface="Open Sans"/>
                 <a:cs typeface="Open Sans"/>
               </a:rPr>
-              <a:t>ГЛУБИНА И ПЛОЩАДЬ ОЖОГА</a:t>
+              <a:t>ПОВЕРХНОСТНЫЙ И ГЛУБОКИЙ ОЖОГ</a:t>
             </a:r>
           </a:p>
         </p:txBody>
@@ -5801,7 +8688,7 @@
         </p:nvSpPr>
         <p:spPr>
           <a:xfrm>
-            <a:off x="700000" y="1450000"/>
+            <a:off x="700000" y="1400000"/>
             <a:ext cx="5400000" cy="400000"/>
           </a:xfrm>
           <a:prstGeom prst="rect">
@@ -5825,7 +8712,7 @@
                 <a:ea typeface="Open Sans"/>
                 <a:cs typeface="Open Sans"/>
               </a:rPr>
-              <a:t>По глубине</a:t>
+              <a:t>Поверхностный</a:t>
             </a:r>
           </a:p>
         </p:txBody>
@@ -5838,7 +8725,7 @@
         </p:nvSpPr>
         <p:spPr>
           <a:xfrm>
-            <a:off x="6600000" y="1450000"/>
+            <a:off x="6600000" y="1400000"/>
             <a:ext cx="5400000" cy="400000"/>
           </a:xfrm>
           <a:prstGeom prst="rect">
@@ -5862,7 +8749,7 @@
                 <a:ea typeface="Open Sans"/>
                 <a:cs typeface="Open Sans"/>
               </a:rPr>
-              <a:t>По площади</a:t>
+              <a:t>Глубокий</a:t>
             </a:r>
           </a:p>
         </p:txBody>
@@ -5875,7 +8762,7 @@
         </p:nvSpPr>
         <p:spPr>
           <a:xfrm>
-            <a:off x="700000" y="1950000"/>
+            <a:off x="700000" y="1850000"/>
             <a:ext cx="5400000" cy="4000000"/>
           </a:xfrm>
           <a:prstGeom prst="rect">
@@ -5903,7 +8790,7 @@
                 <a:ea typeface="Open Sans"/>
                 <a:cs typeface="Open Sans"/>
               </a:rPr>
-              <a:t>•  поверхностный: покраснение, боль, пузыри</a:t>
+              <a:t>•  покраснение, отек и выраженная болезненность</a:t>
             </a:r>
           </a:p>
           <a:p>
@@ -5921,7 +8808,7 @@
                 <a:ea typeface="Open Sans"/>
                 <a:cs typeface="Open Sans"/>
               </a:rPr>
-              <a:t>•  глубокий: повреждение всей толщины кожи и глубже</a:t>
+              <a:t>•  возможно образование пузырей с прозрачным содержимым</a:t>
             </a:r>
           </a:p>
           <a:p>
@@ -5939,32 +8826,9 @@
                 <a:ea typeface="Open Sans"/>
                 <a:cs typeface="Open Sans"/>
               </a:rPr>
-              <a:t>•  глубину окончательно оценивает специалист</a:t>
-            </a:r>
-          </a:p>
-        </p:txBody>
-      </p:sp>
-      <p:sp>
-        <p:nvSpPr>
-          <p:cNvPr id="11" name="TextBox 10"/>
-          <p:cNvSpPr txBox="1"/>
-          <p:nvPr/>
-        </p:nvSpPr>
-        <p:spPr>
-          <a:xfrm>
-            <a:off x="6600000" y="1950000"/>
-            <a:ext cx="5400000" cy="4000000"/>
-          </a:xfrm>
-          <a:prstGeom prst="rect">
-            <a:avLst/>
-          </a:prstGeom>
-          <a:noFill/>
-        </p:spPr>
-        <p:txBody>
-          <a:bodyPr wrap="square">
-            <a:spAutoFit/>
-          </a:bodyPr>
-          <a:lstStyle/>
+              <a:t>•  кожа обычно сохраняет чувствительность</a:t>
+            </a:r>
+          </a:p>
           <a:p>
             <a:pPr algn="l">
               <a:spcAft>
@@ -5980,9 +8844,32 @@
                 <a:ea typeface="Open Sans"/>
                 <a:cs typeface="Open Sans"/>
               </a:rPr>
-              <a:t>•  ладонь пострадавшего — примерно 1%</a:t>
-            </a:r>
-          </a:p>
+              <a:t>•  пузыри не вскрывают и приставшую одежду не отрывают</a:t>
+            </a:r>
+          </a:p>
+        </p:txBody>
+      </p:sp>
+      <p:sp>
+        <p:nvSpPr>
+          <p:cNvPr id="11" name="TextBox 10"/>
+          <p:cNvSpPr txBox="1"/>
+          <p:nvPr/>
+        </p:nvSpPr>
+        <p:spPr>
+          <a:xfrm>
+            <a:off x="6600000" y="1850000"/>
+            <a:ext cx="5400000" cy="4000000"/>
+          </a:xfrm>
+          <a:prstGeom prst="rect">
+            <a:avLst/>
+          </a:prstGeom>
+          <a:noFill/>
+        </p:spPr>
+        <p:txBody>
+          <a:bodyPr wrap="square">
+            <a:spAutoFit/>
+          </a:bodyPr>
+          <a:lstStyle/>
           <a:p>
             <a:pPr algn="l">
               <a:spcAft>
@@ -5998,7 +8885,7 @@
                 <a:ea typeface="Open Sans"/>
                 <a:cs typeface="Open Sans"/>
               </a:rPr>
-              <a:t>•  правило девяток — оценка крупных областей</a:t>
+              <a:t>•  повреждается вся толщина кожи и более глубокие ткани</a:t>
             </a:r>
           </a:p>
           <a:p>
@@ -6016,7 +8903,7 @@
                 <a:ea typeface="Open Sans"/>
                 <a:cs typeface="Open Sans"/>
               </a:rPr>
-              <a:t>•  опасны поверхностные ожоги более 15%</a:t>
+              <a:t>•  кожа может быть белой, бурой, обугленной или сухой</a:t>
             </a:r>
           </a:p>
           <a:p>
@@ -6034,7 +8921,25 @@
                 <a:ea typeface="Open Sans"/>
                 <a:cs typeface="Open Sans"/>
               </a:rPr>
-              <a:t>•  опасны глубокие ожоги более 5%</a:t>
+              <a:t>•  болезненность в центре иногда снижена из-за повреждения нервов</a:t>
+            </a:r>
+          </a:p>
+          <a:p>
+            <a:pPr algn="l">
+              <a:spcAft>
+                <a:spcPts val="800"/>
+              </a:spcAft>
+            </a:pPr>
+            <a:r>
+              <a:rPr sz="1300" b="0">
+                <a:solidFill>
+                  <a:srgbClr val="333333"/>
+                </a:solidFill>
+                <a:latin typeface="Open Sans"/>
+                <a:ea typeface="Open Sans"/>
+                <a:cs typeface="Open Sans"/>
+              </a:rPr>
+              <a:t>•  окончательную глубину определяют медицинские специалисты</a:t>
             </a:r>
           </a:p>
         </p:txBody>
@@ -6132,7 +9037,7 @@
                 <a:ea typeface="Open Sans"/>
                 <a:cs typeface="Open Sans"/>
               </a:rPr>
-              <a:t>ПЕРВАЯ ПОМОЩЬ ПРИ ОЖОГЕ</a:t>
+              <a:t>ОЦЕНКА ПЛОЩАДИ ОЖОГА</a:t>
             </a:r>
           </a:p>
         </p:txBody>
@@ -6299,20 +9204,151 @@
       </p:sp>
       <p:sp>
         <p:nvSpPr>
-          <p:cNvPr id="8" name="Oval 7"/>
+          <p:cNvPr id="8" name="TextBox 7"/>
+          <p:cNvSpPr txBox="1"/>
+          <p:nvPr/>
+        </p:nvSpPr>
+        <p:spPr>
+          <a:xfrm>
+            <a:off x="700000" y="1450000"/>
+            <a:ext cx="11000000" cy="4000000"/>
+          </a:xfrm>
+          <a:prstGeom prst="rect">
+            <a:avLst/>
+          </a:prstGeom>
+          <a:noFill/>
+        </p:spPr>
+        <p:txBody>
+          <a:bodyPr wrap="square">
+            <a:spAutoFit/>
+          </a:bodyPr>
+          <a:lstStyle/>
+          <a:p>
+            <a:pPr algn="l">
+              <a:spcAft>
+                <a:spcPts val="800"/>
+              </a:spcAft>
+            </a:pPr>
+            <a:r>
+              <a:rPr sz="1400" b="0">
+                <a:solidFill>
+                  <a:srgbClr val="333333"/>
+                </a:solidFill>
+                <a:latin typeface="Open Sans"/>
+                <a:ea typeface="Open Sans"/>
+                <a:cs typeface="Open Sans"/>
+              </a:rPr>
+              <a:t>•  Ладонь пострадавшего вместе с пальцами — примерно 1% поверхности его тела.</a:t>
+            </a:r>
+          </a:p>
+          <a:p>
+            <a:pPr algn="l">
+              <a:spcAft>
+                <a:spcPts val="800"/>
+              </a:spcAft>
+            </a:pPr>
+            <a:r>
+              <a:rPr sz="1400" b="0">
+                <a:solidFill>
+                  <a:srgbClr val="333333"/>
+                </a:solidFill>
+                <a:latin typeface="Open Sans"/>
+                <a:ea typeface="Open Sans"/>
+                <a:cs typeface="Open Sans"/>
+              </a:rPr>
+              <a:t>•  Метод ладони удобен для небольших или разбросанных участков.</a:t>
+            </a:r>
+          </a:p>
+          <a:p>
+            <a:pPr algn="l">
+              <a:spcAft>
+                <a:spcPts val="800"/>
+              </a:spcAft>
+            </a:pPr>
+            <a:r>
+              <a:rPr sz="1400" b="0">
+                <a:solidFill>
+                  <a:srgbClr val="333333"/>
+                </a:solidFill>
+                <a:latin typeface="Open Sans"/>
+                <a:ea typeface="Open Sans"/>
+                <a:cs typeface="Open Sans"/>
+              </a:rPr>
+              <a:t>•  По правилу девяток крупные области тела оценивают долями, кратными 9%.</a:t>
+            </a:r>
+          </a:p>
+          <a:p>
+            <a:pPr algn="l">
+              <a:spcAft>
+                <a:spcPts val="800"/>
+              </a:spcAft>
+            </a:pPr>
+            <a:r>
+              <a:rPr sz="1400" b="0">
+                <a:solidFill>
+                  <a:srgbClr val="333333"/>
+                </a:solidFill>
+                <a:latin typeface="Open Sans"/>
+                <a:ea typeface="Open Sans"/>
+                <a:cs typeface="Open Sans"/>
+              </a:rPr>
+              <a:t>•  Опасен поверхностный ожог более 15% поверхности тела.</a:t>
+            </a:r>
+          </a:p>
+          <a:p>
+            <a:pPr algn="l">
+              <a:spcAft>
+                <a:spcPts val="800"/>
+              </a:spcAft>
+            </a:pPr>
+            <a:r>
+              <a:rPr sz="1400" b="0">
+                <a:solidFill>
+                  <a:srgbClr val="333333"/>
+                </a:solidFill>
+                <a:latin typeface="Open Sans"/>
+                <a:ea typeface="Open Sans"/>
+                <a:cs typeface="Open Sans"/>
+              </a:rPr>
+              <a:t>•  Опасен глубокий ожог более 5% поверхности тела.</a:t>
+            </a:r>
+          </a:p>
+          <a:p>
+            <a:pPr algn="l">
+              <a:spcAft>
+                <a:spcPts val="800"/>
+              </a:spcAft>
+            </a:pPr>
+            <a:r>
+              <a:rPr sz="1400" b="0">
+                <a:solidFill>
+                  <a:srgbClr val="333333"/>
+                </a:solidFill>
+                <a:latin typeface="Open Sans"/>
+                <a:ea typeface="Open Sans"/>
+                <a:cs typeface="Open Sans"/>
+              </a:rPr>
+              <a:t>•  Особенно опасны ожоги лица, шеи, дыхательных путей, кистей, стоп и промежности.</a:t>
+            </a:r>
+          </a:p>
+        </p:txBody>
+      </p:sp>
+      <p:sp>
+        <p:nvSpPr>
+          <p:cNvPr id="9" name="Rounded Rectangle 8"/>
           <p:cNvSpPr/>
           <p:nvPr/>
         </p:nvSpPr>
         <p:spPr>
           <a:xfrm>
-            <a:off x="700000" y="1450000"/>
-            <a:ext cx="550000" cy="550000"/>
-          </a:xfrm>
-          <a:prstGeom prst="ellipse">
+            <a:off x="700000" y="5600000"/>
+            <a:ext cx="11000000" cy="1000000"/>
+          </a:xfrm>
+          <a:prstGeom prst="roundRect">
             <a:avLst/>
           </a:prstGeom>
           <a:solidFill>
-            <a:srgbClr val="CC0000"/>
+            <a:srgbClr val="F5F0E1"/>
           </a:solidFill>
           <a:ln>
             <a:noFill/>
@@ -6342,14 +9378,14 @@
       </p:sp>
       <p:sp>
         <p:nvSpPr>
-          <p:cNvPr id="9" name="TextBox 8"/>
+          <p:cNvPr id="10" name="TextBox 9"/>
           <p:cNvSpPr txBox="1"/>
           <p:nvPr/>
         </p:nvSpPr>
         <p:spPr>
           <a:xfrm>
-            <a:off x="700000" y="1450000"/>
-            <a:ext cx="550000" cy="550000"/>
+            <a:off x="950000" y="5800000"/>
+            <a:ext cx="10500000" cy="600000"/>
           </a:xfrm>
           <a:prstGeom prst="rect">
             <a:avLst/>
@@ -6362,91 +9398,9 @@
           </a:bodyPr>
           <a:lstStyle/>
           <a:p>
-            <a:pPr algn="ctr"/>
-            <a:r>
-              <a:rPr sz="1400" b="1">
-                <a:solidFill>
-                  <a:srgbClr val="FFFFFF"/>
-                </a:solidFill>
-                <a:latin typeface="Open Sans"/>
-                <a:ea typeface="Open Sans"/>
-                <a:cs typeface="Open Sans"/>
-              </a:rPr>
-              <a:t>1</a:t>
-            </a:r>
-          </a:p>
-        </p:txBody>
-      </p:sp>
-      <p:sp>
-        <p:nvSpPr>
-          <p:cNvPr id="10" name="Rectangle 9"/>
-          <p:cNvSpPr/>
-          <p:nvPr/>
-        </p:nvSpPr>
-        <p:spPr>
-          <a:xfrm>
-            <a:off x="1450000" y="1450000"/>
-            <a:ext cx="10500000" cy="550000"/>
-          </a:xfrm>
-          <a:prstGeom prst="rect">
-            <a:avLst/>
-          </a:prstGeom>
-          <a:solidFill>
-            <a:srgbClr val="FFFFFF"/>
-          </a:solidFill>
-          <a:ln w="12700">
-            <a:solidFill>
-              <a:srgbClr val="999999"/>
-            </a:solidFill>
-          </a:ln>
-        </p:spPr>
-        <p:style>
-          <a:lnRef idx="1">
-            <a:schemeClr val="accent1"/>
-          </a:lnRef>
-          <a:fillRef idx="3">
-            <a:schemeClr val="accent1"/>
-          </a:fillRef>
-          <a:effectRef idx="2">
-            <a:schemeClr val="accent1"/>
-          </a:effectRef>
-          <a:fontRef idx="minor">
-            <a:schemeClr val="lt1"/>
-          </a:fontRef>
-        </p:style>
-        <p:txBody>
-          <a:bodyPr rtlCol="0" anchor="ctr"/>
-          <a:lstStyle/>
-          <a:p>
-            <a:pPr algn="ctr"/>
-          </a:p>
-        </p:txBody>
-      </p:sp>
-      <p:sp>
-        <p:nvSpPr>
-          <p:cNvPr id="11" name="TextBox 10"/>
-          <p:cNvSpPr txBox="1"/>
-          <p:nvPr/>
-        </p:nvSpPr>
-        <p:spPr>
-          <a:xfrm>
-            <a:off x="1650000" y="1450000"/>
-            <a:ext cx="10100000" cy="550000"/>
-          </a:xfrm>
-          <a:prstGeom prst="rect">
-            <a:avLst/>
-          </a:prstGeom>
-          <a:noFill/>
-        </p:spPr>
-        <p:txBody>
-          <a:bodyPr wrap="square" anchor="ctr">
-            <a:spAutoFit/>
-          </a:bodyPr>
-          <a:lstStyle/>
-          <a:p>
             <a:pPr algn="l"/>
             <a:r>
-              <a:rPr sz="1300" b="0">
+              <a:rPr sz="1200" b="0">
                 <a:solidFill>
                   <a:srgbClr val="333333"/>
                 </a:solidFill>
@@ -6454,655 +9408,7 @@
                 <a:ea typeface="Open Sans"/>
                 <a:cs typeface="Open Sans"/>
               </a:rPr>
-              <a:t>Прекратите действие повреждающего фактора.</a:t>
-            </a:r>
-          </a:p>
-        </p:txBody>
-      </p:sp>
-      <p:sp>
-        <p:nvSpPr>
-          <p:cNvPr id="12" name="Oval 11"/>
-          <p:cNvSpPr/>
-          <p:nvPr/>
-        </p:nvSpPr>
-        <p:spPr>
-          <a:xfrm>
-            <a:off x="700000" y="2320000"/>
-            <a:ext cx="550000" cy="550000"/>
-          </a:xfrm>
-          <a:prstGeom prst="ellipse">
-            <a:avLst/>
-          </a:prstGeom>
-          <a:solidFill>
-            <a:srgbClr val="555555"/>
-          </a:solidFill>
-          <a:ln>
-            <a:noFill/>
-          </a:ln>
-        </p:spPr>
-        <p:style>
-          <a:lnRef idx="1">
-            <a:schemeClr val="accent1"/>
-          </a:lnRef>
-          <a:fillRef idx="3">
-            <a:schemeClr val="accent1"/>
-          </a:fillRef>
-          <a:effectRef idx="2">
-            <a:schemeClr val="accent1"/>
-          </a:effectRef>
-          <a:fontRef idx="minor">
-            <a:schemeClr val="lt1"/>
-          </a:fontRef>
-        </p:style>
-        <p:txBody>
-          <a:bodyPr rtlCol="0" anchor="ctr"/>
-          <a:lstStyle/>
-          <a:p>
-            <a:pPr algn="ctr"/>
-          </a:p>
-        </p:txBody>
-      </p:sp>
-      <p:sp>
-        <p:nvSpPr>
-          <p:cNvPr id="13" name="TextBox 12"/>
-          <p:cNvSpPr txBox="1"/>
-          <p:nvPr/>
-        </p:nvSpPr>
-        <p:spPr>
-          <a:xfrm>
-            <a:off x="700000" y="2320000"/>
-            <a:ext cx="550000" cy="550000"/>
-          </a:xfrm>
-          <a:prstGeom prst="rect">
-            <a:avLst/>
-          </a:prstGeom>
-          <a:noFill/>
-        </p:spPr>
-        <p:txBody>
-          <a:bodyPr wrap="square" anchor="ctr">
-            <a:spAutoFit/>
-          </a:bodyPr>
-          <a:lstStyle/>
-          <a:p>
-            <a:pPr algn="ctr"/>
-            <a:r>
-              <a:rPr sz="1400" b="1">
-                <a:solidFill>
-                  <a:srgbClr val="FFFFFF"/>
-                </a:solidFill>
-                <a:latin typeface="Open Sans"/>
-                <a:ea typeface="Open Sans"/>
-                <a:cs typeface="Open Sans"/>
-              </a:rPr>
-              <a:t>2</a:t>
-            </a:r>
-          </a:p>
-        </p:txBody>
-      </p:sp>
-      <p:sp>
-        <p:nvSpPr>
-          <p:cNvPr id="14" name="Rectangle 13"/>
-          <p:cNvSpPr/>
-          <p:nvPr/>
-        </p:nvSpPr>
-        <p:spPr>
-          <a:xfrm>
-            <a:off x="1450000" y="2320000"/>
-            <a:ext cx="10500000" cy="550000"/>
-          </a:xfrm>
-          <a:prstGeom prst="rect">
-            <a:avLst/>
-          </a:prstGeom>
-          <a:solidFill>
-            <a:srgbClr val="FFFFFF"/>
-          </a:solidFill>
-          <a:ln w="12700">
-            <a:solidFill>
-              <a:srgbClr val="999999"/>
-            </a:solidFill>
-          </a:ln>
-        </p:spPr>
-        <p:style>
-          <a:lnRef idx="1">
-            <a:schemeClr val="accent1"/>
-          </a:lnRef>
-          <a:fillRef idx="3">
-            <a:schemeClr val="accent1"/>
-          </a:fillRef>
-          <a:effectRef idx="2">
-            <a:schemeClr val="accent1"/>
-          </a:effectRef>
-          <a:fontRef idx="minor">
-            <a:schemeClr val="lt1"/>
-          </a:fontRef>
-        </p:style>
-        <p:txBody>
-          <a:bodyPr rtlCol="0" anchor="ctr"/>
-          <a:lstStyle/>
-          <a:p>
-            <a:pPr algn="ctr"/>
-          </a:p>
-        </p:txBody>
-      </p:sp>
-      <p:sp>
-        <p:nvSpPr>
-          <p:cNvPr id="15" name="TextBox 14"/>
-          <p:cNvSpPr txBox="1"/>
-          <p:nvPr/>
-        </p:nvSpPr>
-        <p:spPr>
-          <a:xfrm>
-            <a:off x="1650000" y="2320000"/>
-            <a:ext cx="10100000" cy="550000"/>
-          </a:xfrm>
-          <a:prstGeom prst="rect">
-            <a:avLst/>
-          </a:prstGeom>
-          <a:noFill/>
-        </p:spPr>
-        <p:txBody>
-          <a:bodyPr wrap="square" anchor="ctr">
-            <a:spAutoFit/>
-          </a:bodyPr>
-          <a:lstStyle/>
-          <a:p>
-            <a:pPr algn="l"/>
-            <a:r>
-              <a:rPr sz="1300" b="0">
-                <a:solidFill>
-                  <a:srgbClr val="333333"/>
-                </a:solidFill>
-                <a:latin typeface="Open Sans"/>
-                <a:ea typeface="Open Sans"/>
-                <a:cs typeface="Open Sans"/>
-              </a:rPr>
-              <a:t>Охлаждайте место прохладной проточной водой не менее 20 минут.</a:t>
-            </a:r>
-          </a:p>
-        </p:txBody>
-      </p:sp>
-      <p:sp>
-        <p:nvSpPr>
-          <p:cNvPr id="16" name="Oval 15"/>
-          <p:cNvSpPr/>
-          <p:nvPr/>
-        </p:nvSpPr>
-        <p:spPr>
-          <a:xfrm>
-            <a:off x="700000" y="3190000"/>
-            <a:ext cx="550000" cy="550000"/>
-          </a:xfrm>
-          <a:prstGeom prst="ellipse">
-            <a:avLst/>
-          </a:prstGeom>
-          <a:solidFill>
-            <a:srgbClr val="555555"/>
-          </a:solidFill>
-          <a:ln>
-            <a:noFill/>
-          </a:ln>
-        </p:spPr>
-        <p:style>
-          <a:lnRef idx="1">
-            <a:schemeClr val="accent1"/>
-          </a:lnRef>
-          <a:fillRef idx="3">
-            <a:schemeClr val="accent1"/>
-          </a:fillRef>
-          <a:effectRef idx="2">
-            <a:schemeClr val="accent1"/>
-          </a:effectRef>
-          <a:fontRef idx="minor">
-            <a:schemeClr val="lt1"/>
-          </a:fontRef>
-        </p:style>
-        <p:txBody>
-          <a:bodyPr rtlCol="0" anchor="ctr"/>
-          <a:lstStyle/>
-          <a:p>
-            <a:pPr algn="ctr"/>
-          </a:p>
-        </p:txBody>
-      </p:sp>
-      <p:sp>
-        <p:nvSpPr>
-          <p:cNvPr id="17" name="TextBox 16"/>
-          <p:cNvSpPr txBox="1"/>
-          <p:nvPr/>
-        </p:nvSpPr>
-        <p:spPr>
-          <a:xfrm>
-            <a:off x="700000" y="3190000"/>
-            <a:ext cx="550000" cy="550000"/>
-          </a:xfrm>
-          <a:prstGeom prst="rect">
-            <a:avLst/>
-          </a:prstGeom>
-          <a:noFill/>
-        </p:spPr>
-        <p:txBody>
-          <a:bodyPr wrap="square" anchor="ctr">
-            <a:spAutoFit/>
-          </a:bodyPr>
-          <a:lstStyle/>
-          <a:p>
-            <a:pPr algn="ctr"/>
-            <a:r>
-              <a:rPr sz="1400" b="1">
-                <a:solidFill>
-                  <a:srgbClr val="FFFFFF"/>
-                </a:solidFill>
-                <a:latin typeface="Open Sans"/>
-                <a:ea typeface="Open Sans"/>
-                <a:cs typeface="Open Sans"/>
-              </a:rPr>
-              <a:t>3</a:t>
-            </a:r>
-          </a:p>
-        </p:txBody>
-      </p:sp>
-      <p:sp>
-        <p:nvSpPr>
-          <p:cNvPr id="18" name="Rectangle 17"/>
-          <p:cNvSpPr/>
-          <p:nvPr/>
-        </p:nvSpPr>
-        <p:spPr>
-          <a:xfrm>
-            <a:off x="1450000" y="3190000"/>
-            <a:ext cx="10500000" cy="550000"/>
-          </a:xfrm>
-          <a:prstGeom prst="rect">
-            <a:avLst/>
-          </a:prstGeom>
-          <a:solidFill>
-            <a:srgbClr val="FFFFFF"/>
-          </a:solidFill>
-          <a:ln w="12700">
-            <a:solidFill>
-              <a:srgbClr val="999999"/>
-            </a:solidFill>
-          </a:ln>
-        </p:spPr>
-        <p:style>
-          <a:lnRef idx="1">
-            <a:schemeClr val="accent1"/>
-          </a:lnRef>
-          <a:fillRef idx="3">
-            <a:schemeClr val="accent1"/>
-          </a:fillRef>
-          <a:effectRef idx="2">
-            <a:schemeClr val="accent1"/>
-          </a:effectRef>
-          <a:fontRef idx="minor">
-            <a:schemeClr val="lt1"/>
-          </a:fontRef>
-        </p:style>
-        <p:txBody>
-          <a:bodyPr rtlCol="0" anchor="ctr"/>
-          <a:lstStyle/>
-          <a:p>
-            <a:pPr algn="ctr"/>
-          </a:p>
-        </p:txBody>
-      </p:sp>
-      <p:sp>
-        <p:nvSpPr>
-          <p:cNvPr id="19" name="TextBox 18"/>
-          <p:cNvSpPr txBox="1"/>
-          <p:nvPr/>
-        </p:nvSpPr>
-        <p:spPr>
-          <a:xfrm>
-            <a:off x="1650000" y="3190000"/>
-            <a:ext cx="10100000" cy="550000"/>
-          </a:xfrm>
-          <a:prstGeom prst="rect">
-            <a:avLst/>
-          </a:prstGeom>
-          <a:noFill/>
-        </p:spPr>
-        <p:txBody>
-          <a:bodyPr wrap="square" anchor="ctr">
-            <a:spAutoFit/>
-          </a:bodyPr>
-          <a:lstStyle/>
-          <a:p>
-            <a:pPr algn="l"/>
-            <a:r>
-              <a:rPr sz="1300" b="0">
-                <a:solidFill>
-                  <a:srgbClr val="333333"/>
-                </a:solidFill>
-                <a:latin typeface="Open Sans"/>
-                <a:ea typeface="Open Sans"/>
-                <a:cs typeface="Open Sans"/>
-              </a:rPr>
-              <a:t>Снимите украшения и свободную одежду до развития отека.</a:t>
-            </a:r>
-          </a:p>
-        </p:txBody>
-      </p:sp>
-      <p:sp>
-        <p:nvSpPr>
-          <p:cNvPr id="20" name="Oval 19"/>
-          <p:cNvSpPr/>
-          <p:nvPr/>
-        </p:nvSpPr>
-        <p:spPr>
-          <a:xfrm>
-            <a:off x="700000" y="4060000"/>
-            <a:ext cx="550000" cy="550000"/>
-          </a:xfrm>
-          <a:prstGeom prst="ellipse">
-            <a:avLst/>
-          </a:prstGeom>
-          <a:solidFill>
-            <a:srgbClr val="555555"/>
-          </a:solidFill>
-          <a:ln>
-            <a:noFill/>
-          </a:ln>
-        </p:spPr>
-        <p:style>
-          <a:lnRef idx="1">
-            <a:schemeClr val="accent1"/>
-          </a:lnRef>
-          <a:fillRef idx="3">
-            <a:schemeClr val="accent1"/>
-          </a:fillRef>
-          <a:effectRef idx="2">
-            <a:schemeClr val="accent1"/>
-          </a:effectRef>
-          <a:fontRef idx="minor">
-            <a:schemeClr val="lt1"/>
-          </a:fontRef>
-        </p:style>
-        <p:txBody>
-          <a:bodyPr rtlCol="0" anchor="ctr"/>
-          <a:lstStyle/>
-          <a:p>
-            <a:pPr algn="ctr"/>
-          </a:p>
-        </p:txBody>
-      </p:sp>
-      <p:sp>
-        <p:nvSpPr>
-          <p:cNvPr id="21" name="TextBox 20"/>
-          <p:cNvSpPr txBox="1"/>
-          <p:nvPr/>
-        </p:nvSpPr>
-        <p:spPr>
-          <a:xfrm>
-            <a:off x="700000" y="4060000"/>
-            <a:ext cx="550000" cy="550000"/>
-          </a:xfrm>
-          <a:prstGeom prst="rect">
-            <a:avLst/>
-          </a:prstGeom>
-          <a:noFill/>
-        </p:spPr>
-        <p:txBody>
-          <a:bodyPr wrap="square" anchor="ctr">
-            <a:spAutoFit/>
-          </a:bodyPr>
-          <a:lstStyle/>
-          <a:p>
-            <a:pPr algn="ctr"/>
-            <a:r>
-              <a:rPr sz="1400" b="1">
-                <a:solidFill>
-                  <a:srgbClr val="FFFFFF"/>
-                </a:solidFill>
-                <a:latin typeface="Open Sans"/>
-                <a:ea typeface="Open Sans"/>
-                <a:cs typeface="Open Sans"/>
-              </a:rPr>
-              <a:t>4</a:t>
-            </a:r>
-          </a:p>
-        </p:txBody>
-      </p:sp>
-      <p:sp>
-        <p:nvSpPr>
-          <p:cNvPr id="22" name="Rectangle 21"/>
-          <p:cNvSpPr/>
-          <p:nvPr/>
-        </p:nvSpPr>
-        <p:spPr>
-          <a:xfrm>
-            <a:off x="1450000" y="4060000"/>
-            <a:ext cx="10500000" cy="550000"/>
-          </a:xfrm>
-          <a:prstGeom prst="rect">
-            <a:avLst/>
-          </a:prstGeom>
-          <a:solidFill>
-            <a:srgbClr val="FFFFFF"/>
-          </a:solidFill>
-          <a:ln w="12700">
-            <a:solidFill>
-              <a:srgbClr val="999999"/>
-            </a:solidFill>
-          </a:ln>
-        </p:spPr>
-        <p:style>
-          <a:lnRef idx="1">
-            <a:schemeClr val="accent1"/>
-          </a:lnRef>
-          <a:fillRef idx="3">
-            <a:schemeClr val="accent1"/>
-          </a:fillRef>
-          <a:effectRef idx="2">
-            <a:schemeClr val="accent1"/>
-          </a:effectRef>
-          <a:fontRef idx="minor">
-            <a:schemeClr val="lt1"/>
-          </a:fontRef>
-        </p:style>
-        <p:txBody>
-          <a:bodyPr rtlCol="0" anchor="ctr"/>
-          <a:lstStyle/>
-          <a:p>
-            <a:pPr algn="ctr"/>
-          </a:p>
-        </p:txBody>
-      </p:sp>
-      <p:sp>
-        <p:nvSpPr>
-          <p:cNvPr id="23" name="TextBox 22"/>
-          <p:cNvSpPr txBox="1"/>
-          <p:nvPr/>
-        </p:nvSpPr>
-        <p:spPr>
-          <a:xfrm>
-            <a:off x="1650000" y="4060000"/>
-            <a:ext cx="10100000" cy="550000"/>
-          </a:xfrm>
-          <a:prstGeom prst="rect">
-            <a:avLst/>
-          </a:prstGeom>
-          <a:noFill/>
-        </p:spPr>
-        <p:txBody>
-          <a:bodyPr wrap="square" anchor="ctr">
-            <a:spAutoFit/>
-          </a:bodyPr>
-          <a:lstStyle/>
-          <a:p>
-            <a:pPr algn="l"/>
-            <a:r>
-              <a:rPr sz="1300" b="0">
-                <a:solidFill>
-                  <a:srgbClr val="333333"/>
-                </a:solidFill>
-                <a:latin typeface="Open Sans"/>
-                <a:ea typeface="Open Sans"/>
-                <a:cs typeface="Open Sans"/>
-              </a:rPr>
-              <a:t>Наложите свободную стерильную повязку.</a:t>
-            </a:r>
-          </a:p>
-        </p:txBody>
-      </p:sp>
-      <p:sp>
-        <p:nvSpPr>
-          <p:cNvPr id="24" name="Oval 23"/>
-          <p:cNvSpPr/>
-          <p:nvPr/>
-        </p:nvSpPr>
-        <p:spPr>
-          <a:xfrm>
-            <a:off x="700000" y="4930000"/>
-            <a:ext cx="550000" cy="550000"/>
-          </a:xfrm>
-          <a:prstGeom prst="ellipse">
-            <a:avLst/>
-          </a:prstGeom>
-          <a:solidFill>
-            <a:srgbClr val="555555"/>
-          </a:solidFill>
-          <a:ln>
-            <a:noFill/>
-          </a:ln>
-        </p:spPr>
-        <p:style>
-          <a:lnRef idx="1">
-            <a:schemeClr val="accent1"/>
-          </a:lnRef>
-          <a:fillRef idx="3">
-            <a:schemeClr val="accent1"/>
-          </a:fillRef>
-          <a:effectRef idx="2">
-            <a:schemeClr val="accent1"/>
-          </a:effectRef>
-          <a:fontRef idx="minor">
-            <a:schemeClr val="lt1"/>
-          </a:fontRef>
-        </p:style>
-        <p:txBody>
-          <a:bodyPr rtlCol="0" anchor="ctr"/>
-          <a:lstStyle/>
-          <a:p>
-            <a:pPr algn="ctr"/>
-          </a:p>
-        </p:txBody>
-      </p:sp>
-      <p:sp>
-        <p:nvSpPr>
-          <p:cNvPr id="25" name="TextBox 24"/>
-          <p:cNvSpPr txBox="1"/>
-          <p:nvPr/>
-        </p:nvSpPr>
-        <p:spPr>
-          <a:xfrm>
-            <a:off x="700000" y="4930000"/>
-            <a:ext cx="550000" cy="550000"/>
-          </a:xfrm>
-          <a:prstGeom prst="rect">
-            <a:avLst/>
-          </a:prstGeom>
-          <a:noFill/>
-        </p:spPr>
-        <p:txBody>
-          <a:bodyPr wrap="square" anchor="ctr">
-            <a:spAutoFit/>
-          </a:bodyPr>
-          <a:lstStyle/>
-          <a:p>
-            <a:pPr algn="ctr"/>
-            <a:r>
-              <a:rPr sz="1400" b="1">
-                <a:solidFill>
-                  <a:srgbClr val="FFFFFF"/>
-                </a:solidFill>
-                <a:latin typeface="Open Sans"/>
-                <a:ea typeface="Open Sans"/>
-                <a:cs typeface="Open Sans"/>
-              </a:rPr>
-              <a:t>5</a:t>
-            </a:r>
-          </a:p>
-        </p:txBody>
-      </p:sp>
-      <p:sp>
-        <p:nvSpPr>
-          <p:cNvPr id="26" name="Rectangle 25"/>
-          <p:cNvSpPr/>
-          <p:nvPr/>
-        </p:nvSpPr>
-        <p:spPr>
-          <a:xfrm>
-            <a:off x="1450000" y="4930000"/>
-            <a:ext cx="10500000" cy="550000"/>
-          </a:xfrm>
-          <a:prstGeom prst="rect">
-            <a:avLst/>
-          </a:prstGeom>
-          <a:solidFill>
-            <a:srgbClr val="FFFFFF"/>
-          </a:solidFill>
-          <a:ln w="12700">
-            <a:solidFill>
-              <a:srgbClr val="999999"/>
-            </a:solidFill>
-          </a:ln>
-        </p:spPr>
-        <p:style>
-          <a:lnRef idx="1">
-            <a:schemeClr val="accent1"/>
-          </a:lnRef>
-          <a:fillRef idx="3">
-            <a:schemeClr val="accent1"/>
-          </a:fillRef>
-          <a:effectRef idx="2">
-            <a:schemeClr val="accent1"/>
-          </a:effectRef>
-          <a:fontRef idx="minor">
-            <a:schemeClr val="lt1"/>
-          </a:fontRef>
-        </p:style>
-        <p:txBody>
-          <a:bodyPr rtlCol="0" anchor="ctr"/>
-          <a:lstStyle/>
-          <a:p>
-            <a:pPr algn="ctr"/>
-          </a:p>
-        </p:txBody>
-      </p:sp>
-      <p:sp>
-        <p:nvSpPr>
-          <p:cNvPr id="27" name="TextBox 26"/>
-          <p:cNvSpPr txBox="1"/>
-          <p:nvPr/>
-        </p:nvSpPr>
-        <p:spPr>
-          <a:xfrm>
-            <a:off x="1650000" y="4930000"/>
-            <a:ext cx="10100000" cy="550000"/>
-          </a:xfrm>
-          <a:prstGeom prst="rect">
-            <a:avLst/>
-          </a:prstGeom>
-          <a:noFill/>
-        </p:spPr>
-        <p:txBody>
-          <a:bodyPr wrap="square" anchor="ctr">
-            <a:spAutoFit/>
-          </a:bodyPr>
-          <a:lstStyle/>
-          <a:p>
-            <a:pPr algn="l"/>
-            <a:r>
-              <a:rPr sz="1300" b="0">
-                <a:solidFill>
-                  <a:srgbClr val="333333"/>
-                </a:solidFill>
-                <a:latin typeface="Open Sans"/>
-                <a:ea typeface="Open Sans"/>
-                <a:cs typeface="Open Sans"/>
-              </a:rPr>
-              <a:t>Вызовите скорую помощь при опасной площади, глубине или локализации.</a:t>
+              <a:t>При оценке не задерживайте охлаждение и вызов скорой медицинской помощи.</a:t>
             </a:r>
           </a:p>
         </p:txBody>
@@ -7200,7 +9506,7 @@
                 <a:ea typeface="Open Sans"/>
                 <a:cs typeface="Open Sans"/>
               </a:rPr>
-              <a:t>ОЖОГ ДЫХАТЕЛЬНЫХ ПУТЕЙ</a:t>
+              <a:t>ПЕРВАЯ ПОМОЩЬ ПРИ ОЖОГЕ</a:t>
             </a:r>
           </a:p>
         </p:txBody>
@@ -7367,14 +9673,57 @@
       </p:sp>
       <p:sp>
         <p:nvSpPr>
-          <p:cNvPr id="8" name="TextBox 7"/>
+          <p:cNvPr id="8" name="Oval 7"/>
+          <p:cNvSpPr/>
+          <p:nvPr/>
+        </p:nvSpPr>
+        <p:spPr>
+          <a:xfrm>
+            <a:off x="700000" y="1400000"/>
+            <a:ext cx="500000" cy="500000"/>
+          </a:xfrm>
+          <a:prstGeom prst="ellipse">
+            <a:avLst/>
+          </a:prstGeom>
+          <a:solidFill>
+            <a:srgbClr val="CC0000"/>
+          </a:solidFill>
+          <a:ln>
+            <a:noFill/>
+          </a:ln>
+        </p:spPr>
+        <p:style>
+          <a:lnRef idx="1">
+            <a:schemeClr val="accent1"/>
+          </a:lnRef>
+          <a:fillRef idx="3">
+            <a:schemeClr val="accent1"/>
+          </a:fillRef>
+          <a:effectRef idx="2">
+            <a:schemeClr val="accent1"/>
+          </a:effectRef>
+          <a:fontRef idx="minor">
+            <a:schemeClr val="lt1"/>
+          </a:fontRef>
+        </p:style>
+        <p:txBody>
+          <a:bodyPr rtlCol="0" anchor="ctr"/>
+          <a:lstStyle/>
+          <a:p>
+            <a:pPr algn="ctr"/>
+          </a:p>
+        </p:txBody>
+      </p:sp>
+      <p:sp>
+        <p:nvSpPr>
+          <p:cNvPr id="9" name="TextBox 8"/>
           <p:cNvSpPr txBox="1"/>
           <p:nvPr/>
         </p:nvSpPr>
         <p:spPr>
           <a:xfrm>
-            <a:off x="700000" y="1500000"/>
-            <a:ext cx="11000000" cy="4200000"/>
+            <a:off x="700000" y="1400000"/>
+            <a:ext cx="500000" cy="500000"/>
           </a:xfrm>
           <a:prstGeom prst="rect">
             <a:avLst/>
@@ -7382,18 +9731,96 @@
           <a:noFill/>
         </p:spPr>
         <p:txBody>
-          <a:bodyPr wrap="square">
+          <a:bodyPr wrap="square" anchor="ctr">
             <a:spAutoFit/>
           </a:bodyPr>
           <a:lstStyle/>
           <a:p>
-            <a:pPr algn="l">
-              <a:spcAft>
-                <a:spcPts val="800"/>
-              </a:spcAft>
-            </a:pPr>
-            <a:r>
-              <a:rPr sz="1400" b="0">
+            <a:pPr algn="ctr"/>
+            <a:r>
+              <a:rPr sz="1300" b="1">
+                <a:solidFill>
+                  <a:srgbClr val="FFFFFF"/>
+                </a:solidFill>
+                <a:latin typeface="Open Sans"/>
+                <a:ea typeface="Open Sans"/>
+                <a:cs typeface="Open Sans"/>
+              </a:rPr>
+              <a:t>1</a:t>
+            </a:r>
+          </a:p>
+        </p:txBody>
+      </p:sp>
+      <p:sp>
+        <p:nvSpPr>
+          <p:cNvPr id="10" name="Rectangle 9"/>
+          <p:cNvSpPr/>
+          <p:nvPr/>
+        </p:nvSpPr>
+        <p:spPr>
+          <a:xfrm>
+            <a:off x="1400000" y="1400000"/>
+            <a:ext cx="10550000" cy="620000"/>
+          </a:xfrm>
+          <a:prstGeom prst="rect">
+            <a:avLst/>
+          </a:prstGeom>
+          <a:solidFill>
+            <a:srgbClr val="FFFFFF"/>
+          </a:solidFill>
+          <a:ln w="12700">
+            <a:solidFill>
+              <a:srgbClr val="999999"/>
+            </a:solidFill>
+          </a:ln>
+        </p:spPr>
+        <p:style>
+          <a:lnRef idx="1">
+            <a:schemeClr val="accent1"/>
+          </a:lnRef>
+          <a:fillRef idx="3">
+            <a:schemeClr val="accent1"/>
+          </a:fillRef>
+          <a:effectRef idx="2">
+            <a:schemeClr val="accent1"/>
+          </a:effectRef>
+          <a:fontRef idx="minor">
+            <a:schemeClr val="lt1"/>
+          </a:fontRef>
+        </p:style>
+        <p:txBody>
+          <a:bodyPr rtlCol="0" anchor="ctr"/>
+          <a:lstStyle/>
+          <a:p>
+            <a:pPr algn="ctr"/>
+          </a:p>
+        </p:txBody>
+      </p:sp>
+      <p:sp>
+        <p:nvSpPr>
+          <p:cNvPr id="11" name="TextBox 10"/>
+          <p:cNvSpPr txBox="1"/>
+          <p:nvPr/>
+        </p:nvSpPr>
+        <p:spPr>
+          <a:xfrm>
+            <a:off x="1600000" y="1400000"/>
+            <a:ext cx="10150000" cy="620000"/>
+          </a:xfrm>
+          <a:prstGeom prst="rect">
+            <a:avLst/>
+          </a:prstGeom>
+          <a:noFill/>
+        </p:spPr>
+        <p:txBody>
+          <a:bodyPr wrap="square" anchor="ctr">
+            <a:spAutoFit/>
+          </a:bodyPr>
+          <a:lstStyle/>
+          <a:p>
+            <a:pPr algn="l"/>
+            <a:r>
+              <a:rPr sz="1300" b="0">
                 <a:solidFill>
                   <a:srgbClr val="333333"/>
                 </a:solidFill>
@@ -7401,17 +9828,161 @@
                 <a:ea typeface="Open Sans"/>
                 <a:cs typeface="Open Sans"/>
               </a:rPr>
-              <a:t>•  Возможен после дыма, пара или горячего воздуха</a:t>
-            </a:r>
-          </a:p>
-          <a:p>
-            <a:pPr algn="l">
-              <a:spcAft>
-                <a:spcPts val="800"/>
-              </a:spcAft>
-            </a:pPr>
-            <a:r>
-              <a:rPr sz="1400" b="0">
+              <a:t>Прекратите действие тепла и обеспечьте безопасность.</a:t>
+            </a:r>
+          </a:p>
+        </p:txBody>
+      </p:sp>
+      <p:sp>
+        <p:nvSpPr>
+          <p:cNvPr id="12" name="Oval 11"/>
+          <p:cNvSpPr/>
+          <p:nvPr/>
+        </p:nvSpPr>
+        <p:spPr>
+          <a:xfrm>
+            <a:off x="700000" y="2100000"/>
+            <a:ext cx="500000" cy="500000"/>
+          </a:xfrm>
+          <a:prstGeom prst="ellipse">
+            <a:avLst/>
+          </a:prstGeom>
+          <a:solidFill>
+            <a:srgbClr val="555555"/>
+          </a:solidFill>
+          <a:ln>
+            <a:noFill/>
+          </a:ln>
+        </p:spPr>
+        <p:style>
+          <a:lnRef idx="1">
+            <a:schemeClr val="accent1"/>
+          </a:lnRef>
+          <a:fillRef idx="3">
+            <a:schemeClr val="accent1"/>
+          </a:fillRef>
+          <a:effectRef idx="2">
+            <a:schemeClr val="accent1"/>
+          </a:effectRef>
+          <a:fontRef idx="minor">
+            <a:schemeClr val="lt1"/>
+          </a:fontRef>
+        </p:style>
+        <p:txBody>
+          <a:bodyPr rtlCol="0" anchor="ctr"/>
+          <a:lstStyle/>
+          <a:p>
+            <a:pPr algn="ctr"/>
+          </a:p>
+        </p:txBody>
+      </p:sp>
+      <p:sp>
+        <p:nvSpPr>
+          <p:cNvPr id="13" name="TextBox 12"/>
+          <p:cNvSpPr txBox="1"/>
+          <p:nvPr/>
+        </p:nvSpPr>
+        <p:spPr>
+          <a:xfrm>
+            <a:off x="700000" y="2100000"/>
+            <a:ext cx="500000" cy="500000"/>
+          </a:xfrm>
+          <a:prstGeom prst="rect">
+            <a:avLst/>
+          </a:prstGeom>
+          <a:noFill/>
+        </p:spPr>
+        <p:txBody>
+          <a:bodyPr wrap="square" anchor="ctr">
+            <a:spAutoFit/>
+          </a:bodyPr>
+          <a:lstStyle/>
+          <a:p>
+            <a:pPr algn="ctr"/>
+            <a:r>
+              <a:rPr sz="1300" b="1">
+                <a:solidFill>
+                  <a:srgbClr val="FFFFFF"/>
+                </a:solidFill>
+                <a:latin typeface="Open Sans"/>
+                <a:ea typeface="Open Sans"/>
+                <a:cs typeface="Open Sans"/>
+              </a:rPr>
+              <a:t>2</a:t>
+            </a:r>
+          </a:p>
+        </p:txBody>
+      </p:sp>
+      <p:sp>
+        <p:nvSpPr>
+          <p:cNvPr id="14" name="Rectangle 13"/>
+          <p:cNvSpPr/>
+          <p:nvPr/>
+        </p:nvSpPr>
+        <p:spPr>
+          <a:xfrm>
+            <a:off x="1400000" y="2100000"/>
+            <a:ext cx="10550000" cy="620000"/>
+          </a:xfrm>
+          <a:prstGeom prst="rect">
+            <a:avLst/>
+          </a:prstGeom>
+          <a:solidFill>
+            <a:srgbClr val="FFFFFF"/>
+          </a:solidFill>
+          <a:ln w="12700">
+            <a:solidFill>
+              <a:srgbClr val="999999"/>
+            </a:solidFill>
+          </a:ln>
+        </p:spPr>
+        <p:style>
+          <a:lnRef idx="1">
+            <a:schemeClr val="accent1"/>
+          </a:lnRef>
+          <a:fillRef idx="3">
+            <a:schemeClr val="accent1"/>
+          </a:fillRef>
+          <a:effectRef idx="2">
+            <a:schemeClr val="accent1"/>
+          </a:effectRef>
+          <a:fontRef idx="minor">
+            <a:schemeClr val="lt1"/>
+          </a:fontRef>
+        </p:style>
+        <p:txBody>
+          <a:bodyPr rtlCol="0" anchor="ctr"/>
+          <a:lstStyle/>
+          <a:p>
+            <a:pPr algn="ctr"/>
+          </a:p>
+        </p:txBody>
+      </p:sp>
+      <p:sp>
+        <p:nvSpPr>
+          <p:cNvPr id="15" name="TextBox 14"/>
+          <p:cNvSpPr txBox="1"/>
+          <p:nvPr/>
+        </p:nvSpPr>
+        <p:spPr>
+          <a:xfrm>
+            <a:off x="1600000" y="2100000"/>
+            <a:ext cx="10150000" cy="620000"/>
+          </a:xfrm>
+          <a:prstGeom prst="rect">
+            <a:avLst/>
+          </a:prstGeom>
+          <a:noFill/>
+        </p:spPr>
+        <p:txBody>
+          <a:bodyPr wrap="square" anchor="ctr">
+            <a:spAutoFit/>
+          </a:bodyPr>
+          <a:lstStyle/>
+          <a:p>
+            <a:pPr algn="l"/>
+            <a:r>
+              <a:rPr sz="1300" b="0">
                 <a:solidFill>
                   <a:srgbClr val="333333"/>
                 </a:solidFill>
@@ -7419,35 +9990,161 @@
                 <a:ea typeface="Open Sans"/>
                 <a:cs typeface="Open Sans"/>
               </a:rPr>
-              <a:t>•  Признаки: осиплость, кашель, копоть у рта и носа</a:t>
-            </a:r>
-          </a:p>
-          <a:p>
-            <a:pPr algn="l">
-              <a:spcAft>
-                <a:spcPts val="800"/>
-              </a:spcAft>
-            </a:pPr>
-            <a:r>
-              <a:rPr sz="1400" b="1">
-                <a:solidFill>
-                  <a:srgbClr val="CC0000"/>
-                </a:solidFill>
-                <a:latin typeface="Open Sans"/>
-                <a:ea typeface="Open Sans"/>
-                <a:cs typeface="Open Sans"/>
-              </a:rPr>
-              <a:t>•  Отек дыхательных путей может быстро нарастать</a:t>
-            </a:r>
-          </a:p>
-          <a:p>
-            <a:pPr algn="l">
-              <a:spcAft>
-                <a:spcPts val="800"/>
-              </a:spcAft>
-            </a:pPr>
-            <a:r>
-              <a:rPr sz="1400" b="0">
+              <a:t>Снимите украшения и свободную одежду до развития отека.</a:t>
+            </a:r>
+          </a:p>
+        </p:txBody>
+      </p:sp>
+      <p:sp>
+        <p:nvSpPr>
+          <p:cNvPr id="16" name="Oval 15"/>
+          <p:cNvSpPr/>
+          <p:nvPr/>
+        </p:nvSpPr>
+        <p:spPr>
+          <a:xfrm>
+            <a:off x="700000" y="2800000"/>
+            <a:ext cx="500000" cy="500000"/>
+          </a:xfrm>
+          <a:prstGeom prst="ellipse">
+            <a:avLst/>
+          </a:prstGeom>
+          <a:solidFill>
+            <a:srgbClr val="555555"/>
+          </a:solidFill>
+          <a:ln>
+            <a:noFill/>
+          </a:ln>
+        </p:spPr>
+        <p:style>
+          <a:lnRef idx="1">
+            <a:schemeClr val="accent1"/>
+          </a:lnRef>
+          <a:fillRef idx="3">
+            <a:schemeClr val="accent1"/>
+          </a:fillRef>
+          <a:effectRef idx="2">
+            <a:schemeClr val="accent1"/>
+          </a:effectRef>
+          <a:fontRef idx="minor">
+            <a:schemeClr val="lt1"/>
+          </a:fontRef>
+        </p:style>
+        <p:txBody>
+          <a:bodyPr rtlCol="0" anchor="ctr"/>
+          <a:lstStyle/>
+          <a:p>
+            <a:pPr algn="ctr"/>
+          </a:p>
+        </p:txBody>
+      </p:sp>
+      <p:sp>
+        <p:nvSpPr>
+          <p:cNvPr id="17" name="TextBox 16"/>
+          <p:cNvSpPr txBox="1"/>
+          <p:nvPr/>
+        </p:nvSpPr>
+        <p:spPr>
+          <a:xfrm>
+            <a:off x="700000" y="2800000"/>
+            <a:ext cx="500000" cy="500000"/>
+          </a:xfrm>
+          <a:prstGeom prst="rect">
+            <a:avLst/>
+          </a:prstGeom>
+          <a:noFill/>
+        </p:spPr>
+        <p:txBody>
+          <a:bodyPr wrap="square" anchor="ctr">
+            <a:spAutoFit/>
+          </a:bodyPr>
+          <a:lstStyle/>
+          <a:p>
+            <a:pPr algn="ctr"/>
+            <a:r>
+              <a:rPr sz="1300" b="1">
+                <a:solidFill>
+                  <a:srgbClr val="FFFFFF"/>
+                </a:solidFill>
+                <a:latin typeface="Open Sans"/>
+                <a:ea typeface="Open Sans"/>
+                <a:cs typeface="Open Sans"/>
+              </a:rPr>
+              <a:t>3</a:t>
+            </a:r>
+          </a:p>
+        </p:txBody>
+      </p:sp>
+      <p:sp>
+        <p:nvSpPr>
+          <p:cNvPr id="18" name="Rectangle 17"/>
+          <p:cNvSpPr/>
+          <p:nvPr/>
+        </p:nvSpPr>
+        <p:spPr>
+          <a:xfrm>
+            <a:off x="1400000" y="2800000"/>
+            <a:ext cx="10550000" cy="620000"/>
+          </a:xfrm>
+          <a:prstGeom prst="rect">
+            <a:avLst/>
+          </a:prstGeom>
+          <a:solidFill>
+            <a:srgbClr val="FFFFFF"/>
+          </a:solidFill>
+          <a:ln w="12700">
+            <a:solidFill>
+              <a:srgbClr val="999999"/>
+            </a:solidFill>
+          </a:ln>
+        </p:spPr>
+        <p:style>
+          <a:lnRef idx="1">
+            <a:schemeClr val="accent1"/>
+          </a:lnRef>
+          <a:fillRef idx="3">
+            <a:schemeClr val="accent1"/>
+          </a:fillRef>
+          <a:effectRef idx="2">
+            <a:schemeClr val="accent1"/>
+          </a:effectRef>
+          <a:fontRef idx="minor">
+            <a:schemeClr val="lt1"/>
+          </a:fontRef>
+        </p:style>
+        <p:txBody>
+          <a:bodyPr rtlCol="0" anchor="ctr"/>
+          <a:lstStyle/>
+          <a:p>
+            <a:pPr algn="ctr"/>
+          </a:p>
+        </p:txBody>
+      </p:sp>
+      <p:sp>
+        <p:nvSpPr>
+          <p:cNvPr id="19" name="TextBox 18"/>
+          <p:cNvSpPr txBox="1"/>
+          <p:nvPr/>
+        </p:nvSpPr>
+        <p:spPr>
+          <a:xfrm>
+            <a:off x="1600000" y="2800000"/>
+            <a:ext cx="10150000" cy="620000"/>
+          </a:xfrm>
+          <a:prstGeom prst="rect">
+            <a:avLst/>
+          </a:prstGeom>
+          <a:noFill/>
+        </p:spPr>
+        <p:txBody>
+          <a:bodyPr wrap="square" anchor="ctr">
+            <a:spAutoFit/>
+          </a:bodyPr>
+          <a:lstStyle/>
+          <a:p>
+            <a:pPr algn="l"/>
+            <a:r>
+              <a:rPr sz="1300" b="0">
                 <a:solidFill>
                   <a:srgbClr val="333333"/>
                 </a:solidFill>
@@ -7455,25 +10152,573 @@
                 <a:ea typeface="Open Sans"/>
                 <a:cs typeface="Open Sans"/>
               </a:rPr>
-              <a:t>•  Обеспечьте свежий воздух и покой</a:t>
-            </a:r>
-          </a:p>
-          <a:p>
-            <a:pPr algn="l">
-              <a:spcAft>
-                <a:spcPts val="800"/>
-              </a:spcAft>
-            </a:pPr>
-            <a:r>
-              <a:rPr sz="1400" b="1">
-                <a:solidFill>
-                  <a:srgbClr val="CC0000"/>
-                </a:solidFill>
-                <a:latin typeface="Open Sans"/>
-                <a:ea typeface="Open Sans"/>
-                <a:cs typeface="Open Sans"/>
-              </a:rPr>
-              <a:t>•  Немедленно вызовите скорую медицинскую помощь</a:t>
+              <a:t>Немедленно охлаждайте ожог прохладной проточной водой не менее 20 минут.</a:t>
+            </a:r>
+          </a:p>
+        </p:txBody>
+      </p:sp>
+      <p:sp>
+        <p:nvSpPr>
+          <p:cNvPr id="20" name="Oval 19"/>
+          <p:cNvSpPr/>
+          <p:nvPr/>
+        </p:nvSpPr>
+        <p:spPr>
+          <a:xfrm>
+            <a:off x="700000" y="3500000"/>
+            <a:ext cx="500000" cy="500000"/>
+          </a:xfrm>
+          <a:prstGeom prst="ellipse">
+            <a:avLst/>
+          </a:prstGeom>
+          <a:solidFill>
+            <a:srgbClr val="555555"/>
+          </a:solidFill>
+          <a:ln>
+            <a:noFill/>
+          </a:ln>
+        </p:spPr>
+        <p:style>
+          <a:lnRef idx="1">
+            <a:schemeClr val="accent1"/>
+          </a:lnRef>
+          <a:fillRef idx="3">
+            <a:schemeClr val="accent1"/>
+          </a:fillRef>
+          <a:effectRef idx="2">
+            <a:schemeClr val="accent1"/>
+          </a:effectRef>
+          <a:fontRef idx="minor">
+            <a:schemeClr val="lt1"/>
+          </a:fontRef>
+        </p:style>
+        <p:txBody>
+          <a:bodyPr rtlCol="0" anchor="ctr"/>
+          <a:lstStyle/>
+          <a:p>
+            <a:pPr algn="ctr"/>
+          </a:p>
+        </p:txBody>
+      </p:sp>
+      <p:sp>
+        <p:nvSpPr>
+          <p:cNvPr id="21" name="TextBox 20"/>
+          <p:cNvSpPr txBox="1"/>
+          <p:nvPr/>
+        </p:nvSpPr>
+        <p:spPr>
+          <a:xfrm>
+            <a:off x="700000" y="3500000"/>
+            <a:ext cx="500000" cy="500000"/>
+          </a:xfrm>
+          <a:prstGeom prst="rect">
+            <a:avLst/>
+          </a:prstGeom>
+          <a:noFill/>
+        </p:spPr>
+        <p:txBody>
+          <a:bodyPr wrap="square" anchor="ctr">
+            <a:spAutoFit/>
+          </a:bodyPr>
+          <a:lstStyle/>
+          <a:p>
+            <a:pPr algn="ctr"/>
+            <a:r>
+              <a:rPr sz="1300" b="1">
+                <a:solidFill>
+                  <a:srgbClr val="FFFFFF"/>
+                </a:solidFill>
+                <a:latin typeface="Open Sans"/>
+                <a:ea typeface="Open Sans"/>
+                <a:cs typeface="Open Sans"/>
+              </a:rPr>
+              <a:t>4</a:t>
+            </a:r>
+          </a:p>
+        </p:txBody>
+      </p:sp>
+      <p:sp>
+        <p:nvSpPr>
+          <p:cNvPr id="22" name="Rectangle 21"/>
+          <p:cNvSpPr/>
+          <p:nvPr/>
+        </p:nvSpPr>
+        <p:spPr>
+          <a:xfrm>
+            <a:off x="1400000" y="3500000"/>
+            <a:ext cx="10550000" cy="620000"/>
+          </a:xfrm>
+          <a:prstGeom prst="rect">
+            <a:avLst/>
+          </a:prstGeom>
+          <a:solidFill>
+            <a:srgbClr val="FFFFFF"/>
+          </a:solidFill>
+          <a:ln w="12700">
+            <a:solidFill>
+              <a:srgbClr val="999999"/>
+            </a:solidFill>
+          </a:ln>
+        </p:spPr>
+        <p:style>
+          <a:lnRef idx="1">
+            <a:schemeClr val="accent1"/>
+          </a:lnRef>
+          <a:fillRef idx="3">
+            <a:schemeClr val="accent1"/>
+          </a:fillRef>
+          <a:effectRef idx="2">
+            <a:schemeClr val="accent1"/>
+          </a:effectRef>
+          <a:fontRef idx="minor">
+            <a:schemeClr val="lt1"/>
+          </a:fontRef>
+        </p:style>
+        <p:txBody>
+          <a:bodyPr rtlCol="0" anchor="ctr"/>
+          <a:lstStyle/>
+          <a:p>
+            <a:pPr algn="ctr"/>
+          </a:p>
+        </p:txBody>
+      </p:sp>
+      <p:sp>
+        <p:nvSpPr>
+          <p:cNvPr id="23" name="TextBox 22"/>
+          <p:cNvSpPr txBox="1"/>
+          <p:nvPr/>
+        </p:nvSpPr>
+        <p:spPr>
+          <a:xfrm>
+            <a:off x="1600000" y="3500000"/>
+            <a:ext cx="10150000" cy="620000"/>
+          </a:xfrm>
+          <a:prstGeom prst="rect">
+            <a:avLst/>
+          </a:prstGeom>
+          <a:noFill/>
+        </p:spPr>
+        <p:txBody>
+          <a:bodyPr wrap="square" anchor="ctr">
+            <a:spAutoFit/>
+          </a:bodyPr>
+          <a:lstStyle/>
+          <a:p>
+            <a:pPr algn="l"/>
+            <a:r>
+              <a:rPr sz="1300" b="0">
+                <a:solidFill>
+                  <a:srgbClr val="333333"/>
+                </a:solidFill>
+                <a:latin typeface="Open Sans"/>
+                <a:ea typeface="Open Sans"/>
+                <a:cs typeface="Open Sans"/>
+              </a:rPr>
+              <a:t>Не отрывайте прилипшую одежду и не вскрывайте пузыри.</a:t>
+            </a:r>
+          </a:p>
+        </p:txBody>
+      </p:sp>
+      <p:sp>
+        <p:nvSpPr>
+          <p:cNvPr id="24" name="Oval 23"/>
+          <p:cNvSpPr/>
+          <p:nvPr/>
+        </p:nvSpPr>
+        <p:spPr>
+          <a:xfrm>
+            <a:off x="700000" y="4200000"/>
+            <a:ext cx="500000" cy="500000"/>
+          </a:xfrm>
+          <a:prstGeom prst="ellipse">
+            <a:avLst/>
+          </a:prstGeom>
+          <a:solidFill>
+            <a:srgbClr val="555555"/>
+          </a:solidFill>
+          <a:ln>
+            <a:noFill/>
+          </a:ln>
+        </p:spPr>
+        <p:style>
+          <a:lnRef idx="1">
+            <a:schemeClr val="accent1"/>
+          </a:lnRef>
+          <a:fillRef idx="3">
+            <a:schemeClr val="accent1"/>
+          </a:fillRef>
+          <a:effectRef idx="2">
+            <a:schemeClr val="accent1"/>
+          </a:effectRef>
+          <a:fontRef idx="minor">
+            <a:schemeClr val="lt1"/>
+          </a:fontRef>
+        </p:style>
+        <p:txBody>
+          <a:bodyPr rtlCol="0" anchor="ctr"/>
+          <a:lstStyle/>
+          <a:p>
+            <a:pPr algn="ctr"/>
+          </a:p>
+        </p:txBody>
+      </p:sp>
+      <p:sp>
+        <p:nvSpPr>
+          <p:cNvPr id="25" name="TextBox 24"/>
+          <p:cNvSpPr txBox="1"/>
+          <p:nvPr/>
+        </p:nvSpPr>
+        <p:spPr>
+          <a:xfrm>
+            <a:off x="700000" y="4200000"/>
+            <a:ext cx="500000" cy="500000"/>
+          </a:xfrm>
+          <a:prstGeom prst="rect">
+            <a:avLst/>
+          </a:prstGeom>
+          <a:noFill/>
+        </p:spPr>
+        <p:txBody>
+          <a:bodyPr wrap="square" anchor="ctr">
+            <a:spAutoFit/>
+          </a:bodyPr>
+          <a:lstStyle/>
+          <a:p>
+            <a:pPr algn="ctr"/>
+            <a:r>
+              <a:rPr sz="1300" b="1">
+                <a:solidFill>
+                  <a:srgbClr val="FFFFFF"/>
+                </a:solidFill>
+                <a:latin typeface="Open Sans"/>
+                <a:ea typeface="Open Sans"/>
+                <a:cs typeface="Open Sans"/>
+              </a:rPr>
+              <a:t>5</a:t>
+            </a:r>
+          </a:p>
+        </p:txBody>
+      </p:sp>
+      <p:sp>
+        <p:nvSpPr>
+          <p:cNvPr id="26" name="Rectangle 25"/>
+          <p:cNvSpPr/>
+          <p:nvPr/>
+        </p:nvSpPr>
+        <p:spPr>
+          <a:xfrm>
+            <a:off x="1400000" y="4200000"/>
+            <a:ext cx="10550000" cy="620000"/>
+          </a:xfrm>
+          <a:prstGeom prst="rect">
+            <a:avLst/>
+          </a:prstGeom>
+          <a:solidFill>
+            <a:srgbClr val="FFFFFF"/>
+          </a:solidFill>
+          <a:ln w="12700">
+            <a:solidFill>
+              <a:srgbClr val="999999"/>
+            </a:solidFill>
+          </a:ln>
+        </p:spPr>
+        <p:style>
+          <a:lnRef idx="1">
+            <a:schemeClr val="accent1"/>
+          </a:lnRef>
+          <a:fillRef idx="3">
+            <a:schemeClr val="accent1"/>
+          </a:fillRef>
+          <a:effectRef idx="2">
+            <a:schemeClr val="accent1"/>
+          </a:effectRef>
+          <a:fontRef idx="minor">
+            <a:schemeClr val="lt1"/>
+          </a:fontRef>
+        </p:style>
+        <p:txBody>
+          <a:bodyPr rtlCol="0" anchor="ctr"/>
+          <a:lstStyle/>
+          <a:p>
+            <a:pPr algn="ctr"/>
+          </a:p>
+        </p:txBody>
+      </p:sp>
+      <p:sp>
+        <p:nvSpPr>
+          <p:cNvPr id="27" name="TextBox 26"/>
+          <p:cNvSpPr txBox="1"/>
+          <p:nvPr/>
+        </p:nvSpPr>
+        <p:spPr>
+          <a:xfrm>
+            <a:off x="1600000" y="4200000"/>
+            <a:ext cx="10150000" cy="620000"/>
+          </a:xfrm>
+          <a:prstGeom prst="rect">
+            <a:avLst/>
+          </a:prstGeom>
+          <a:noFill/>
+        </p:spPr>
+        <p:txBody>
+          <a:bodyPr wrap="square" anchor="ctr">
+            <a:spAutoFit/>
+          </a:bodyPr>
+          <a:lstStyle/>
+          <a:p>
+            <a:pPr algn="l"/>
+            <a:r>
+              <a:rPr sz="1300" b="0">
+                <a:solidFill>
+                  <a:srgbClr val="333333"/>
+                </a:solidFill>
+                <a:latin typeface="Open Sans"/>
+                <a:ea typeface="Open Sans"/>
+                <a:cs typeface="Open Sans"/>
+              </a:rPr>
+              <a:t>После охлаждения закройте участок свободной стерильной сухой повязкой.</a:t>
+            </a:r>
+          </a:p>
+        </p:txBody>
+      </p:sp>
+      <p:sp>
+        <p:nvSpPr>
+          <p:cNvPr id="28" name="Oval 27"/>
+          <p:cNvSpPr/>
+          <p:nvPr/>
+        </p:nvSpPr>
+        <p:spPr>
+          <a:xfrm>
+            <a:off x="700000" y="4900000"/>
+            <a:ext cx="500000" cy="500000"/>
+          </a:xfrm>
+          <a:prstGeom prst="ellipse">
+            <a:avLst/>
+          </a:prstGeom>
+          <a:solidFill>
+            <a:srgbClr val="555555"/>
+          </a:solidFill>
+          <a:ln>
+            <a:noFill/>
+          </a:ln>
+        </p:spPr>
+        <p:style>
+          <a:lnRef idx="1">
+            <a:schemeClr val="accent1"/>
+          </a:lnRef>
+          <a:fillRef idx="3">
+            <a:schemeClr val="accent1"/>
+          </a:fillRef>
+          <a:effectRef idx="2">
+            <a:schemeClr val="accent1"/>
+          </a:effectRef>
+          <a:fontRef idx="minor">
+            <a:schemeClr val="lt1"/>
+          </a:fontRef>
+        </p:style>
+        <p:txBody>
+          <a:bodyPr rtlCol="0" anchor="ctr"/>
+          <a:lstStyle/>
+          <a:p>
+            <a:pPr algn="ctr"/>
+          </a:p>
+        </p:txBody>
+      </p:sp>
+      <p:sp>
+        <p:nvSpPr>
+          <p:cNvPr id="29" name="TextBox 28"/>
+          <p:cNvSpPr txBox="1"/>
+          <p:nvPr/>
+        </p:nvSpPr>
+        <p:spPr>
+          <a:xfrm>
+            <a:off x="700000" y="4900000"/>
+            <a:ext cx="500000" cy="500000"/>
+          </a:xfrm>
+          <a:prstGeom prst="rect">
+            <a:avLst/>
+          </a:prstGeom>
+          <a:noFill/>
+        </p:spPr>
+        <p:txBody>
+          <a:bodyPr wrap="square" anchor="ctr">
+            <a:spAutoFit/>
+          </a:bodyPr>
+          <a:lstStyle/>
+          <a:p>
+            <a:pPr algn="ctr"/>
+            <a:r>
+              <a:rPr sz="1300" b="1">
+                <a:solidFill>
+                  <a:srgbClr val="FFFFFF"/>
+                </a:solidFill>
+                <a:latin typeface="Open Sans"/>
+                <a:ea typeface="Open Sans"/>
+                <a:cs typeface="Open Sans"/>
+              </a:rPr>
+              <a:t>6</a:t>
+            </a:r>
+          </a:p>
+        </p:txBody>
+      </p:sp>
+      <p:sp>
+        <p:nvSpPr>
+          <p:cNvPr id="30" name="Rectangle 29"/>
+          <p:cNvSpPr/>
+          <p:nvPr/>
+        </p:nvSpPr>
+        <p:spPr>
+          <a:xfrm>
+            <a:off x="1400000" y="4900000"/>
+            <a:ext cx="10550000" cy="620000"/>
+          </a:xfrm>
+          <a:prstGeom prst="rect">
+            <a:avLst/>
+          </a:prstGeom>
+          <a:solidFill>
+            <a:srgbClr val="FFFFFF"/>
+          </a:solidFill>
+          <a:ln w="12700">
+            <a:solidFill>
+              <a:srgbClr val="999999"/>
+            </a:solidFill>
+          </a:ln>
+        </p:spPr>
+        <p:style>
+          <a:lnRef idx="1">
+            <a:schemeClr val="accent1"/>
+          </a:lnRef>
+          <a:fillRef idx="3">
+            <a:schemeClr val="accent1"/>
+          </a:fillRef>
+          <a:effectRef idx="2">
+            <a:schemeClr val="accent1"/>
+          </a:effectRef>
+          <a:fontRef idx="minor">
+            <a:schemeClr val="lt1"/>
+          </a:fontRef>
+        </p:style>
+        <p:txBody>
+          <a:bodyPr rtlCol="0" anchor="ctr"/>
+          <a:lstStyle/>
+          <a:p>
+            <a:pPr algn="ctr"/>
+          </a:p>
+        </p:txBody>
+      </p:sp>
+      <p:sp>
+        <p:nvSpPr>
+          <p:cNvPr id="31" name="TextBox 30"/>
+          <p:cNvSpPr txBox="1"/>
+          <p:nvPr/>
+        </p:nvSpPr>
+        <p:spPr>
+          <a:xfrm>
+            <a:off x="1600000" y="4900000"/>
+            <a:ext cx="10150000" cy="620000"/>
+          </a:xfrm>
+          <a:prstGeom prst="rect">
+            <a:avLst/>
+          </a:prstGeom>
+          <a:noFill/>
+        </p:spPr>
+        <p:txBody>
+          <a:bodyPr wrap="square" anchor="ctr">
+            <a:spAutoFit/>
+          </a:bodyPr>
+          <a:lstStyle/>
+          <a:p>
+            <a:pPr algn="l"/>
+            <a:r>
+              <a:rPr sz="1300" b="0">
+                <a:solidFill>
+                  <a:srgbClr val="333333"/>
+                </a:solidFill>
+                <a:latin typeface="Open Sans"/>
+                <a:ea typeface="Open Sans"/>
+                <a:cs typeface="Open Sans"/>
+              </a:rPr>
+              <a:t>Согрейте пострадавшего в целом и вызовите скорую помощь по показаниям.</a:t>
+            </a:r>
+          </a:p>
+        </p:txBody>
+      </p:sp>
+      <p:sp>
+        <p:nvSpPr>
+          <p:cNvPr id="32" name="Rounded Rectangle 31"/>
+          <p:cNvSpPr/>
+          <p:nvPr/>
+        </p:nvSpPr>
+        <p:spPr>
+          <a:xfrm>
+            <a:off x="700000" y="5800000"/>
+            <a:ext cx="11000000" cy="900000"/>
+          </a:xfrm>
+          <a:prstGeom prst="roundRect">
+            <a:avLst/>
+          </a:prstGeom>
+          <a:solidFill>
+            <a:srgbClr val="F5F0E1"/>
+          </a:solidFill>
+          <a:ln>
+            <a:noFill/>
+          </a:ln>
+        </p:spPr>
+        <p:style>
+          <a:lnRef idx="1">
+            <a:schemeClr val="accent1"/>
+          </a:lnRef>
+          <a:fillRef idx="3">
+            <a:schemeClr val="accent1"/>
+          </a:fillRef>
+          <a:effectRef idx="2">
+            <a:schemeClr val="accent1"/>
+          </a:effectRef>
+          <a:fontRef idx="minor">
+            <a:schemeClr val="lt1"/>
+          </a:fontRef>
+        </p:style>
+        <p:txBody>
+          <a:bodyPr rtlCol="0" anchor="ctr"/>
+          <a:lstStyle/>
+          <a:p>
+            <a:pPr algn="ctr"/>
+          </a:p>
+        </p:txBody>
+      </p:sp>
+      <p:sp>
+        <p:nvSpPr>
+          <p:cNvPr id="33" name="TextBox 32"/>
+          <p:cNvSpPr txBox="1"/>
+          <p:nvPr/>
+        </p:nvSpPr>
+        <p:spPr>
+          <a:xfrm>
+            <a:off x="950000" y="6000000"/>
+            <a:ext cx="10500000" cy="500000"/>
+          </a:xfrm>
+          <a:prstGeom prst="rect">
+            <a:avLst/>
+          </a:prstGeom>
+          <a:noFill/>
+        </p:spPr>
+        <p:txBody>
+          <a:bodyPr wrap="square" anchor="ctr">
+            <a:spAutoFit/>
+          </a:bodyPr>
+          <a:lstStyle/>
+          <a:p>
+            <a:pPr algn="l"/>
+            <a:r>
+              <a:rPr sz="1200" b="0">
+                <a:solidFill>
+                  <a:srgbClr val="333333"/>
+                </a:solidFill>
+                <a:latin typeface="Open Sans"/>
+                <a:ea typeface="Open Sans"/>
+                <a:cs typeface="Open Sans"/>
+              </a:rPr>
+              <a:t>Охлаждайте поврежденный участок, но не допускайте общего переохлаждения, особенно у детей.</a:t>
             </a:r>
           </a:p>
         </p:txBody>
@@ -7571,7 +10816,7 @@
                 <a:ea typeface="Open Sans"/>
                 <a:cs typeface="Open Sans"/>
               </a:rPr>
-              <a:t>ПЕРЕГРЕВАНИЕ</a:t>
+              <a:t>ЧЕГО НЕЛЬЗЯ НАНОСИТЬ НА ОЖОГ</a:t>
             </a:r>
           </a:p>
         </p:txBody>
@@ -7744,8 +10989,8 @@
         </p:nvSpPr>
         <p:spPr>
           <a:xfrm>
-            <a:off x="700000" y="1500000"/>
-            <a:ext cx="11000000" cy="4200000"/>
+            <a:off x="700000" y="1450000"/>
+            <a:ext cx="11000000" cy="4000000"/>
           </a:xfrm>
           <a:prstGeom prst="rect">
             <a:avLst/>
@@ -7764,15 +11009,15 @@
               </a:spcAft>
             </a:pPr>
             <a:r>
-              <a:rPr sz="1400" b="0">
-                <a:solidFill>
-                  <a:srgbClr val="333333"/>
-                </a:solidFill>
-                <a:latin typeface="Open Sans"/>
-                <a:ea typeface="Open Sans"/>
-                <a:cs typeface="Open Sans"/>
-              </a:rPr>
-              <a:t>•  Переместите пострадавшего в прохладное место</a:t>
+              <a:rPr sz="1400" b="1">
+                <a:solidFill>
+                  <a:srgbClr val="CC0000"/>
+                </a:solidFill>
+                <a:latin typeface="Open Sans"/>
+                <a:ea typeface="Open Sans"/>
+                <a:cs typeface="Open Sans"/>
+              </a:rPr>
+              <a:t>•  Лед непосредственно на кожу</a:t>
             </a:r>
           </a:p>
           <a:p>
@@ -7782,15 +11027,15 @@
               </a:spcAft>
             </a:pPr>
             <a:r>
-              <a:rPr sz="1400" b="0">
-                <a:solidFill>
-                  <a:srgbClr val="333333"/>
-                </a:solidFill>
-                <a:latin typeface="Open Sans"/>
-                <a:ea typeface="Open Sans"/>
-                <a:cs typeface="Open Sans"/>
-              </a:rPr>
-              <a:t>•  Ослабьте или снимите лишнюю одежду</a:t>
+              <a:rPr sz="1400" b="1">
+                <a:solidFill>
+                  <a:srgbClr val="CC0000"/>
+                </a:solidFill>
+                <a:latin typeface="Open Sans"/>
+                <a:ea typeface="Open Sans"/>
+                <a:cs typeface="Open Sans"/>
+              </a:rPr>
+              <a:t>•  Масло, жир, крем, мазь или зубную пасту</a:t>
             </a:r>
           </a:p>
           <a:p>
@@ -7800,15 +11045,15 @@
               </a:spcAft>
             </a:pPr>
             <a:r>
-              <a:rPr sz="1400" b="0">
-                <a:solidFill>
-                  <a:srgbClr val="333333"/>
-                </a:solidFill>
-                <a:latin typeface="Open Sans"/>
-                <a:ea typeface="Open Sans"/>
-                <a:cs typeface="Open Sans"/>
-              </a:rPr>
-              <a:t>•  Охлаждайте голову, шею и тело</a:t>
+              <a:rPr sz="1400" b="1">
+                <a:solidFill>
+                  <a:srgbClr val="CC0000"/>
+                </a:solidFill>
+                <a:latin typeface="Open Sans"/>
+                <a:ea typeface="Open Sans"/>
+                <a:cs typeface="Open Sans"/>
+              </a:rPr>
+              <a:t>•  Спирт, йод и другие раздражающие растворы</a:t>
             </a:r>
           </a:p>
           <a:p>
@@ -7818,15 +11063,15 @@
               </a:spcAft>
             </a:pPr>
             <a:r>
-              <a:rPr sz="1400" b="0">
-                <a:solidFill>
-                  <a:srgbClr val="333333"/>
-                </a:solidFill>
-                <a:latin typeface="Open Sans"/>
-                <a:ea typeface="Open Sans"/>
-                <a:cs typeface="Open Sans"/>
-              </a:rPr>
-              <a:t>•  При ясном сознании давайте прохладное питье</a:t>
+              <a:rPr sz="1400" b="1">
+                <a:solidFill>
+                  <a:srgbClr val="CC0000"/>
+                </a:solidFill>
+                <a:latin typeface="Open Sans"/>
+                <a:ea typeface="Open Sans"/>
+                <a:cs typeface="Open Sans"/>
+              </a:rPr>
+              <a:t>•  Вату и материалы, прилипающие к ране</a:t>
             </a:r>
           </a:p>
           <a:p>
@@ -7836,15 +11081,15 @@
               </a:spcAft>
             </a:pPr>
             <a:r>
-              <a:rPr sz="1400" b="0">
-                <a:solidFill>
-                  <a:srgbClr val="333333"/>
-                </a:solidFill>
-                <a:latin typeface="Open Sans"/>
-                <a:ea typeface="Open Sans"/>
-                <a:cs typeface="Open Sans"/>
-              </a:rPr>
-              <a:t>•  Контролируйте сознание и дыхание</a:t>
+              <a:rPr sz="1400" b="1">
+                <a:solidFill>
+                  <a:srgbClr val="CC0000"/>
+                </a:solidFill>
+                <a:latin typeface="Open Sans"/>
+                <a:ea typeface="Open Sans"/>
+                <a:cs typeface="Open Sans"/>
+              </a:rPr>
+              <a:t>•  Тугую повязку, создающую давление при отеке</a:t>
             </a:r>
           </a:p>
         </p:txBody>
@@ -7916,7 +11161,7 @@
           <a:p>
             <a:pPr algn="l"/>
             <a:r>
-              <a:rPr sz="1300" b="0">
+              <a:rPr sz="1200" b="0">
                 <a:solidFill>
                   <a:srgbClr val="333333"/>
                 </a:solidFill>
@@ -7924,7 +11169,7 @@
                 <a:ea typeface="Open Sans"/>
                 <a:cs typeface="Open Sans"/>
               </a:rPr>
-              <a:t>При потере сознания и сохраненном дыхании уложите на бок.</a:t>
+              <a:t>Эти действия усиливают повреждение, загрязняют рану или затрудняют последующее лечение.</a:t>
             </a:r>
           </a:p>
         </p:txBody>
@@ -8022,7 +11267,7 @@
                 <a:ea typeface="Open Sans"/>
                 <a:cs typeface="Open Sans"/>
               </a:rPr>
-              <a:t>ХОЛОДОВЫЕ ПОРАЖЕНИЯ</a:t>
+              <a:t>ОЖОГ ДЫХАТЕЛЬНЫХ ПУТЕЙ</a:t>
             </a:r>
           </a:p>
         </p:txBody>
@@ -8196,81 +11441,7 @@
         <p:spPr>
           <a:xfrm>
             <a:off x="700000" y="1450000"/>
-            <a:ext cx="5400000" cy="400000"/>
-          </a:xfrm>
-          <a:prstGeom prst="rect">
-            <a:avLst/>
-          </a:prstGeom>
-          <a:noFill/>
-        </p:spPr>
-        <p:txBody>
-          <a:bodyPr wrap="square" anchor="t">
-            <a:spAutoFit/>
-          </a:bodyPr>
-          <a:lstStyle/>
-          <a:p>
-            <a:pPr algn="l"/>
-            <a:r>
-              <a:rPr sz="1400" b="1">
-                <a:solidFill>
-                  <a:srgbClr val="333333"/>
-                </a:solidFill>
-                <a:latin typeface="Open Sans"/>
-                <a:ea typeface="Open Sans"/>
-                <a:cs typeface="Open Sans"/>
-              </a:rPr>
-              <a:t>Отморожение</a:t>
-            </a:r>
-          </a:p>
-        </p:txBody>
-      </p:sp>
-      <p:sp>
-        <p:nvSpPr>
-          <p:cNvPr id="9" name="TextBox 8"/>
-          <p:cNvSpPr txBox="1"/>
-          <p:nvPr/>
-        </p:nvSpPr>
-        <p:spPr>
-          <a:xfrm>
-            <a:off x="6600000" y="1450000"/>
-            <a:ext cx="5400000" cy="400000"/>
-          </a:xfrm>
-          <a:prstGeom prst="rect">
-            <a:avLst/>
-          </a:prstGeom>
-          <a:noFill/>
-        </p:spPr>
-        <p:txBody>
-          <a:bodyPr wrap="square" anchor="t">
-            <a:spAutoFit/>
-          </a:bodyPr>
-          <a:lstStyle/>
-          <a:p>
-            <a:pPr algn="l"/>
-            <a:r>
-              <a:rPr sz="1400" b="1">
-                <a:solidFill>
-                  <a:srgbClr val="333333"/>
-                </a:solidFill>
-                <a:latin typeface="Open Sans"/>
-                <a:ea typeface="Open Sans"/>
-                <a:cs typeface="Open Sans"/>
-              </a:rPr>
-              <a:t>Переохлаждение</a:t>
-            </a:r>
-          </a:p>
-        </p:txBody>
-      </p:sp>
-      <p:sp>
-        <p:nvSpPr>
-          <p:cNvPr id="10" name="TextBox 9"/>
-          <p:cNvSpPr txBox="1"/>
-          <p:nvPr/>
-        </p:nvSpPr>
-        <p:spPr>
-          <a:xfrm>
-            <a:off x="700000" y="1950000"/>
-            <a:ext cx="5400000" cy="4000000"/>
+            <a:ext cx="11000000" cy="4000000"/>
           </a:xfrm>
           <a:prstGeom prst="rect">
             <a:avLst/>
@@ -8289,7 +11460,7 @@
               </a:spcAft>
             </a:pPr>
             <a:r>
-              <a:rPr sz="1300" b="0">
+              <a:rPr sz="1400" b="0">
                 <a:solidFill>
                   <a:srgbClr val="333333"/>
                 </a:solidFill>
@@ -8297,7 +11468,7 @@
                 <a:ea typeface="Open Sans"/>
                 <a:cs typeface="Open Sans"/>
               </a:rPr>
-              <a:t>•  перенесите в теплое место</a:t>
+              <a:t>•  Возможен после вдыхания дыма, пара, горячего воздуха и продуктов горения.</a:t>
             </a:r>
           </a:p>
           <a:p>
@@ -8307,7 +11478,7 @@
               </a:spcAft>
             </a:pPr>
             <a:r>
-              <a:rPr sz="1300" b="0">
+              <a:rPr sz="1400" b="0">
                 <a:solidFill>
                   <a:srgbClr val="333333"/>
                 </a:solidFill>
@@ -8315,7 +11486,7 @@
                 <a:ea typeface="Open Sans"/>
                 <a:cs typeface="Open Sans"/>
               </a:rPr>
-              <a:t>•  наложите сухую теплоизолирующую повязку</a:t>
+              <a:t>•  Признаки: ожоги лица, опаленные волосы, копоть у носа и рта.</a:t>
             </a:r>
           </a:p>
           <a:p>
@@ -8325,15 +11496,15 @@
               </a:spcAft>
             </a:pPr>
             <a:r>
-              <a:rPr sz="1300" b="0">
-                <a:solidFill>
-                  <a:srgbClr val="333333"/>
-                </a:solidFill>
-                <a:latin typeface="Open Sans"/>
-                <a:ea typeface="Open Sans"/>
-                <a:cs typeface="Open Sans"/>
-              </a:rPr>
-              <a:t>•  обездвижьте поврежденный участок</a:t>
+              <a:rPr sz="1400" b="1">
+                <a:solidFill>
+                  <a:srgbClr val="CC0000"/>
+                </a:solidFill>
+                <a:latin typeface="Open Sans"/>
+                <a:ea typeface="Open Sans"/>
+                <a:cs typeface="Open Sans"/>
+              </a:rPr>
+              <a:t>•  Осиплость, кашель, боль при глотании и шумное дыхание особенно опасны.</a:t>
             </a:r>
           </a:p>
           <a:p>
@@ -8343,40 +11514,17 @@
               </a:spcAft>
             </a:pPr>
             <a:r>
-              <a:rPr sz="1300" b="0">
-                <a:solidFill>
-                  <a:srgbClr val="333333"/>
-                </a:solidFill>
-                <a:latin typeface="Open Sans"/>
-                <a:ea typeface="Open Sans"/>
-                <a:cs typeface="Open Sans"/>
-              </a:rPr>
-              <a:t>•  не растирайте и не отогревайте у огня</a:t>
-            </a:r>
-          </a:p>
-        </p:txBody>
-      </p:sp>
-      <p:sp>
-        <p:nvSpPr>
-          <p:cNvPr id="11" name="TextBox 10"/>
-          <p:cNvSpPr txBox="1"/>
-          <p:nvPr/>
-        </p:nvSpPr>
-        <p:spPr>
-          <a:xfrm>
-            <a:off x="6600000" y="1950000"/>
-            <a:ext cx="5400000" cy="4000000"/>
-          </a:xfrm>
-          <a:prstGeom prst="rect">
-            <a:avLst/>
-          </a:prstGeom>
-          <a:noFill/>
-        </p:spPr>
-        <p:txBody>
-          <a:bodyPr wrap="square">
-            <a:spAutoFit/>
-          </a:bodyPr>
-          <a:lstStyle/>
+              <a:rPr sz="1400" b="1">
+                <a:solidFill>
+                  <a:srgbClr val="CC0000"/>
+                </a:solidFill>
+                <a:latin typeface="Open Sans"/>
+                <a:ea typeface="Open Sans"/>
+                <a:cs typeface="Open Sans"/>
+              </a:rPr>
+              <a:t>•  Отек дыхательных путей способен быстро нарастать даже при ясном сознании.</a:t>
+            </a:r>
+          </a:p>
           <a:p>
             <a:pPr algn="l">
               <a:spcAft>
@@ -8384,7 +11532,87 @@
               </a:spcAft>
             </a:pPr>
             <a:r>
-              <a:rPr sz="1300" b="0">
+              <a:rPr sz="1400" b="1">
+                <a:solidFill>
+                  <a:srgbClr val="CC0000"/>
+                </a:solidFill>
+                <a:latin typeface="Open Sans"/>
+                <a:ea typeface="Open Sans"/>
+                <a:cs typeface="Open Sans"/>
+              </a:rPr>
+              <a:t>•  Выведите на свежий воздух, обеспечьте покой и немедленно вызовите скорую помощь.</a:t>
+            </a:r>
+          </a:p>
+        </p:txBody>
+      </p:sp>
+      <p:sp>
+        <p:nvSpPr>
+          <p:cNvPr id="9" name="Rounded Rectangle 8"/>
+          <p:cNvSpPr/>
+          <p:nvPr/>
+        </p:nvSpPr>
+        <p:spPr>
+          <a:xfrm>
+            <a:off x="700000" y="5600000"/>
+            <a:ext cx="11000000" cy="1000000"/>
+          </a:xfrm>
+          <a:prstGeom prst="roundRect">
+            <a:avLst/>
+          </a:prstGeom>
+          <a:solidFill>
+            <a:srgbClr val="F5F0E1"/>
+          </a:solidFill>
+          <a:ln>
+            <a:noFill/>
+          </a:ln>
+        </p:spPr>
+        <p:style>
+          <a:lnRef idx="1">
+            <a:schemeClr val="accent1"/>
+          </a:lnRef>
+          <a:fillRef idx="3">
+            <a:schemeClr val="accent1"/>
+          </a:fillRef>
+          <a:effectRef idx="2">
+            <a:schemeClr val="accent1"/>
+          </a:effectRef>
+          <a:fontRef idx="minor">
+            <a:schemeClr val="lt1"/>
+          </a:fontRef>
+        </p:style>
+        <p:txBody>
+          <a:bodyPr rtlCol="0" anchor="ctr"/>
+          <a:lstStyle/>
+          <a:p>
+            <a:pPr algn="ctr"/>
+          </a:p>
+        </p:txBody>
+      </p:sp>
+      <p:sp>
+        <p:nvSpPr>
+          <p:cNvPr id="10" name="TextBox 9"/>
+          <p:cNvSpPr txBox="1"/>
+          <p:nvPr/>
+        </p:nvSpPr>
+        <p:spPr>
+          <a:xfrm>
+            <a:off x="950000" y="5800000"/>
+            <a:ext cx="10500000" cy="600000"/>
+          </a:xfrm>
+          <a:prstGeom prst="rect">
+            <a:avLst/>
+          </a:prstGeom>
+          <a:noFill/>
+        </p:spPr>
+        <p:txBody>
+          <a:bodyPr wrap="square" anchor="ctr">
+            <a:spAutoFit/>
+          </a:bodyPr>
+          <a:lstStyle/>
+          <a:p>
+            <a:pPr algn="l"/>
+            <a:r>
+              <a:rPr sz="1200" b="0">
                 <a:solidFill>
                   <a:srgbClr val="333333"/>
                 </a:solidFill>
@@ -8392,61 +11620,7 @@
                 <a:ea typeface="Open Sans"/>
                 <a:cs typeface="Open Sans"/>
               </a:rPr>
-              <a:t>•  замените мокрую одежду сухой</a:t>
-            </a:r>
-          </a:p>
-          <a:p>
-            <a:pPr algn="l">
-              <a:spcAft>
-                <a:spcPts val="800"/>
-              </a:spcAft>
-            </a:pPr>
-            <a:r>
-              <a:rPr sz="1300" b="0">
-                <a:solidFill>
-                  <a:srgbClr val="333333"/>
-                </a:solidFill>
-                <a:latin typeface="Open Sans"/>
-                <a:ea typeface="Open Sans"/>
-                <a:cs typeface="Open Sans"/>
-              </a:rPr>
-              <a:t>•  укройте и согревайте постепенно</a:t>
-            </a:r>
-          </a:p>
-          <a:p>
-            <a:pPr algn="l">
-              <a:spcAft>
-                <a:spcPts val="800"/>
-              </a:spcAft>
-            </a:pPr>
-            <a:r>
-              <a:rPr sz="1300" b="0">
-                <a:solidFill>
-                  <a:srgbClr val="333333"/>
-                </a:solidFill>
-                <a:latin typeface="Open Sans"/>
-                <a:ea typeface="Open Sans"/>
-                <a:cs typeface="Open Sans"/>
-              </a:rPr>
-              <a:t>•  дайте теплое питье при ясном сознании</a:t>
-            </a:r>
-          </a:p>
-          <a:p>
-            <a:pPr algn="l">
-              <a:spcAft>
-                <a:spcPts val="800"/>
-              </a:spcAft>
-            </a:pPr>
-            <a:r>
-              <a:rPr sz="1300" b="0">
-                <a:solidFill>
-                  <a:srgbClr val="333333"/>
-                </a:solidFill>
-                <a:latin typeface="Open Sans"/>
-                <a:ea typeface="Open Sans"/>
-                <a:cs typeface="Open Sans"/>
-              </a:rPr>
-              <a:t>•  без сознания, но при дыхании — устойчивое боковое положение</a:t>
+              <a:t>Постоянно контролируйте дыхание и будьте готовы к реанимации.</a:t>
             </a:r>
           </a:p>
         </p:txBody>
@@ -8544,7 +11718,7 @@
                 <a:ea typeface="Open Sans"/>
                 <a:cs typeface="Open Sans"/>
               </a:rPr>
-              <a:t>ГЛАВНОЕ ЗАПОМНИТЬ</a:t>
+              <a:t>ПЕРЕГРЕВАНИЕ</a:t>
             </a:r>
           </a:p>
         </p:txBody>
@@ -8709,27 +11883,162 @@
           </a:p>
         </p:txBody>
       </p:sp>
-      <p:sp>
-        <p:nvSpPr>
-          <p:cNvPr id="8" name="Rectangle 7"/>
+      <p:pic>
+        <p:nvPicPr>
+          <p:cNvPr id="8" name="Picture 7" descr="fig76.jpeg"/>
+          <p:cNvPicPr>
+            <a:picLocks noChangeAspect="1"/>
+          </p:cNvPicPr>
+          <p:nvPr/>
+        </p:nvPicPr>
+        <p:blipFill>
+          <a:blip r:embed="rId2"/>
+          <a:stretch>
+            <a:fillRect/>
+          </a:stretch>
+        </p:blipFill>
+        <p:spPr>
+          <a:xfrm>
+            <a:off x="500000" y="1993594"/>
+            <a:ext cx="5200000" cy="2912812"/>
+          </a:xfrm>
+          <a:prstGeom prst="rect">
+            <a:avLst/>
+          </a:prstGeom>
+        </p:spPr>
+      </p:pic>
+      <p:sp>
+        <p:nvSpPr>
+          <p:cNvPr id="9" name="TextBox 8"/>
+          <p:cNvSpPr txBox="1"/>
+          <p:nvPr/>
+        </p:nvSpPr>
+        <p:spPr>
+          <a:xfrm>
+            <a:off x="6000000" y="1450000"/>
+            <a:ext cx="6200000" cy="3800000"/>
+          </a:xfrm>
+          <a:prstGeom prst="rect">
+            <a:avLst/>
+          </a:prstGeom>
+          <a:noFill/>
+        </p:spPr>
+        <p:txBody>
+          <a:bodyPr wrap="square">
+            <a:spAutoFit/>
+          </a:bodyPr>
+          <a:lstStyle/>
+          <a:p>
+            <a:pPr algn="l">
+              <a:spcAft>
+                <a:spcPts val="800"/>
+              </a:spcAft>
+            </a:pPr>
+            <a:r>
+              <a:rPr sz="1300" b="0">
+                <a:solidFill>
+                  <a:srgbClr val="333333"/>
+                </a:solidFill>
+                <a:latin typeface="Open Sans"/>
+                <a:ea typeface="Open Sans"/>
+                <a:cs typeface="Open Sans"/>
+              </a:rPr>
+              <a:t>•  Признаки: слабость, головная боль, жажда, тошнота, покраснение и горячая кожа.</a:t>
+            </a:r>
+          </a:p>
+          <a:p>
+            <a:pPr algn="l">
+              <a:spcAft>
+                <a:spcPts val="800"/>
+              </a:spcAft>
+            </a:pPr>
+            <a:r>
+              <a:rPr sz="1300" b="0">
+                <a:solidFill>
+                  <a:srgbClr val="333333"/>
+                </a:solidFill>
+                <a:latin typeface="Open Sans"/>
+                <a:ea typeface="Open Sans"/>
+                <a:cs typeface="Open Sans"/>
+              </a:rPr>
+              <a:t>•  В тяжелом состоянии возможны спутанность, судороги и потеря сознания.</a:t>
+            </a:r>
+          </a:p>
+          <a:p>
+            <a:pPr algn="l">
+              <a:spcAft>
+                <a:spcPts val="800"/>
+              </a:spcAft>
+            </a:pPr>
+            <a:r>
+              <a:rPr sz="1300" b="0">
+                <a:solidFill>
+                  <a:srgbClr val="333333"/>
+                </a:solidFill>
+                <a:latin typeface="Open Sans"/>
+                <a:ea typeface="Open Sans"/>
+                <a:cs typeface="Open Sans"/>
+              </a:rPr>
+              <a:t>•  Переместите пострадавшего в тень или прохладное проветриваемое место.</a:t>
+            </a:r>
+          </a:p>
+          <a:p>
+            <a:pPr algn="l">
+              <a:spcAft>
+                <a:spcPts val="800"/>
+              </a:spcAft>
+            </a:pPr>
+            <a:r>
+              <a:rPr sz="1300" b="0">
+                <a:solidFill>
+                  <a:srgbClr val="333333"/>
+                </a:solidFill>
+                <a:latin typeface="Open Sans"/>
+                <a:ea typeface="Open Sans"/>
+                <a:cs typeface="Open Sans"/>
+              </a:rPr>
+              <a:t>•  Снимите лишнюю одежду, охлаждайте голову, шею и туловище влажной тканью.</a:t>
+            </a:r>
+          </a:p>
+          <a:p>
+            <a:pPr algn="l">
+              <a:spcAft>
+                <a:spcPts val="800"/>
+              </a:spcAft>
+            </a:pPr>
+            <a:r>
+              <a:rPr sz="1300" b="0">
+                <a:solidFill>
+                  <a:srgbClr val="333333"/>
+                </a:solidFill>
+                <a:latin typeface="Open Sans"/>
+                <a:ea typeface="Open Sans"/>
+                <a:cs typeface="Open Sans"/>
+              </a:rPr>
+              <a:t>•  При ясном сознании давайте прохладное питье небольшими порциями.</a:t>
+            </a:r>
+          </a:p>
+        </p:txBody>
+      </p:sp>
+      <p:sp>
+        <p:nvSpPr>
+          <p:cNvPr id="10" name="Rounded Rectangle 9"/>
           <p:cNvSpPr/>
           <p:nvPr/>
         </p:nvSpPr>
         <p:spPr>
           <a:xfrm>
-            <a:off x="700000" y="1450000"/>
-            <a:ext cx="11000000" cy="833333"/>
-          </a:xfrm>
-          <a:prstGeom prst="rect">
+            <a:off x="6000000" y="5400000"/>
+            <a:ext cx="6200000" cy="1100000"/>
+          </a:xfrm>
+          <a:prstGeom prst="roundRect">
             <a:avLst/>
           </a:prstGeom>
           <a:solidFill>
-            <a:srgbClr val="FFFFFF"/>
+            <a:srgbClr val="F5F0E1"/>
           </a:solidFill>
-          <a:ln w="12700">
-            <a:solidFill>
-              <a:srgbClr val="999999"/>
-            </a:solidFill>
+          <a:ln>
+            <a:noFill/>
           </a:ln>
         </p:spPr>
         <p:style>
@@ -8756,57 +12065,14 @@
       </p:sp>
       <p:sp>
         <p:nvSpPr>
-          <p:cNvPr id="9" name="Rectangle 8"/>
-          <p:cNvSpPr/>
-          <p:nvPr/>
-        </p:nvSpPr>
-        <p:spPr>
-          <a:xfrm>
-            <a:off x="700000" y="1450000"/>
-            <a:ext cx="90000" cy="833333"/>
-          </a:xfrm>
-          <a:prstGeom prst="rect">
-            <a:avLst/>
-          </a:prstGeom>
-          <a:solidFill>
-            <a:srgbClr val="CC0000"/>
-          </a:solidFill>
-          <a:ln>
-            <a:noFill/>
-          </a:ln>
-        </p:spPr>
-        <p:style>
-          <a:lnRef idx="1">
-            <a:schemeClr val="accent1"/>
-          </a:lnRef>
-          <a:fillRef idx="3">
-            <a:schemeClr val="accent1"/>
-          </a:fillRef>
-          <a:effectRef idx="2">
-            <a:schemeClr val="accent1"/>
-          </a:effectRef>
-          <a:fontRef idx="minor">
-            <a:schemeClr val="lt1"/>
-          </a:fontRef>
-        </p:style>
-        <p:txBody>
-          <a:bodyPr rtlCol="0" anchor="ctr"/>
-          <a:lstStyle/>
-          <a:p>
-            <a:pPr algn="ctr"/>
-          </a:p>
-        </p:txBody>
-      </p:sp>
-      <p:sp>
-        <p:nvSpPr>
-          <p:cNvPr id="10" name="TextBox 9"/>
+          <p:cNvPr id="11" name="TextBox 10"/>
           <p:cNvSpPr txBox="1"/>
           <p:nvPr/>
         </p:nvSpPr>
         <p:spPr>
           <a:xfrm>
-            <a:off x="1000000" y="1550000"/>
-            <a:ext cx="10400000" cy="633333"/>
+            <a:off x="6250000" y="5600000"/>
+            <a:ext cx="5700000" cy="700000"/>
           </a:xfrm>
           <a:prstGeom prst="rect">
             <a:avLst/>
@@ -8821,7 +12087,7 @@
           <a:p>
             <a:pPr algn="l"/>
             <a:r>
-              <a:rPr sz="1300" b="0">
+              <a:rPr sz="1200" b="0">
                 <a:solidFill>
                   <a:srgbClr val="333333"/>
                 </a:solidFill>
@@ -8829,632 +12095,7 @@
                 <a:ea typeface="Open Sans"/>
                 <a:cs typeface="Open Sans"/>
               </a:rPr>
-              <a:t>Прекратите действие температуры</a:t>
-            </a:r>
-          </a:p>
-        </p:txBody>
-      </p:sp>
-      <p:sp>
-        <p:nvSpPr>
-          <p:cNvPr id="11" name="Rectangle 10"/>
-          <p:cNvSpPr/>
-          <p:nvPr/>
-        </p:nvSpPr>
-        <p:spPr>
-          <a:xfrm>
-            <a:off x="700000" y="2383333"/>
-            <a:ext cx="11000000" cy="833333"/>
-          </a:xfrm>
-          <a:prstGeom prst="rect">
-            <a:avLst/>
-          </a:prstGeom>
-          <a:solidFill>
-            <a:srgbClr val="FFFFFF"/>
-          </a:solidFill>
-          <a:ln w="12700">
-            <a:solidFill>
-              <a:srgbClr val="999999"/>
-            </a:solidFill>
-          </a:ln>
-        </p:spPr>
-        <p:style>
-          <a:lnRef idx="1">
-            <a:schemeClr val="accent1"/>
-          </a:lnRef>
-          <a:fillRef idx="3">
-            <a:schemeClr val="accent1"/>
-          </a:fillRef>
-          <a:effectRef idx="2">
-            <a:schemeClr val="accent1"/>
-          </a:effectRef>
-          <a:fontRef idx="minor">
-            <a:schemeClr val="lt1"/>
-          </a:fontRef>
-        </p:style>
-        <p:txBody>
-          <a:bodyPr rtlCol="0" anchor="ctr"/>
-          <a:lstStyle/>
-          <a:p>
-            <a:pPr algn="ctr"/>
-          </a:p>
-        </p:txBody>
-      </p:sp>
-      <p:sp>
-        <p:nvSpPr>
-          <p:cNvPr id="12" name="Rectangle 11"/>
-          <p:cNvSpPr/>
-          <p:nvPr/>
-        </p:nvSpPr>
-        <p:spPr>
-          <a:xfrm>
-            <a:off x="700000" y="2383333"/>
-            <a:ext cx="90000" cy="833333"/>
-          </a:xfrm>
-          <a:prstGeom prst="rect">
-            <a:avLst/>
-          </a:prstGeom>
-          <a:solidFill>
-            <a:srgbClr val="CC0000"/>
-          </a:solidFill>
-          <a:ln>
-            <a:noFill/>
-          </a:ln>
-        </p:spPr>
-        <p:style>
-          <a:lnRef idx="1">
-            <a:schemeClr val="accent1"/>
-          </a:lnRef>
-          <a:fillRef idx="3">
-            <a:schemeClr val="accent1"/>
-          </a:fillRef>
-          <a:effectRef idx="2">
-            <a:schemeClr val="accent1"/>
-          </a:effectRef>
-          <a:fontRef idx="minor">
-            <a:schemeClr val="lt1"/>
-          </a:fontRef>
-        </p:style>
-        <p:txBody>
-          <a:bodyPr rtlCol="0" anchor="ctr"/>
-          <a:lstStyle/>
-          <a:p>
-            <a:pPr algn="ctr"/>
-          </a:p>
-        </p:txBody>
-      </p:sp>
-      <p:sp>
-        <p:nvSpPr>
-          <p:cNvPr id="13" name="TextBox 12"/>
-          <p:cNvSpPr txBox="1"/>
-          <p:nvPr/>
-        </p:nvSpPr>
-        <p:spPr>
-          <a:xfrm>
-            <a:off x="1000000" y="2483333"/>
-            <a:ext cx="10400000" cy="633333"/>
-          </a:xfrm>
-          <a:prstGeom prst="rect">
-            <a:avLst/>
-          </a:prstGeom>
-          <a:noFill/>
-        </p:spPr>
-        <p:txBody>
-          <a:bodyPr wrap="square" anchor="ctr">
-            <a:spAutoFit/>
-          </a:bodyPr>
-          <a:lstStyle/>
-          <a:p>
-            <a:pPr algn="l"/>
-            <a:r>
-              <a:rPr sz="1300" b="0">
-                <a:solidFill>
-                  <a:srgbClr val="333333"/>
-                </a:solidFill>
-                <a:latin typeface="Open Sans"/>
-                <a:ea typeface="Open Sans"/>
-                <a:cs typeface="Open Sans"/>
-              </a:rPr>
-              <a:t>Ожог охлаждайте не менее 20 минут</a:t>
-            </a:r>
-          </a:p>
-        </p:txBody>
-      </p:sp>
-      <p:sp>
-        <p:nvSpPr>
-          <p:cNvPr id="14" name="Rectangle 13"/>
-          <p:cNvSpPr/>
-          <p:nvPr/>
-        </p:nvSpPr>
-        <p:spPr>
-          <a:xfrm>
-            <a:off x="700000" y="3316666"/>
-            <a:ext cx="11000000" cy="833333"/>
-          </a:xfrm>
-          <a:prstGeom prst="rect">
-            <a:avLst/>
-          </a:prstGeom>
-          <a:solidFill>
-            <a:srgbClr val="FFFFFF"/>
-          </a:solidFill>
-          <a:ln w="12700">
-            <a:solidFill>
-              <a:srgbClr val="999999"/>
-            </a:solidFill>
-          </a:ln>
-        </p:spPr>
-        <p:style>
-          <a:lnRef idx="1">
-            <a:schemeClr val="accent1"/>
-          </a:lnRef>
-          <a:fillRef idx="3">
-            <a:schemeClr val="accent1"/>
-          </a:fillRef>
-          <a:effectRef idx="2">
-            <a:schemeClr val="accent1"/>
-          </a:effectRef>
-          <a:fontRef idx="minor">
-            <a:schemeClr val="lt1"/>
-          </a:fontRef>
-        </p:style>
-        <p:txBody>
-          <a:bodyPr rtlCol="0" anchor="ctr"/>
-          <a:lstStyle/>
-          <a:p>
-            <a:pPr algn="ctr"/>
-          </a:p>
-        </p:txBody>
-      </p:sp>
-      <p:sp>
-        <p:nvSpPr>
-          <p:cNvPr id="15" name="Rectangle 14"/>
-          <p:cNvSpPr/>
-          <p:nvPr/>
-        </p:nvSpPr>
-        <p:spPr>
-          <a:xfrm>
-            <a:off x="700000" y="3316666"/>
-            <a:ext cx="90000" cy="833333"/>
-          </a:xfrm>
-          <a:prstGeom prst="rect">
-            <a:avLst/>
-          </a:prstGeom>
-          <a:solidFill>
-            <a:srgbClr val="CC0000"/>
-          </a:solidFill>
-          <a:ln>
-            <a:noFill/>
-          </a:ln>
-        </p:spPr>
-        <p:style>
-          <a:lnRef idx="1">
-            <a:schemeClr val="accent1"/>
-          </a:lnRef>
-          <a:fillRef idx="3">
-            <a:schemeClr val="accent1"/>
-          </a:fillRef>
-          <a:effectRef idx="2">
-            <a:schemeClr val="accent1"/>
-          </a:effectRef>
-          <a:fontRef idx="minor">
-            <a:schemeClr val="lt1"/>
-          </a:fontRef>
-        </p:style>
-        <p:txBody>
-          <a:bodyPr rtlCol="0" anchor="ctr"/>
-          <a:lstStyle/>
-          <a:p>
-            <a:pPr algn="ctr"/>
-          </a:p>
-        </p:txBody>
-      </p:sp>
-      <p:sp>
-        <p:nvSpPr>
-          <p:cNvPr id="16" name="TextBox 15"/>
-          <p:cNvSpPr txBox="1"/>
-          <p:nvPr/>
-        </p:nvSpPr>
-        <p:spPr>
-          <a:xfrm>
-            <a:off x="1000000" y="3416666"/>
-            <a:ext cx="10400000" cy="633333"/>
-          </a:xfrm>
-          <a:prstGeom prst="rect">
-            <a:avLst/>
-          </a:prstGeom>
-          <a:noFill/>
-        </p:spPr>
-        <p:txBody>
-          <a:bodyPr wrap="square" anchor="ctr">
-            <a:spAutoFit/>
-          </a:bodyPr>
-          <a:lstStyle/>
-          <a:p>
-            <a:pPr algn="l"/>
-            <a:r>
-              <a:rPr sz="1300" b="0">
-                <a:solidFill>
-                  <a:srgbClr val="333333"/>
-                </a:solidFill>
-                <a:latin typeface="Open Sans"/>
-                <a:ea typeface="Open Sans"/>
-                <a:cs typeface="Open Sans"/>
-              </a:rPr>
-              <a:t>Ладонь пострадавшего — около 1%</a:t>
-            </a:r>
-          </a:p>
-        </p:txBody>
-      </p:sp>
-      <p:sp>
-        <p:nvSpPr>
-          <p:cNvPr id="17" name="Rectangle 16"/>
-          <p:cNvSpPr/>
-          <p:nvPr/>
-        </p:nvSpPr>
-        <p:spPr>
-          <a:xfrm>
-            <a:off x="700000" y="4249999"/>
-            <a:ext cx="11000000" cy="833333"/>
-          </a:xfrm>
-          <a:prstGeom prst="rect">
-            <a:avLst/>
-          </a:prstGeom>
-          <a:solidFill>
-            <a:srgbClr val="FFFFFF"/>
-          </a:solidFill>
-          <a:ln w="12700">
-            <a:solidFill>
-              <a:srgbClr val="999999"/>
-            </a:solidFill>
-          </a:ln>
-        </p:spPr>
-        <p:style>
-          <a:lnRef idx="1">
-            <a:schemeClr val="accent1"/>
-          </a:lnRef>
-          <a:fillRef idx="3">
-            <a:schemeClr val="accent1"/>
-          </a:fillRef>
-          <a:effectRef idx="2">
-            <a:schemeClr val="accent1"/>
-          </a:effectRef>
-          <a:fontRef idx="minor">
-            <a:schemeClr val="lt1"/>
-          </a:fontRef>
-        </p:style>
-        <p:txBody>
-          <a:bodyPr rtlCol="0" anchor="ctr"/>
-          <a:lstStyle/>
-          <a:p>
-            <a:pPr algn="ctr"/>
-          </a:p>
-        </p:txBody>
-      </p:sp>
-      <p:sp>
-        <p:nvSpPr>
-          <p:cNvPr id="18" name="Rectangle 17"/>
-          <p:cNvSpPr/>
-          <p:nvPr/>
-        </p:nvSpPr>
-        <p:spPr>
-          <a:xfrm>
-            <a:off x="700000" y="4249999"/>
-            <a:ext cx="90000" cy="833333"/>
-          </a:xfrm>
-          <a:prstGeom prst="rect">
-            <a:avLst/>
-          </a:prstGeom>
-          <a:solidFill>
-            <a:srgbClr val="CC0000"/>
-          </a:solidFill>
-          <a:ln>
-            <a:noFill/>
-          </a:ln>
-        </p:spPr>
-        <p:style>
-          <a:lnRef idx="1">
-            <a:schemeClr val="accent1"/>
-          </a:lnRef>
-          <a:fillRef idx="3">
-            <a:schemeClr val="accent1"/>
-          </a:fillRef>
-          <a:effectRef idx="2">
-            <a:schemeClr val="accent1"/>
-          </a:effectRef>
-          <a:fontRef idx="minor">
-            <a:schemeClr val="lt1"/>
-          </a:fontRef>
-        </p:style>
-        <p:txBody>
-          <a:bodyPr rtlCol="0" anchor="ctr"/>
-          <a:lstStyle/>
-          <a:p>
-            <a:pPr algn="ctr"/>
-          </a:p>
-        </p:txBody>
-      </p:sp>
-      <p:sp>
-        <p:nvSpPr>
-          <p:cNvPr id="19" name="TextBox 18"/>
-          <p:cNvSpPr txBox="1"/>
-          <p:nvPr/>
-        </p:nvSpPr>
-        <p:spPr>
-          <a:xfrm>
-            <a:off x="1000000" y="4349999"/>
-            <a:ext cx="10400000" cy="633333"/>
-          </a:xfrm>
-          <a:prstGeom prst="rect">
-            <a:avLst/>
-          </a:prstGeom>
-          <a:noFill/>
-        </p:spPr>
-        <p:txBody>
-          <a:bodyPr wrap="square" anchor="ctr">
-            <a:spAutoFit/>
-          </a:bodyPr>
-          <a:lstStyle/>
-          <a:p>
-            <a:pPr algn="l"/>
-            <a:r>
-              <a:rPr sz="1300" b="0">
-                <a:solidFill>
-                  <a:srgbClr val="333333"/>
-                </a:solidFill>
-                <a:latin typeface="Open Sans"/>
-                <a:ea typeface="Open Sans"/>
-                <a:cs typeface="Open Sans"/>
-              </a:rPr>
-              <a:t>Отморожение не растирайте</a:t>
-            </a:r>
-          </a:p>
-        </p:txBody>
-      </p:sp>
-      <p:sp>
-        <p:nvSpPr>
-          <p:cNvPr id="20" name="Rectangle 19"/>
-          <p:cNvSpPr/>
-          <p:nvPr/>
-        </p:nvSpPr>
-        <p:spPr>
-          <a:xfrm>
-            <a:off x="700000" y="5183332"/>
-            <a:ext cx="11000000" cy="833333"/>
-          </a:xfrm>
-          <a:prstGeom prst="rect">
-            <a:avLst/>
-          </a:prstGeom>
-          <a:solidFill>
-            <a:srgbClr val="FFFFFF"/>
-          </a:solidFill>
-          <a:ln w="12700">
-            <a:solidFill>
-              <a:srgbClr val="999999"/>
-            </a:solidFill>
-          </a:ln>
-        </p:spPr>
-        <p:style>
-          <a:lnRef idx="1">
-            <a:schemeClr val="accent1"/>
-          </a:lnRef>
-          <a:fillRef idx="3">
-            <a:schemeClr val="accent1"/>
-          </a:fillRef>
-          <a:effectRef idx="2">
-            <a:schemeClr val="accent1"/>
-          </a:effectRef>
-          <a:fontRef idx="minor">
-            <a:schemeClr val="lt1"/>
-          </a:fontRef>
-        </p:style>
-        <p:txBody>
-          <a:bodyPr rtlCol="0" anchor="ctr"/>
-          <a:lstStyle/>
-          <a:p>
-            <a:pPr algn="ctr"/>
-          </a:p>
-        </p:txBody>
-      </p:sp>
-      <p:sp>
-        <p:nvSpPr>
-          <p:cNvPr id="21" name="Rectangle 20"/>
-          <p:cNvSpPr/>
-          <p:nvPr/>
-        </p:nvSpPr>
-        <p:spPr>
-          <a:xfrm>
-            <a:off x="700000" y="5183332"/>
-            <a:ext cx="90000" cy="833333"/>
-          </a:xfrm>
-          <a:prstGeom prst="rect">
-            <a:avLst/>
-          </a:prstGeom>
-          <a:solidFill>
-            <a:srgbClr val="CC0000"/>
-          </a:solidFill>
-          <a:ln>
-            <a:noFill/>
-          </a:ln>
-        </p:spPr>
-        <p:style>
-          <a:lnRef idx="1">
-            <a:schemeClr val="accent1"/>
-          </a:lnRef>
-          <a:fillRef idx="3">
-            <a:schemeClr val="accent1"/>
-          </a:fillRef>
-          <a:effectRef idx="2">
-            <a:schemeClr val="accent1"/>
-          </a:effectRef>
-          <a:fontRef idx="minor">
-            <a:schemeClr val="lt1"/>
-          </a:fontRef>
-        </p:style>
-        <p:txBody>
-          <a:bodyPr rtlCol="0" anchor="ctr"/>
-          <a:lstStyle/>
-          <a:p>
-            <a:pPr algn="ctr"/>
-          </a:p>
-        </p:txBody>
-      </p:sp>
-      <p:sp>
-        <p:nvSpPr>
-          <p:cNvPr id="22" name="TextBox 21"/>
-          <p:cNvSpPr txBox="1"/>
-          <p:nvPr/>
-        </p:nvSpPr>
-        <p:spPr>
-          <a:xfrm>
-            <a:off x="1000000" y="5283332"/>
-            <a:ext cx="10400000" cy="633333"/>
-          </a:xfrm>
-          <a:prstGeom prst="rect">
-            <a:avLst/>
-          </a:prstGeom>
-          <a:noFill/>
-        </p:spPr>
-        <p:txBody>
-          <a:bodyPr wrap="square" anchor="ctr">
-            <a:spAutoFit/>
-          </a:bodyPr>
-          <a:lstStyle/>
-          <a:p>
-            <a:pPr algn="l"/>
-            <a:r>
-              <a:rPr sz="1300" b="0">
-                <a:solidFill>
-                  <a:srgbClr val="333333"/>
-                </a:solidFill>
-                <a:latin typeface="Open Sans"/>
-                <a:ea typeface="Open Sans"/>
-                <a:cs typeface="Open Sans"/>
-              </a:rPr>
-              <a:t>Согревайте постепенно</a:t>
-            </a:r>
-          </a:p>
-        </p:txBody>
-      </p:sp>
-      <p:sp>
-        <p:nvSpPr>
-          <p:cNvPr id="23" name="Rectangle 22"/>
-          <p:cNvSpPr/>
-          <p:nvPr/>
-        </p:nvSpPr>
-        <p:spPr>
-          <a:xfrm>
-            <a:off x="700000" y="6116665"/>
-            <a:ext cx="11000000" cy="833333"/>
-          </a:xfrm>
-          <a:prstGeom prst="rect">
-            <a:avLst/>
-          </a:prstGeom>
-          <a:solidFill>
-            <a:srgbClr val="FFFFFF"/>
-          </a:solidFill>
-          <a:ln w="12700">
-            <a:solidFill>
-              <a:srgbClr val="999999"/>
-            </a:solidFill>
-          </a:ln>
-        </p:spPr>
-        <p:style>
-          <a:lnRef idx="1">
-            <a:schemeClr val="accent1"/>
-          </a:lnRef>
-          <a:fillRef idx="3">
-            <a:schemeClr val="accent1"/>
-          </a:fillRef>
-          <a:effectRef idx="2">
-            <a:schemeClr val="accent1"/>
-          </a:effectRef>
-          <a:fontRef idx="minor">
-            <a:schemeClr val="lt1"/>
-          </a:fontRef>
-        </p:style>
-        <p:txBody>
-          <a:bodyPr rtlCol="0" anchor="ctr"/>
-          <a:lstStyle/>
-          <a:p>
-            <a:pPr algn="ctr"/>
-          </a:p>
-        </p:txBody>
-      </p:sp>
-      <p:sp>
-        <p:nvSpPr>
-          <p:cNvPr id="24" name="Rectangle 23"/>
-          <p:cNvSpPr/>
-          <p:nvPr/>
-        </p:nvSpPr>
-        <p:spPr>
-          <a:xfrm>
-            <a:off x="700000" y="6116665"/>
-            <a:ext cx="90000" cy="833333"/>
-          </a:xfrm>
-          <a:prstGeom prst="rect">
-            <a:avLst/>
-          </a:prstGeom>
-          <a:solidFill>
-            <a:srgbClr val="CC0000"/>
-          </a:solidFill>
-          <a:ln>
-            <a:noFill/>
-          </a:ln>
-        </p:spPr>
-        <p:style>
-          <a:lnRef idx="1">
-            <a:schemeClr val="accent1"/>
-          </a:lnRef>
-          <a:fillRef idx="3">
-            <a:schemeClr val="accent1"/>
-          </a:fillRef>
-          <a:effectRef idx="2">
-            <a:schemeClr val="accent1"/>
-          </a:effectRef>
-          <a:fontRef idx="minor">
-            <a:schemeClr val="lt1"/>
-          </a:fontRef>
-        </p:style>
-        <p:txBody>
-          <a:bodyPr rtlCol="0" anchor="ctr"/>
-          <a:lstStyle/>
-          <a:p>
-            <a:pPr algn="ctr"/>
-          </a:p>
-        </p:txBody>
-      </p:sp>
-      <p:sp>
-        <p:nvSpPr>
-          <p:cNvPr id="25" name="TextBox 24"/>
-          <p:cNvSpPr txBox="1"/>
-          <p:nvPr/>
-        </p:nvSpPr>
-        <p:spPr>
-          <a:xfrm>
-            <a:off x="1000000" y="6216665"/>
-            <a:ext cx="10400000" cy="633333"/>
-          </a:xfrm>
-          <a:prstGeom prst="rect">
-            <a:avLst/>
-          </a:prstGeom>
-          <a:noFill/>
-        </p:spPr>
-        <p:txBody>
-          <a:bodyPr wrap="square" anchor="ctr">
-            <a:spAutoFit/>
-          </a:bodyPr>
-          <a:lstStyle/>
-          <a:p>
-            <a:pPr algn="l"/>
-            <a:r>
-              <a:rPr sz="1300" b="0">
-                <a:solidFill>
-                  <a:srgbClr val="333333"/>
-                </a:solidFill>
-                <a:latin typeface="Open Sans"/>
-                <a:ea typeface="Open Sans"/>
-                <a:cs typeface="Open Sans"/>
-              </a:rPr>
-              <a:t>Без сознания, но дышит — на бок</a:t>
+              <a:t>При нарушении сознания не давайте пить; при нормальном дыхании уложите на бок и вызовите скорую помощь.</a:t>
             </a:r>
           </a:p>
         </p:txBody>
